--- a/presentation/Apple_vs_Samsung_Presentation.pptx
+++ b/presentation/Apple_vs_Samsung_Presentation.pptx
@@ -6,9 +6,11 @@
   </p:sldMasterIdLst>
   <p:sldIdLst>
     <p:sldId id="256" r:id="rId2"/>
+    <p:sldId id="279" r:id="rId22"/>
     <p:sldId id="257" r:id="rId3"/>
     <p:sldId id="258" r:id="rId4"/>
     <p:sldId id="259" r:id="rId5"/>
+    <p:sldId id="280" r:id="rId30"/>
     <p:sldId id="260" r:id="rId6"/>
     <p:sldId id="261" r:id="rId7"/>
     <p:sldId id="262" r:id="rId8"/>
@@ -25,7 +27,6 @@
     <p:sldId id="273" r:id="rId19"/>
     <p:sldId id="274" r:id="rId20"/>
     <p:sldId id="275" r:id="rId21"/>
-    <p:sldId id="276" r:id="rId22"/>
     <p:sldId id="277" r:id="rId23"/>
     <p:sldId id="278" r:id="rId24"/>
   </p:sldIdLst>
@@ -1622,94 +1623,6 @@
 </p:notes>
 </file>
 
-<file path=ppt/notesSlides/notesSlide21.xml><?xml version="1.0" encoding="utf-8"?>
-<p:notes xmlns:a="http://schemas.openxmlformats.org/drawingml/2006/main" xmlns:r="http://schemas.openxmlformats.org/officeDocument/2006/relationships" xmlns:p="http://schemas.openxmlformats.org/presentationml/2006/main">
-  <p:cSld>
-    <p:spTree>
-      <p:nvGrpSpPr>
-        <p:cNvPr id="1" name=""/>
-        <p:cNvGrpSpPr/>
-        <p:nvPr/>
-      </p:nvGrpSpPr>
-      <p:grpSpPr>
-        <a:xfrm>
-          <a:off x="0" y="0"/>
-          <a:ext cx="0" cy="0"/>
-          <a:chOff x="0" y="0"/>
-          <a:chExt cx="0" cy="0"/>
-        </a:xfrm>
-      </p:grpSpPr>
-      <p:sp>
-        <p:nvSpPr>
-          <p:cNvPr id="2" name="Slide Image Placeholder 1"/>
-          <p:cNvSpPr>
-            <a:spLocks noGrp="1" noRot="1" noChangeAspect="1"/>
-          </p:cNvSpPr>
-          <p:nvPr>
-            <p:ph type="sldImg"/>
-          </p:nvPr>
-        </p:nvSpPr>
-        <p:spPr/>
-      </p:sp>
-      <p:sp>
-        <p:nvSpPr>
-          <p:cNvPr id="3" name="Notes Placeholder 2"/>
-          <p:cNvSpPr>
-            <a:spLocks noGrp="1"/>
-          </p:cNvSpPr>
-          <p:nvPr>
-            <p:ph type="body" idx="1"/>
-          </p:nvPr>
-        </p:nvSpPr>
-        <p:spPr/>
-        <p:txBody>
-          <a:bodyPr/>
-          <a:lstStyle/>
-          <a:p>
-            <a:r>
-              <a:rPr lang="en-US" dirty="0"/>
-              <a:t/>
-            </a:r>
-            <a:endParaRPr lang="en-US" dirty="0"/>
-          </a:p>
-        </p:txBody>
-      </p:sp>
-      <p:sp>
-        <p:nvSpPr>
-          <p:cNvPr id="4" name="Slide Number Placeholder 3"/>
-          <p:cNvSpPr>
-            <a:spLocks noGrp="1"/>
-          </p:cNvSpPr>
-          <p:nvPr>
-            <p:ph type="sldNum" sz="quarter" idx="10"/>
-          </p:nvPr>
-        </p:nvSpPr>
-        <p:spPr/>
-        <p:txBody>
-          <a:bodyPr/>
-          <a:lstStyle/>
-          <a:p>
-            <a:fld id="{F7021451-1387-4CA6-816F-3879F97B5CBC}" type="slidenum">
-              <a:rPr lang="en-US"/>
-              <a:t>21</a:t>
-            </a:fld>
-            <a:endParaRPr lang="en-US"/>
-          </a:p>
-        </p:txBody>
-      </p:sp>
-    </p:spTree>
-    <p:extLst>
-      <p:ext uri="{BB962C8B-B14F-4D97-AF65-F5344CB8AC3E}">
-        <p14:creationId xmlns:p14="http://schemas.microsoft.com/office/powerpoint/2010/main" val="1024086991"/>
-      </p:ext>
-    </p:extLst>
-  </p:cSld>
-  <p:clrMapOvr>
-    <a:masterClrMapping/>
-  </p:clrMapOvr>
-</p:notes>
-</file>
-
 <file path=ppt/notesSlides/notesSlide22.xml><?xml version="1.0" encoding="utf-8"?>
 <p:notes xmlns:a="http://schemas.openxmlformats.org/drawingml/2006/main" xmlns:r="http://schemas.openxmlformats.org/officeDocument/2006/relationships" xmlns:p="http://schemas.openxmlformats.org/presentationml/2006/main">
   <p:cSld>
@@ -2852,6 +2765,10 @@
           </a:solidFill>
           <a:ln/>
         </p:spPr>
+        <p:txBody>
+          <a:bodyPr/>
+          <a:p/>
+        </p:txBody>
       </p:sp>
       <p:sp>
         <p:nvSpPr>
@@ -2872,6 +2789,10 @@
           </a:solidFill>
           <a:ln/>
         </p:spPr>
+        <p:txBody>
+          <a:bodyPr/>
+          <a:p/>
+        </p:txBody>
       </p:sp>
       <p:sp>
         <p:nvSpPr>
@@ -2892,6 +2813,10 @@
           </a:solidFill>
           <a:ln/>
         </p:spPr>
+        <p:txBody>
+          <a:bodyPr/>
+          <a:p/>
+        </p:txBody>
       </p:sp>
       <p:sp>
         <p:nvSpPr>
@@ -2993,6 +2918,10 @@
             <a:prstDash val="solid"/>
           </a:ln>
         </p:spPr>
+        <p:txBody>
+          <a:bodyPr/>
+          <a:p/>
+        </p:txBody>
       </p:sp>
       <p:sp>
         <p:nvSpPr>
@@ -3186,7 +3115,7 @@
                 <a:ea typeface="Calibri" pitchFamily="34" charset="-122"/>
                 <a:cs typeface="Calibri" pitchFamily="34" charset="-120"/>
               </a:rPr>
-              <a:t>MTH 209  |  Spring 2026  |  Group Project</a:t>
+              <a:t>|  Spring 2026  |  Group Project</a:t>
             </a:r>
             <a:endParaRPr lang="en-US" sz="1200" dirty="0"/>
           </a:p>
@@ -3201,6 +3130,1151 @@
 </file>
 
 <file path=ppt/slides/slide10.xml><?xml version="1.0" encoding="utf-8"?>
+<p:sld xmlns:a="http://schemas.openxmlformats.org/drawingml/2006/main" xmlns:r="http://schemas.openxmlformats.org/officeDocument/2006/relationships" xmlns:p="http://schemas.openxmlformats.org/presentationml/2006/main">
+  <p:cSld name="Slide 9">
+    <p:bg>
+      <p:bgPr>
+        <a:solidFill>
+          <a:srgbClr val="F4F7FC"/>
+        </a:solidFill>
+      </p:bgPr>
+    </p:bg>
+    <p:spTree>
+      <p:nvGrpSpPr>
+        <p:cNvPr id="1" name=""/>
+        <p:cNvGrpSpPr/>
+        <p:nvPr/>
+      </p:nvGrpSpPr>
+      <p:grpSpPr>
+        <a:xfrm>
+          <a:off x="0" y="0"/>
+          <a:ext cx="0" cy="0"/>
+          <a:chOff x="0" y="0"/>
+          <a:chExt cx="0" cy="0"/>
+        </a:xfrm>
+      </p:grpSpPr>
+      <p:sp>
+        <p:nvSpPr>
+          <p:cNvPr id="2" name="Shape 0"/>
+          <p:cNvSpPr/>
+          <p:nvPr/>
+        </p:nvSpPr>
+        <p:spPr>
+          <a:xfrm>
+            <a:off x="0" y="0"/>
+            <a:ext cx="9144000" cy="749808"/>
+          </a:xfrm>
+          <a:prstGeom prst="rect">
+            <a:avLst/>
+          </a:prstGeom>
+          <a:solidFill>
+            <a:srgbClr val="1B2A4A"/>
+          </a:solidFill>
+          <a:ln/>
+        </p:spPr>
+      </p:sp>
+      <p:sp>
+        <p:nvSpPr>
+          <p:cNvPr id="3" name="Shape 1"/>
+          <p:cNvSpPr/>
+          <p:nvPr/>
+        </p:nvSpPr>
+        <p:spPr>
+          <a:xfrm>
+            <a:off x="8595360" y="146304"/>
+            <a:ext cx="228600" cy="228600"/>
+          </a:xfrm>
+          <a:prstGeom prst="ellipse">
+            <a:avLst/>
+          </a:prstGeom>
+          <a:solidFill>
+            <a:srgbClr val="1F77B4"/>
+          </a:solidFill>
+          <a:ln/>
+        </p:spPr>
+      </p:sp>
+      <p:sp>
+        <p:nvSpPr>
+          <p:cNvPr id="4" name="Shape 2"/>
+          <p:cNvSpPr/>
+          <p:nvPr/>
+        </p:nvSpPr>
+        <p:spPr>
+          <a:xfrm>
+            <a:off x="8823960" y="146304"/>
+            <a:ext cx="228600" cy="228600"/>
+          </a:xfrm>
+          <a:prstGeom prst="ellipse">
+            <a:avLst/>
+          </a:prstGeom>
+          <a:solidFill>
+            <a:srgbClr val="FF7F0E"/>
+          </a:solidFill>
+          <a:ln/>
+        </p:spPr>
+      </p:sp>
+      <p:sp>
+        <p:nvSpPr>
+          <p:cNvPr id="5" name="Text 3"/>
+          <p:cNvSpPr/>
+          <p:nvPr/>
+        </p:nvSpPr>
+        <p:spPr>
+          <a:xfrm>
+            <a:off x="365760" y="73152"/>
+            <a:ext cx="8046720" cy="594360"/>
+          </a:xfrm>
+          <a:prstGeom prst="rect">
+            <a:avLst/>
+          </a:prstGeom>
+          <a:noFill/>
+          <a:ln/>
+        </p:spPr>
+        <p:txBody>
+          <a:bodyPr wrap="square" lIns="0" tIns="0" rIns="0" bIns="0" rtlCol="0" anchor="ctr"/>
+          <a:lstStyle/>
+          <a:p>
+            <a:pPr indent="0" marL="0">
+              <a:buNone/>
+            </a:pPr>
+            <a:r>
+              <a:rPr lang="en-US" sz="2200" b="1" dirty="0">
+                <a:solidFill>
+                  <a:srgbClr val="FFFFFF"/>
+                </a:solidFill>
+                <a:latin typeface="Calibri" pitchFamily="34" charset="0"/>
+                <a:ea typeface="Calibri" pitchFamily="34" charset="-122"/>
+                <a:cs typeface="Calibri" pitchFamily="34" charset="-120"/>
+              </a:rPr>
+              <a:t>RQ 1 — Return Correlation: Rolling &amp; Annual Breakdown</a:t>
+            </a:r>
+            <a:endParaRPr lang="en-US" sz="2200" dirty="0"/>
+          </a:p>
+        </p:txBody>
+      </p:sp>
+      <p:pic>
+        <p:nvPicPr>
+          <p:cNvPr id="6" name="Image 0" descr="/sessions/zealous-optimistic-turing/mnt/Apple-vs-samsung---competitive-Financial-Market-analysis/plot2_rolling_correlation.png">    </p:cNvPr>
+          <p:cNvPicPr>
+            <a:picLocks noChangeAspect="1"/>
+          </p:cNvPicPr>
+          <p:nvPr/>
+        </p:nvPicPr>
+        <p:blipFill>
+          <a:blip r:embed="rId1"/>
+          <a:srcRect l="0" r="0" t="-4000" b="-4000"/>
+          <a:stretch/>
+        </p:blipFill>
+        <p:spPr>
+          <a:xfrm>
+            <a:off x="320040" y="822960"/>
+            <a:ext cx="5120640" cy="2468880"/>
+          </a:xfrm>
+          <a:prstGeom prst="rect">
+            <a:avLst/>
+          </a:prstGeom>
+        </p:spPr>
+      </p:pic>
+      <p:pic>
+        <p:nvPicPr>
+          <p:cNvPr id="7" name="Image 1" descr="/sessions/zealous-optimistic-turing/mnt/Apple-vs-samsung---competitive-Financial-Market-analysis/plot3_scatter_annual_corr.png">    </p:cNvPr>
+          <p:cNvPicPr>
+            <a:picLocks noChangeAspect="1"/>
+          </p:cNvPicPr>
+          <p:nvPr/>
+        </p:nvPicPr>
+        <p:blipFill>
+          <a:blip r:embed="rId2"/>
+          <a:srcRect l="-7143" r="-7143" t="0" b="0"/>
+          <a:stretch/>
+        </p:blipFill>
+        <p:spPr>
+          <a:xfrm>
+            <a:off x="320040" y="3200400"/>
+            <a:ext cx="5120640" cy="1600200"/>
+          </a:xfrm>
+          <a:prstGeom prst="rect">
+            <a:avLst/>
+          </a:prstGeom>
+        </p:spPr>
+      </p:pic>
+      <p:sp>
+        <p:nvSpPr>
+          <p:cNvPr id="8" name="Shape 4"/>
+          <p:cNvSpPr/>
+          <p:nvPr/>
+        </p:nvSpPr>
+        <p:spPr>
+          <a:xfrm>
+            <a:off x="5623560" y="822960"/>
+            <a:ext cx="3200400" cy="4114800"/>
+          </a:xfrm>
+          <a:prstGeom prst="rect">
+            <a:avLst/>
+          </a:prstGeom>
+          <a:solidFill>
+            <a:srgbClr val="FFFFFF"/>
+          </a:solidFill>
+          <a:ln/>
+          <a:effectLst>
+            <a:outerShdw sx="100000" sy="100000" kx="0" ky="0" algn="bl" rotWithShape="0" blurRad="101600" dist="38100" dir="8100000">
+              <a:srgbClr val="000000">
+                <a:alpha val="12000"/>
+              </a:srgbClr>
+            </a:outerShdw>
+          </a:effectLst>
+        </p:spPr>
+      </p:sp>
+      <p:sp>
+        <p:nvSpPr>
+          <p:cNvPr id="9" name="Shape 5"/>
+          <p:cNvSpPr/>
+          <p:nvPr/>
+        </p:nvSpPr>
+        <p:spPr>
+          <a:xfrm>
+            <a:off x="5623560" y="822960"/>
+            <a:ext cx="3200400" cy="109728"/>
+          </a:xfrm>
+          <a:prstGeom prst="rect">
+            <a:avLst/>
+          </a:prstGeom>
+          <a:solidFill>
+            <a:srgbClr val="1F77B4"/>
+          </a:solidFill>
+          <a:ln/>
+        </p:spPr>
+      </p:sp>
+      <p:sp>
+        <p:nvSpPr>
+          <p:cNvPr id="10" name="Text 6"/>
+          <p:cNvSpPr/>
+          <p:nvPr/>
+        </p:nvSpPr>
+        <p:spPr>
+          <a:xfrm>
+            <a:off x="5760720" y="960120"/>
+            <a:ext cx="2926080" cy="365760"/>
+          </a:xfrm>
+          <a:prstGeom prst="rect">
+            <a:avLst/>
+          </a:prstGeom>
+          <a:noFill/>
+          <a:ln/>
+        </p:spPr>
+        <p:txBody>
+          <a:bodyPr wrap="square" lIns="0" tIns="0" rIns="0" bIns="0" rtlCol="0" anchor="ctr"/>
+          <a:lstStyle/>
+          <a:p>
+            <a:pPr indent="0" marL="0">
+              <a:buNone/>
+            </a:pPr>
+            <a:r>
+              <a:rPr lang="en-US" sz="1300" b="1" dirty="0">
+                <a:solidFill>
+                  <a:srgbClr val="1B2A4A"/>
+                </a:solidFill>
+                <a:latin typeface="Calibri" pitchFamily="34" charset="0"/>
+                <a:ea typeface="Calibri" pitchFamily="34" charset="-122"/>
+                <a:cs typeface="Calibri" pitchFamily="34" charset="-120"/>
+              </a:rPr>
+              <a:t>Key Findings</a:t>
+            </a:r>
+            <a:endParaRPr lang="en-US" sz="1300" dirty="0"/>
+          </a:p>
+        </p:txBody>
+      </p:sp>
+      <p:sp>
+        <p:nvSpPr>
+          <p:cNvPr id="11" name="Shape 7"/>
+          <p:cNvSpPr/>
+          <p:nvPr/>
+        </p:nvSpPr>
+        <p:spPr>
+          <a:xfrm>
+            <a:off x="5715000" y="1417320"/>
+            <a:ext cx="2926080" cy="329184"/>
+          </a:xfrm>
+          <a:prstGeom prst="rect">
+            <a:avLst/>
+          </a:prstGeom>
+          <a:solidFill>
+            <a:srgbClr val="F0F4FF"/>
+          </a:solidFill>
+          <a:ln/>
+        </p:spPr>
+      </p:sp>
+      <p:sp>
+        <p:nvSpPr>
+          <p:cNvPr id="12" name="Text 8"/>
+          <p:cNvSpPr/>
+          <p:nvPr/>
+        </p:nvSpPr>
+        <p:spPr>
+          <a:xfrm>
+            <a:off x="5779008" y="1463040"/>
+            <a:ext cx="1554480" cy="256032"/>
+          </a:xfrm>
+          <a:prstGeom prst="rect">
+            <a:avLst/>
+          </a:prstGeom>
+          <a:noFill/>
+          <a:ln/>
+        </p:spPr>
+        <p:txBody>
+          <a:bodyPr wrap="square" lIns="0" tIns="0" rIns="0" bIns="0" rtlCol="0" anchor="ctr"/>
+          <a:lstStyle/>
+          <a:p>
+            <a:pPr indent="0" marL="0">
+              <a:buNone/>
+            </a:pPr>
+            <a:r>
+              <a:rPr lang="en-US" sz="950" dirty="0">
+                <a:solidFill>
+                  <a:srgbClr val="64748B"/>
+                </a:solidFill>
+                <a:latin typeface="Calibri" pitchFamily="34" charset="0"/>
+                <a:ea typeface="Calibri" pitchFamily="34" charset="-122"/>
+                <a:cs typeface="Calibri" pitchFamily="34" charset="-120"/>
+              </a:rPr>
+              <a:t>Overall r</a:t>
+            </a:r>
+            <a:endParaRPr lang="en-US" sz="950" dirty="0"/>
+          </a:p>
+        </p:txBody>
+      </p:sp>
+      <p:sp>
+        <p:nvSpPr>
+          <p:cNvPr id="13" name="Text 9"/>
+          <p:cNvSpPr/>
+          <p:nvPr/>
+        </p:nvSpPr>
+        <p:spPr>
+          <a:xfrm>
+            <a:off x="7315200" y="1463040"/>
+            <a:ext cx="1188720" cy="256032"/>
+          </a:xfrm>
+          <a:prstGeom prst="rect">
+            <a:avLst/>
+          </a:prstGeom>
+          <a:noFill/>
+          <a:ln/>
+        </p:spPr>
+        <p:txBody>
+          <a:bodyPr wrap="square" lIns="0" tIns="0" rIns="0" bIns="0" rtlCol="0" anchor="ctr"/>
+          <a:lstStyle/>
+          <a:p>
+            <a:pPr algn="r" indent="0" marL="0">
+              <a:buNone/>
+            </a:pPr>
+            <a:r>
+              <a:rPr lang="en-US" sz="950" b="1" dirty="0">
+                <a:solidFill>
+                  <a:srgbClr val="1B2A4A"/>
+                </a:solidFill>
+                <a:latin typeface="Calibri" pitchFamily="34" charset="0"/>
+                <a:ea typeface="Calibri" pitchFamily="34" charset="-122"/>
+                <a:cs typeface="Calibri" pitchFamily="34" charset="-120"/>
+              </a:rPr>
+              <a:t>0.068 (very low)</a:t>
+            </a:r>
+            <a:endParaRPr lang="en-US" sz="950" dirty="0"/>
+          </a:p>
+        </p:txBody>
+      </p:sp>
+      <p:sp>
+        <p:nvSpPr>
+          <p:cNvPr id="14" name="Shape 10"/>
+          <p:cNvSpPr/>
+          <p:nvPr/>
+        </p:nvSpPr>
+        <p:spPr>
+          <a:xfrm>
+            <a:off x="5715000" y="1810512"/>
+            <a:ext cx="2926080" cy="329184"/>
+          </a:xfrm>
+          <a:prstGeom prst="rect">
+            <a:avLst/>
+          </a:prstGeom>
+          <a:solidFill>
+            <a:srgbClr val="FFFFFF"/>
+          </a:solidFill>
+          <a:ln/>
+        </p:spPr>
+      </p:sp>
+      <p:sp>
+        <p:nvSpPr>
+          <p:cNvPr id="15" name="Text 11"/>
+          <p:cNvSpPr/>
+          <p:nvPr/>
+        </p:nvSpPr>
+        <p:spPr>
+          <a:xfrm>
+            <a:off x="5779008" y="1856232"/>
+            <a:ext cx="1554480" cy="256032"/>
+          </a:xfrm>
+          <a:prstGeom prst="rect">
+            <a:avLst/>
+          </a:prstGeom>
+          <a:noFill/>
+          <a:ln/>
+        </p:spPr>
+        <p:txBody>
+          <a:bodyPr wrap="square" lIns="0" tIns="0" rIns="0" bIns="0" rtlCol="0" anchor="ctr"/>
+          <a:lstStyle/>
+          <a:p>
+            <a:pPr indent="0" marL="0">
+              <a:buNone/>
+            </a:pPr>
+            <a:r>
+              <a:rPr lang="en-US" sz="950" dirty="0">
+                <a:solidFill>
+                  <a:srgbClr val="64748B"/>
+                </a:solidFill>
+                <a:latin typeface="Calibri" pitchFamily="34" charset="0"/>
+                <a:ea typeface="Calibri" pitchFamily="34" charset="-122"/>
+                <a:cs typeface="Calibri" pitchFamily="34" charset="-120"/>
+              </a:rPr>
+              <a:t>Peak corr.</a:t>
+            </a:r>
+            <a:endParaRPr lang="en-US" sz="950" dirty="0"/>
+          </a:p>
+        </p:txBody>
+      </p:sp>
+      <p:sp>
+        <p:nvSpPr>
+          <p:cNvPr id="16" name="Text 12"/>
+          <p:cNvSpPr/>
+          <p:nvPr/>
+        </p:nvSpPr>
+        <p:spPr>
+          <a:xfrm>
+            <a:off x="7315200" y="1856232"/>
+            <a:ext cx="1188720" cy="256032"/>
+          </a:xfrm>
+          <a:prstGeom prst="rect">
+            <a:avLst/>
+          </a:prstGeom>
+          <a:noFill/>
+          <a:ln/>
+        </p:spPr>
+        <p:txBody>
+          <a:bodyPr wrap="square" lIns="0" tIns="0" rIns="0" bIns="0" rtlCol="0" anchor="ctr"/>
+          <a:lstStyle/>
+          <a:p>
+            <a:pPr algn="r" indent="0" marL="0">
+              <a:buNone/>
+            </a:pPr>
+            <a:r>
+              <a:rPr lang="en-US" sz="950" b="1" dirty="0">
+                <a:solidFill>
+                  <a:srgbClr val="1B2A4A"/>
+                </a:solidFill>
+                <a:latin typeface="Calibri" pitchFamily="34" charset="0"/>
+                <a:ea typeface="Calibri" pitchFamily="34" charset="-122"/>
+                <a:cs typeface="Calibri" pitchFamily="34" charset="-120"/>
+              </a:rPr>
+              <a:t>~0.45 (COVID 2020)</a:t>
+            </a:r>
+            <a:endParaRPr lang="en-US" sz="950" dirty="0"/>
+          </a:p>
+        </p:txBody>
+      </p:sp>
+      <p:sp>
+        <p:nvSpPr>
+          <p:cNvPr id="17" name="Shape 13"/>
+          <p:cNvSpPr/>
+          <p:nvPr/>
+        </p:nvSpPr>
+        <p:spPr>
+          <a:xfrm>
+            <a:off x="5715000" y="2203704"/>
+            <a:ext cx="2926080" cy="329184"/>
+          </a:xfrm>
+          <a:prstGeom prst="rect">
+            <a:avLst/>
+          </a:prstGeom>
+          <a:solidFill>
+            <a:srgbClr val="F0F4FF"/>
+          </a:solidFill>
+          <a:ln/>
+        </p:spPr>
+      </p:sp>
+      <p:sp>
+        <p:nvSpPr>
+          <p:cNvPr id="18" name="Text 14"/>
+          <p:cNvSpPr/>
+          <p:nvPr/>
+        </p:nvSpPr>
+        <p:spPr>
+          <a:xfrm>
+            <a:off x="5779008" y="2249424"/>
+            <a:ext cx="1554480" cy="256032"/>
+          </a:xfrm>
+          <a:prstGeom prst="rect">
+            <a:avLst/>
+          </a:prstGeom>
+          <a:noFill/>
+          <a:ln/>
+        </p:spPr>
+        <p:txBody>
+          <a:bodyPr wrap="square" lIns="0" tIns="0" rIns="0" bIns="0" rtlCol="0" anchor="ctr"/>
+          <a:lstStyle/>
+          <a:p>
+            <a:pPr indent="0" marL="0">
+              <a:buNone/>
+            </a:pPr>
+            <a:r>
+              <a:rPr lang="en-US" sz="950" dirty="0">
+                <a:solidFill>
+                  <a:srgbClr val="64748B"/>
+                </a:solidFill>
+                <a:latin typeface="Calibri" pitchFamily="34" charset="0"/>
+                <a:ea typeface="Calibri" pitchFamily="34" charset="-122"/>
+                <a:cs typeface="Calibri" pitchFamily="34" charset="-120"/>
+              </a:rPr>
+              <a:t>Best year</a:t>
+            </a:r>
+            <a:endParaRPr lang="en-US" sz="950" dirty="0"/>
+          </a:p>
+        </p:txBody>
+      </p:sp>
+      <p:sp>
+        <p:nvSpPr>
+          <p:cNvPr id="19" name="Text 15"/>
+          <p:cNvSpPr/>
+          <p:nvPr/>
+        </p:nvSpPr>
+        <p:spPr>
+          <a:xfrm>
+            <a:off x="7315200" y="2249424"/>
+            <a:ext cx="1188720" cy="256032"/>
+          </a:xfrm>
+          <a:prstGeom prst="rect">
+            <a:avLst/>
+          </a:prstGeom>
+          <a:noFill/>
+          <a:ln/>
+        </p:spPr>
+        <p:txBody>
+          <a:bodyPr wrap="square" lIns="0" tIns="0" rIns="0" bIns="0" rtlCol="0" anchor="ctr"/>
+          <a:lstStyle/>
+          <a:p>
+            <a:pPr algn="r" indent="0" marL="0">
+              <a:buNone/>
+            </a:pPr>
+            <a:r>
+              <a:rPr lang="en-US" sz="950" b="1" dirty="0">
+                <a:solidFill>
+                  <a:srgbClr val="1B2A4A"/>
+                </a:solidFill>
+                <a:latin typeface="Calibri" pitchFamily="34" charset="0"/>
+                <a:ea typeface="Calibri" pitchFamily="34" charset="-122"/>
+                <a:cs typeface="Calibri" pitchFamily="34" charset="-120"/>
+              </a:rPr>
+              <a:t>2020: r = 0.44</a:t>
+            </a:r>
+            <a:endParaRPr lang="en-US" sz="950" dirty="0"/>
+          </a:p>
+        </p:txBody>
+      </p:sp>
+      <p:sp>
+        <p:nvSpPr>
+          <p:cNvPr id="20" name="Shape 16"/>
+          <p:cNvSpPr/>
+          <p:nvPr/>
+        </p:nvSpPr>
+        <p:spPr>
+          <a:xfrm>
+            <a:off x="5715000" y="2596896"/>
+            <a:ext cx="2926080" cy="329184"/>
+          </a:xfrm>
+          <a:prstGeom prst="rect">
+            <a:avLst/>
+          </a:prstGeom>
+          <a:solidFill>
+            <a:srgbClr val="FFFFFF"/>
+          </a:solidFill>
+          <a:ln/>
+        </p:spPr>
+      </p:sp>
+      <p:sp>
+        <p:nvSpPr>
+          <p:cNvPr id="21" name="Text 17"/>
+          <p:cNvSpPr/>
+          <p:nvPr/>
+        </p:nvSpPr>
+        <p:spPr>
+          <a:xfrm>
+            <a:off x="5779008" y="2642616"/>
+            <a:ext cx="1554480" cy="256032"/>
+          </a:xfrm>
+          <a:prstGeom prst="rect">
+            <a:avLst/>
+          </a:prstGeom>
+          <a:noFill/>
+          <a:ln/>
+        </p:spPr>
+        <p:txBody>
+          <a:bodyPr wrap="square" lIns="0" tIns="0" rIns="0" bIns="0" rtlCol="0" anchor="ctr"/>
+          <a:lstStyle/>
+          <a:p>
+            <a:pPr indent="0" marL="0">
+              <a:buNone/>
+            </a:pPr>
+            <a:r>
+              <a:rPr lang="en-US" sz="950" dirty="0">
+                <a:solidFill>
+                  <a:srgbClr val="64748B"/>
+                </a:solidFill>
+                <a:latin typeface="Calibri" pitchFamily="34" charset="0"/>
+                <a:ea typeface="Calibri" pitchFamily="34" charset="-122"/>
+                <a:cs typeface="Calibri" pitchFamily="34" charset="-120"/>
+              </a:rPr>
+              <a:t>Apple CAGR</a:t>
+            </a:r>
+            <a:endParaRPr lang="en-US" sz="950" dirty="0"/>
+          </a:p>
+        </p:txBody>
+      </p:sp>
+      <p:sp>
+        <p:nvSpPr>
+          <p:cNvPr id="22" name="Text 18"/>
+          <p:cNvSpPr/>
+          <p:nvPr/>
+        </p:nvSpPr>
+        <p:spPr>
+          <a:xfrm>
+            <a:off x="7315200" y="2642616"/>
+            <a:ext cx="1188720" cy="256032"/>
+          </a:xfrm>
+          <a:prstGeom prst="rect">
+            <a:avLst/>
+          </a:prstGeom>
+          <a:noFill/>
+          <a:ln/>
+        </p:spPr>
+        <p:txBody>
+          <a:bodyPr wrap="square" lIns="0" tIns="0" rIns="0" bIns="0" rtlCol="0" anchor="ctr"/>
+          <a:lstStyle/>
+          <a:p>
+            <a:pPr algn="r" indent="0" marL="0">
+              <a:buNone/>
+            </a:pPr>
+            <a:r>
+              <a:rPr lang="en-US" sz="950" b="1" dirty="0">
+                <a:solidFill>
+                  <a:srgbClr val="1B2A4A"/>
+                </a:solidFill>
+                <a:latin typeface="Calibri" pitchFamily="34" charset="0"/>
+                <a:ea typeface="Calibri" pitchFamily="34" charset="-122"/>
+                <a:cs typeface="Calibri" pitchFamily="34" charset="-120"/>
+              </a:rPr>
+              <a:t>31.0% annualized</a:t>
+            </a:r>
+            <a:endParaRPr lang="en-US" sz="950" dirty="0"/>
+          </a:p>
+        </p:txBody>
+      </p:sp>
+      <p:sp>
+        <p:nvSpPr>
+          <p:cNvPr id="23" name="Shape 19"/>
+          <p:cNvSpPr/>
+          <p:nvPr/>
+        </p:nvSpPr>
+        <p:spPr>
+          <a:xfrm>
+            <a:off x="5715000" y="2990088"/>
+            <a:ext cx="2926080" cy="329184"/>
+          </a:xfrm>
+          <a:prstGeom prst="rect">
+            <a:avLst/>
+          </a:prstGeom>
+          <a:solidFill>
+            <a:srgbClr val="F0F4FF"/>
+          </a:solidFill>
+          <a:ln/>
+        </p:spPr>
+      </p:sp>
+      <p:sp>
+        <p:nvSpPr>
+          <p:cNvPr id="24" name="Text 20"/>
+          <p:cNvSpPr/>
+          <p:nvPr/>
+        </p:nvSpPr>
+        <p:spPr>
+          <a:xfrm>
+            <a:off x="5779008" y="3035808"/>
+            <a:ext cx="1554480" cy="256032"/>
+          </a:xfrm>
+          <a:prstGeom prst="rect">
+            <a:avLst/>
+          </a:prstGeom>
+          <a:noFill/>
+          <a:ln/>
+        </p:spPr>
+        <p:txBody>
+          <a:bodyPr wrap="square" lIns="0" tIns="0" rIns="0" bIns="0" rtlCol="0" anchor="ctr"/>
+          <a:lstStyle/>
+          <a:p>
+            <a:pPr indent="0" marL="0">
+              <a:buNone/>
+            </a:pPr>
+            <a:r>
+              <a:rPr lang="en-US" sz="950" dirty="0">
+                <a:solidFill>
+                  <a:srgbClr val="64748B"/>
+                </a:solidFill>
+                <a:latin typeface="Calibri" pitchFamily="34" charset="0"/>
+                <a:ea typeface="Calibri" pitchFamily="34" charset="-122"/>
+                <a:cs typeface="Calibri" pitchFamily="34" charset="-120"/>
+              </a:rPr>
+              <a:t>Samsung CAGR</a:t>
+            </a:r>
+            <a:endParaRPr lang="en-US" sz="950" dirty="0"/>
+          </a:p>
+        </p:txBody>
+      </p:sp>
+      <p:sp>
+        <p:nvSpPr>
+          <p:cNvPr id="25" name="Text 21"/>
+          <p:cNvSpPr/>
+          <p:nvPr/>
+        </p:nvSpPr>
+        <p:spPr>
+          <a:xfrm>
+            <a:off x="7315200" y="3035808"/>
+            <a:ext cx="1188720" cy="256032"/>
+          </a:xfrm>
+          <a:prstGeom prst="rect">
+            <a:avLst/>
+          </a:prstGeom>
+          <a:noFill/>
+          <a:ln/>
+        </p:spPr>
+        <p:txBody>
+          <a:bodyPr wrap="square" lIns="0" tIns="0" rIns="0" bIns="0" rtlCol="0" anchor="ctr"/>
+          <a:lstStyle/>
+          <a:p>
+            <a:pPr algn="r" indent="0" marL="0">
+              <a:buNone/>
+            </a:pPr>
+            <a:r>
+              <a:rPr lang="en-US" sz="950" b="1" dirty="0">
+                <a:solidFill>
+                  <a:srgbClr val="1B2A4A"/>
+                </a:solidFill>
+                <a:latin typeface="Calibri" pitchFamily="34" charset="0"/>
+                <a:ea typeface="Calibri" pitchFamily="34" charset="-122"/>
+                <a:cs typeface="Calibri" pitchFamily="34" charset="-120"/>
+              </a:rPr>
+              <a:t>30.5% annualized</a:t>
+            </a:r>
+            <a:endParaRPr lang="en-US" sz="950" dirty="0"/>
+          </a:p>
+        </p:txBody>
+      </p:sp>
+      <p:sp>
+        <p:nvSpPr>
+          <p:cNvPr id="26" name="Shape 22"/>
+          <p:cNvSpPr/>
+          <p:nvPr/>
+        </p:nvSpPr>
+        <p:spPr>
+          <a:xfrm>
+            <a:off x="5715000" y="3383280"/>
+            <a:ext cx="2926080" cy="329184"/>
+          </a:xfrm>
+          <a:prstGeom prst="rect">
+            <a:avLst/>
+          </a:prstGeom>
+          <a:solidFill>
+            <a:srgbClr val="FFFFFF"/>
+          </a:solidFill>
+          <a:ln/>
+        </p:spPr>
+      </p:sp>
+      <p:sp>
+        <p:nvSpPr>
+          <p:cNvPr id="27" name="Text 23"/>
+          <p:cNvSpPr/>
+          <p:nvPr/>
+        </p:nvSpPr>
+        <p:spPr>
+          <a:xfrm>
+            <a:off x="5779008" y="3429000"/>
+            <a:ext cx="1554480" cy="256032"/>
+          </a:xfrm>
+          <a:prstGeom prst="rect">
+            <a:avLst/>
+          </a:prstGeom>
+          <a:noFill/>
+          <a:ln/>
+        </p:spPr>
+        <p:txBody>
+          <a:bodyPr wrap="square" lIns="0" tIns="0" rIns="0" bIns="0" rtlCol="0" anchor="ctr"/>
+          <a:lstStyle/>
+          <a:p>
+            <a:pPr indent="0" marL="0">
+              <a:buNone/>
+            </a:pPr>
+            <a:r>
+              <a:rPr lang="en-US" sz="950" dirty="0">
+                <a:solidFill>
+                  <a:srgbClr val="64748B"/>
+                </a:solidFill>
+                <a:latin typeface="Calibri" pitchFamily="34" charset="0"/>
+                <a:ea typeface="Calibri" pitchFamily="34" charset="-122"/>
+                <a:cs typeface="Calibri" pitchFamily="34" charset="-120"/>
+              </a:rPr>
+              <a:t>Apple vol.</a:t>
+            </a:r>
+            <a:endParaRPr lang="en-US" sz="950" dirty="0"/>
+          </a:p>
+        </p:txBody>
+      </p:sp>
+      <p:sp>
+        <p:nvSpPr>
+          <p:cNvPr id="28" name="Text 24"/>
+          <p:cNvSpPr/>
+          <p:nvPr/>
+        </p:nvSpPr>
+        <p:spPr>
+          <a:xfrm>
+            <a:off x="7315200" y="3429000"/>
+            <a:ext cx="1188720" cy="256032"/>
+          </a:xfrm>
+          <a:prstGeom prst="rect">
+            <a:avLst/>
+          </a:prstGeom>
+          <a:noFill/>
+          <a:ln/>
+        </p:spPr>
+        <p:txBody>
+          <a:bodyPr wrap="square" lIns="0" tIns="0" rIns="0" bIns="0" rtlCol="0" anchor="ctr"/>
+          <a:lstStyle/>
+          <a:p>
+            <a:pPr algn="r" indent="0" marL="0">
+              <a:buNone/>
+            </a:pPr>
+            <a:r>
+              <a:rPr lang="en-US" sz="950" b="1" dirty="0">
+                <a:solidFill>
+                  <a:srgbClr val="1B2A4A"/>
+                </a:solidFill>
+                <a:latin typeface="Calibri" pitchFamily="34" charset="0"/>
+                <a:ea typeface="Calibri" pitchFamily="34" charset="-122"/>
+                <a:cs typeface="Calibri" pitchFamily="34" charset="-120"/>
+              </a:rPr>
+              <a:t>29.4% annualized</a:t>
+            </a:r>
+            <a:endParaRPr lang="en-US" sz="950" dirty="0"/>
+          </a:p>
+        </p:txBody>
+      </p:sp>
+      <p:sp>
+        <p:nvSpPr>
+          <p:cNvPr id="29" name="Shape 25"/>
+          <p:cNvSpPr/>
+          <p:nvPr/>
+        </p:nvSpPr>
+        <p:spPr>
+          <a:xfrm>
+            <a:off x="5715000" y="3776472"/>
+            <a:ext cx="2926080" cy="329184"/>
+          </a:xfrm>
+          <a:prstGeom prst="rect">
+            <a:avLst/>
+          </a:prstGeom>
+          <a:solidFill>
+            <a:srgbClr val="F0F4FF"/>
+          </a:solidFill>
+          <a:ln/>
+        </p:spPr>
+      </p:sp>
+      <p:sp>
+        <p:nvSpPr>
+          <p:cNvPr id="30" name="Text 26"/>
+          <p:cNvSpPr/>
+          <p:nvPr/>
+        </p:nvSpPr>
+        <p:spPr>
+          <a:xfrm>
+            <a:off x="5779008" y="3822192"/>
+            <a:ext cx="1554480" cy="256032"/>
+          </a:xfrm>
+          <a:prstGeom prst="rect">
+            <a:avLst/>
+          </a:prstGeom>
+          <a:noFill/>
+          <a:ln/>
+        </p:spPr>
+        <p:txBody>
+          <a:bodyPr wrap="square" lIns="0" tIns="0" rIns="0" bIns="0" rtlCol="0" anchor="ctr"/>
+          <a:lstStyle/>
+          <a:p>
+            <a:pPr indent="0" marL="0">
+              <a:buNone/>
+            </a:pPr>
+            <a:r>
+              <a:rPr lang="en-US" sz="950" dirty="0">
+                <a:solidFill>
+                  <a:srgbClr val="64748B"/>
+                </a:solidFill>
+                <a:latin typeface="Calibri" pitchFamily="34" charset="0"/>
+                <a:ea typeface="Calibri" pitchFamily="34" charset="-122"/>
+                <a:cs typeface="Calibri" pitchFamily="34" charset="-120"/>
+              </a:rPr>
+              <a:t>Samsung vol.</a:t>
+            </a:r>
+            <a:endParaRPr lang="en-US" sz="950" dirty="0"/>
+          </a:p>
+        </p:txBody>
+      </p:sp>
+      <p:sp>
+        <p:nvSpPr>
+          <p:cNvPr id="31" name="Text 27"/>
+          <p:cNvSpPr/>
+          <p:nvPr/>
+        </p:nvSpPr>
+        <p:spPr>
+          <a:xfrm>
+            <a:off x="7315200" y="3822192"/>
+            <a:ext cx="1188720" cy="256032"/>
+          </a:xfrm>
+          <a:prstGeom prst="rect">
+            <a:avLst/>
+          </a:prstGeom>
+          <a:noFill/>
+          <a:ln/>
+        </p:spPr>
+        <p:txBody>
+          <a:bodyPr wrap="square" lIns="0" tIns="0" rIns="0" bIns="0" rtlCol="0" anchor="ctr"/>
+          <a:lstStyle/>
+          <a:p>
+            <a:pPr algn="r" indent="0" marL="0">
+              <a:buNone/>
+            </a:pPr>
+            <a:r>
+              <a:rPr lang="en-US" sz="950" b="1" dirty="0">
+                <a:solidFill>
+                  <a:srgbClr val="1B2A4A"/>
+                </a:solidFill>
+                <a:latin typeface="Calibri" pitchFamily="34" charset="0"/>
+                <a:ea typeface="Calibri" pitchFamily="34" charset="-122"/>
+                <a:cs typeface="Calibri" pitchFamily="34" charset="-120"/>
+              </a:rPr>
+              <a:t>29.9% annualized</a:t>
+            </a:r>
+            <a:endParaRPr lang="en-US" sz="950" dirty="0"/>
+          </a:p>
+        </p:txBody>
+      </p:sp>
+      <p:sp>
+        <p:nvSpPr>
+          <p:cNvPr id="32" name="Shape 28"/>
+          <p:cNvSpPr/>
+          <p:nvPr/>
+        </p:nvSpPr>
+        <p:spPr>
+          <a:xfrm>
+            <a:off x="5715000" y="4169664"/>
+            <a:ext cx="2926080" cy="329184"/>
+          </a:xfrm>
+          <a:prstGeom prst="rect">
+            <a:avLst/>
+          </a:prstGeom>
+          <a:solidFill>
+            <a:srgbClr val="FFFFFF"/>
+          </a:solidFill>
+          <a:ln/>
+        </p:spPr>
+      </p:sp>
+      <p:sp>
+        <p:nvSpPr>
+          <p:cNvPr id="33" name="Text 29"/>
+          <p:cNvSpPr/>
+          <p:nvPr/>
+        </p:nvSpPr>
+        <p:spPr>
+          <a:xfrm>
+            <a:off x="5779008" y="4215384"/>
+            <a:ext cx="1554480" cy="256032"/>
+          </a:xfrm>
+          <a:prstGeom prst="rect">
+            <a:avLst/>
+          </a:prstGeom>
+          <a:noFill/>
+          <a:ln/>
+        </p:spPr>
+        <p:txBody>
+          <a:bodyPr wrap="square" lIns="0" tIns="0" rIns="0" bIns="0" rtlCol="0" anchor="ctr"/>
+          <a:lstStyle/>
+          <a:p>
+            <a:pPr indent="0" marL="0">
+              <a:buNone/>
+            </a:pPr>
+            <a:r>
+              <a:rPr lang="en-US" sz="950" dirty="0">
+                <a:solidFill>
+                  <a:srgbClr val="64748B"/>
+                </a:solidFill>
+                <a:latin typeface="Calibri" pitchFamily="34" charset="0"/>
+                <a:ea typeface="Calibri" pitchFamily="34" charset="-122"/>
+                <a:cs typeface="Calibri" pitchFamily="34" charset="-120"/>
+              </a:rPr>
+              <a:t>Apple Sharpe</a:t>
+            </a:r>
+            <a:endParaRPr lang="en-US" sz="950" dirty="0"/>
+          </a:p>
+        </p:txBody>
+      </p:sp>
+      <p:sp>
+        <p:nvSpPr>
+          <p:cNvPr id="34" name="Text 30"/>
+          <p:cNvSpPr/>
+          <p:nvPr/>
+        </p:nvSpPr>
+        <p:spPr>
+          <a:xfrm>
+            <a:off x="7315200" y="4215384"/>
+            <a:ext cx="1188720" cy="256032"/>
+          </a:xfrm>
+          <a:prstGeom prst="rect">
+            <a:avLst/>
+          </a:prstGeom>
+          <a:noFill/>
+          <a:ln/>
+        </p:spPr>
+        <p:txBody>
+          <a:bodyPr wrap="square" lIns="0" tIns="0" rIns="0" bIns="0" rtlCol="0" anchor="ctr"/>
+          <a:lstStyle/>
+          <a:p>
+            <a:pPr algn="r" indent="0" marL="0">
+              <a:buNone/>
+            </a:pPr>
+            <a:r>
+              <a:rPr lang="en-US" sz="950" b="1" dirty="0">
+                <a:solidFill>
+                  <a:srgbClr val="1B2A4A"/>
+                </a:solidFill>
+                <a:latin typeface="Calibri" pitchFamily="34" charset="0"/>
+                <a:ea typeface="Calibri" pitchFamily="34" charset="-122"/>
+                <a:cs typeface="Calibri" pitchFamily="34" charset="-120"/>
+              </a:rPr>
+              <a:t>1.05</a:t>
+            </a:r>
+            <a:endParaRPr lang="en-US" sz="950" dirty="0"/>
+          </a:p>
+        </p:txBody>
+      </p:sp>
+      <p:sp>
+        <p:nvSpPr>
+          <p:cNvPr id="35" name="Shape 31"/>
+          <p:cNvSpPr/>
+          <p:nvPr/>
+        </p:nvSpPr>
+        <p:spPr>
+          <a:xfrm>
+            <a:off x="5715000" y="4562856"/>
+            <a:ext cx="2926080" cy="329184"/>
+          </a:xfrm>
+          <a:prstGeom prst="rect">
+            <a:avLst/>
+          </a:prstGeom>
+          <a:solidFill>
+            <a:srgbClr val="F0F4FF"/>
+          </a:solidFill>
+          <a:ln/>
+        </p:spPr>
+      </p:sp>
+      <p:sp>
+        <p:nvSpPr>
+          <p:cNvPr id="36" name="Text 32"/>
+          <p:cNvSpPr/>
+          <p:nvPr/>
+        </p:nvSpPr>
+        <p:spPr>
+          <a:xfrm>
+            <a:off x="5779008" y="4608576"/>
+            <a:ext cx="1554480" cy="256032"/>
+          </a:xfrm>
+          <a:prstGeom prst="rect">
+            <a:avLst/>
+          </a:prstGeom>
+          <a:noFill/>
+          <a:ln/>
+        </p:spPr>
+        <p:txBody>
+          <a:bodyPr wrap="square" lIns="0" tIns="0" rIns="0" bIns="0" rtlCol="0" anchor="ctr"/>
+          <a:lstStyle/>
+          <a:p>
+            <a:pPr indent="0" marL="0">
+              <a:buNone/>
+            </a:pPr>
+            <a:r>
+              <a:rPr lang="en-US" sz="950" dirty="0">
+                <a:solidFill>
+                  <a:srgbClr val="64748B"/>
+                </a:solidFill>
+                <a:latin typeface="Calibri" pitchFamily="34" charset="0"/>
+                <a:ea typeface="Calibri" pitchFamily="34" charset="-122"/>
+                <a:cs typeface="Calibri" pitchFamily="34" charset="-120"/>
+              </a:rPr>
+              <a:t>Samsung Sharpe</a:t>
+            </a:r>
+            <a:endParaRPr lang="en-US" sz="950" dirty="0"/>
+          </a:p>
+        </p:txBody>
+      </p:sp>
+      <p:sp>
+        <p:nvSpPr>
+          <p:cNvPr id="37" name="Text 33"/>
+          <p:cNvSpPr/>
+          <p:nvPr/>
+        </p:nvSpPr>
+        <p:spPr>
+          <a:xfrm>
+            <a:off x="7315200" y="4608576"/>
+            <a:ext cx="1188720" cy="256032"/>
+          </a:xfrm>
+          <a:prstGeom prst="rect">
+            <a:avLst/>
+          </a:prstGeom>
+          <a:noFill/>
+          <a:ln/>
+        </p:spPr>
+        <p:txBody>
+          <a:bodyPr wrap="square" lIns="0" tIns="0" rIns="0" bIns="0" rtlCol="0" anchor="ctr"/>
+          <a:lstStyle/>
+          <a:p>
+            <a:pPr algn="r" indent="0" marL="0">
+              <a:buNone/>
+            </a:pPr>
+            <a:r>
+              <a:rPr lang="en-US" sz="950" b="1" dirty="0">
+                <a:solidFill>
+                  <a:srgbClr val="1B2A4A"/>
+                </a:solidFill>
+                <a:latin typeface="Calibri" pitchFamily="34" charset="0"/>
+                <a:ea typeface="Calibri" pitchFamily="34" charset="-122"/>
+                <a:cs typeface="Calibri" pitchFamily="34" charset="-120"/>
+              </a:rPr>
+              <a:t>1.02</a:t>
+            </a:r>
+            <a:endParaRPr lang="en-US" sz="950" dirty="0"/>
+          </a:p>
+        </p:txBody>
+      </p:sp>
+    </p:spTree>
+  </p:cSld>
+  <p:clrMapOvr>
+    <a:masterClrMapping/>
+  </p:clrMapOvr>
+</p:sld>
+</file>
+
+<file path=ppt/slides/slide11.xml><?xml version="1.0" encoding="utf-8"?>
 <p:sld xmlns:a="http://schemas.openxmlformats.org/drawingml/2006/main" xmlns:r="http://schemas.openxmlformats.org/officeDocument/2006/relationships" xmlns:p="http://schemas.openxmlformats.org/presentationml/2006/main">
   <p:cSld name="Slide 10">
     <p:bg>
@@ -3420,7 +4494,7 @@
 </p:sld>
 </file>
 
-<file path=ppt/slides/slide11.xml><?xml version="1.0" encoding="utf-8"?>
+<file path=ppt/slides/slide12.xml><?xml version="1.0" encoding="utf-8"?>
 <p:sld xmlns:a="http://schemas.openxmlformats.org/drawingml/2006/main" xmlns:r="http://schemas.openxmlformats.org/officeDocument/2006/relationships" xmlns:p="http://schemas.openxmlformats.org/presentationml/2006/main">
   <p:cSld name="Slide 11">
     <p:bg>
@@ -3570,7 +4644,7 @@
 </p:sld>
 </file>
 
-<file path=ppt/slides/slide12.xml><?xml version="1.0" encoding="utf-8"?>
+<file path=ppt/slides/slide13.xml><?xml version="1.0" encoding="utf-8"?>
 <p:sld xmlns:a="http://schemas.openxmlformats.org/drawingml/2006/main" xmlns:r="http://schemas.openxmlformats.org/officeDocument/2006/relationships" xmlns:p="http://schemas.openxmlformats.org/presentationml/2006/main">
   <p:cSld name="Slide 12">
     <p:bg>
@@ -3842,7 +4916,7 @@
 </p:sld>
 </file>
 
-<file path=ppt/slides/slide13.xml><?xml version="1.0" encoding="utf-8"?>
+<file path=ppt/slides/slide14.xml><?xml version="1.0" encoding="utf-8"?>
 <p:sld xmlns:a="http://schemas.openxmlformats.org/drawingml/2006/main" xmlns:r="http://schemas.openxmlformats.org/officeDocument/2006/relationships" xmlns:p="http://schemas.openxmlformats.org/presentationml/2006/main">
   <p:cSld name="Slide 13">
     <p:bg>
@@ -5088,7 +6162,7 @@
 </p:sld>
 </file>
 
-<file path=ppt/slides/slide14.xml><?xml version="1.0" encoding="utf-8"?>
+<file path=ppt/slides/slide15.xml><?xml version="1.0" encoding="utf-8"?>
 <p:sld xmlns:a="http://schemas.openxmlformats.org/drawingml/2006/main" xmlns:r="http://schemas.openxmlformats.org/officeDocument/2006/relationships" xmlns:p="http://schemas.openxmlformats.org/presentationml/2006/main">
   <p:cSld name="Slide 14">
     <p:bg>
@@ -5492,7 +6566,7 @@
 </p:sld>
 </file>
 
-<file path=ppt/slides/slide15.xml><?xml version="1.0" encoding="utf-8"?>
+<file path=ppt/slides/slide16.xml><?xml version="1.0" encoding="utf-8"?>
 <p:sld xmlns:a="http://schemas.openxmlformats.org/drawingml/2006/main" xmlns:r="http://schemas.openxmlformats.org/officeDocument/2006/relationships" xmlns:p="http://schemas.openxmlformats.org/presentationml/2006/main">
   <p:cSld name="Slide 15">
     <p:bg>
@@ -5642,7 +6716,7 @@
 </p:sld>
 </file>
 
-<file path=ppt/slides/slide16.xml><?xml version="1.0" encoding="utf-8"?>
+<file path=ppt/slides/slide17.xml><?xml version="1.0" encoding="utf-8"?>
 <p:sld xmlns:a="http://schemas.openxmlformats.org/drawingml/2006/main" xmlns:r="http://schemas.openxmlformats.org/officeDocument/2006/relationships" xmlns:p="http://schemas.openxmlformats.org/presentationml/2006/main">
   <p:cSld name="Slide 16">
     <p:bg>
@@ -6272,7 +7346,7 @@
 </p:sld>
 </file>
 
-<file path=ppt/slides/slide17.xml><?xml version="1.0" encoding="utf-8"?>
+<file path=ppt/slides/slide18.xml><?xml version="1.0" encoding="utf-8"?>
 <p:sld xmlns:a="http://schemas.openxmlformats.org/drawingml/2006/main" xmlns:r="http://schemas.openxmlformats.org/officeDocument/2006/relationships" xmlns:p="http://schemas.openxmlformats.org/presentationml/2006/main">
   <p:cSld name="Slide 17">
     <p:bg>
@@ -7139,7 +8213,7 @@
 </p:sld>
 </file>
 
-<file path=ppt/slides/slide18.xml><?xml version="1.0" encoding="utf-8"?>
+<file path=ppt/slides/slide19.xml><?xml version="1.0" encoding="utf-8"?>
 <p:sld xmlns:a="http://schemas.openxmlformats.org/drawingml/2006/main" xmlns:r="http://schemas.openxmlformats.org/officeDocument/2006/relationships" xmlns:p="http://schemas.openxmlformats.org/presentationml/2006/main">
   <p:cSld name="Slide 18">
     <p:bg>
@@ -8263,7 +9337,638 @@
 </p:sld>
 </file>
 
-<file path=ppt/slides/slide19.xml><?xml version="1.0" encoding="utf-8"?>
+<file path=ppt/slides/slide2.xml><?xml version="1.0" encoding="utf-8"?>
+<p:sld xmlns:a="http://schemas.openxmlformats.org/drawingml/2006/main" xmlns:p="http://schemas.openxmlformats.org/presentationml/2006/main" xmlns:r="http://schemas.openxmlformats.org/officeDocument/2006/relationships">
+  <p:cSld>
+    <p:bg>
+      <p:bgPr>
+        <a:solidFill>
+          <a:srgbClr val="0A1F44"/>
+        </a:solidFill>
+        <a:effectLst/>
+      </p:bgPr>
+    </p:bg>
+    <p:spTree>
+      <p:nvGrpSpPr>
+        <p:cNvPr id="1" name=""/>
+        <p:cNvGrpSpPr/>
+        <p:nvPr/>
+      </p:nvGrpSpPr>
+      <p:grpSpPr/>
+      <p:sp>
+        <p:nvSpPr>
+          <p:cNvPr id="2" name="Rectangle 1"/>
+          <p:cNvSpPr/>
+          <p:nvPr/>
+        </p:nvSpPr>
+        <p:spPr>
+          <a:xfrm>
+            <a:off x="0" y="0"/>
+            <a:ext cx="12191695" cy="1051560"/>
+          </a:xfrm>
+          <a:prstGeom prst="rect">
+            <a:avLst/>
+          </a:prstGeom>
+          <a:solidFill>
+            <a:srgbClr val="1A6BC8"/>
+          </a:solidFill>
+          <a:ln>
+            <a:noFill/>
+          </a:ln>
+        </p:spPr>
+        <p:style>
+          <a:lnRef idx="1">
+            <a:schemeClr val="accent1"/>
+          </a:lnRef>
+          <a:fillRef idx="3">
+            <a:schemeClr val="accent1"/>
+          </a:fillRef>
+          <a:effectRef idx="2">
+            <a:schemeClr val="accent1"/>
+          </a:effectRef>
+          <a:fontRef idx="minor">
+            <a:schemeClr val="lt1"/>
+          </a:fontRef>
+        </p:style>
+        <p:txBody>
+          <a:bodyPr rtlCol="0" anchor="ctr"/>
+          <a:lstStyle/>
+          <a:p>
+            <a:pPr algn="ctr"/>
+            <a:r>
+              <a:rPr b="1" sz="3400">
+                <a:solidFill>
+                  <a:srgbClr val="FFFFFF"/>
+                </a:solidFill>
+              </a:rPr>
+              <a:t>Meet the Team</a:t>
+            </a:r>
+          </a:p>
+        </p:txBody>
+      </p:sp>
+      <p:sp>
+        <p:nvSpPr>
+          <p:cNvPr id="3" name="TextBox 2"/>
+          <p:cNvSpPr txBox="1"/>
+          <p:nvPr/>
+        </p:nvSpPr>
+        <p:spPr>
+          <a:xfrm>
+            <a:off x="457200" y="1143000"/>
+            <a:ext cx="11277295" cy="365760"/>
+          </a:xfrm>
+          <a:prstGeom prst="rect">
+            <a:avLst/>
+          </a:prstGeom>
+          <a:noFill/>
+        </p:spPr>
+        <p:txBody>
+          <a:bodyPr wrap="none">
+            <a:spAutoFit/>
+          </a:bodyPr>
+          <a:lstStyle/>
+          <a:p>
+            <a:pPr algn="ctr"/>
+            <a:r>
+              <a:rPr sz="1300" i="1">
+                <a:solidFill>
+                  <a:srgbClr val="AAAAAA"/>
+                </a:solidFill>
+              </a:rPr>
+              <a:t>Apple vs Samsung — Competitive Financial &amp; Market Analysis</a:t>
+            </a:r>
+          </a:p>
+        </p:txBody>
+      </p:sp>
+      <p:sp>
+        <p:nvSpPr>
+          <p:cNvPr id="4" name="Rectangle 3"/>
+          <p:cNvSpPr/>
+          <p:nvPr/>
+        </p:nvSpPr>
+        <p:spPr>
+          <a:xfrm>
+            <a:off x="723747" y="1691640"/>
+            <a:ext cx="2377440" cy="3474720"/>
+          </a:xfrm>
+          <a:prstGeom prst="rect">
+            <a:avLst/>
+          </a:prstGeom>
+          <a:solidFill>
+            <a:srgbClr val="F0F4FA"/>
+          </a:solidFill>
+          <a:ln w="19050">
+            <a:solidFill>
+              <a:srgbClr val="1A6BC8"/>
+            </a:solidFill>
+          </a:ln>
+        </p:spPr>
+        <p:style>
+          <a:lnRef idx="1">
+            <a:schemeClr val="accent1"/>
+          </a:lnRef>
+          <a:fillRef idx="3">
+            <a:schemeClr val="accent1"/>
+          </a:fillRef>
+          <a:effectRef idx="2">
+            <a:schemeClr val="accent1"/>
+          </a:effectRef>
+          <a:fontRef idx="minor">
+            <a:schemeClr val="lt1"/>
+          </a:fontRef>
+        </p:style>
+        <p:txBody>
+          <a:bodyPr rtlCol="0" anchor="ctr"/>
+          <a:lstStyle/>
+          <a:p>
+            <a:pPr algn="ctr"/>
+          </a:p>
+        </p:txBody>
+      </p:sp>
+      <p:sp>
+        <p:nvSpPr>
+          <p:cNvPr id="5" name="Oval 4"/>
+          <p:cNvSpPr/>
+          <p:nvPr/>
+        </p:nvSpPr>
+        <p:spPr>
+          <a:xfrm>
+            <a:off x="1409547" y="1920240"/>
+            <a:ext cx="1005840" cy="1005840"/>
+          </a:xfrm>
+          <a:prstGeom prst="ellipse">
+            <a:avLst/>
+          </a:prstGeom>
+          <a:solidFill>
+            <a:srgbClr val="1A6BC8"/>
+          </a:solidFill>
+          <a:ln>
+            <a:noFill/>
+          </a:ln>
+        </p:spPr>
+        <p:style>
+          <a:lnRef idx="1">
+            <a:schemeClr val="accent1"/>
+          </a:lnRef>
+          <a:fillRef idx="3">
+            <a:schemeClr val="accent1"/>
+          </a:fillRef>
+          <a:effectRef idx="2">
+            <a:schemeClr val="accent1"/>
+          </a:effectRef>
+          <a:fontRef idx="minor">
+            <a:schemeClr val="lt1"/>
+          </a:fontRef>
+        </p:style>
+        <p:txBody>
+          <a:bodyPr rtlCol="0" anchor="ctr"/>
+          <a:lstStyle/>
+          <a:p>
+            <a:pPr algn="ctr"/>
+            <a:r>
+              <a:rPr b="1" sz="1800">
+                <a:solidFill>
+                  <a:srgbClr val="FFFFFF"/>
+                </a:solidFill>
+              </a:rPr>
+              <a:t>AA</a:t>
+            </a:r>
+          </a:p>
+        </p:txBody>
+      </p:sp>
+      <p:sp>
+        <p:nvSpPr>
+          <p:cNvPr id="6" name="TextBox 5"/>
+          <p:cNvSpPr txBox="1"/>
+          <p:nvPr/>
+        </p:nvSpPr>
+        <p:spPr>
+          <a:xfrm>
+            <a:off x="815187" y="3063240"/>
+            <a:ext cx="2194560" cy="731520"/>
+          </a:xfrm>
+          <a:prstGeom prst="rect">
+            <a:avLst/>
+          </a:prstGeom>
+          <a:noFill/>
+        </p:spPr>
+        <p:txBody>
+          <a:bodyPr wrap="none">
+            <a:spAutoFit/>
+          </a:bodyPr>
+          <a:lstStyle/>
+          <a:p>
+            <a:pPr algn="ctr"/>
+            <a:r>
+              <a:rPr b="1" sz="1400">
+                <a:solidFill>
+                  <a:srgbClr val="0A1F44"/>
+                </a:solidFill>
+              </a:rPr>
+              <a:t>Apurva Awate</a:t>
+            </a:r>
+          </a:p>
+        </p:txBody>
+      </p:sp>
+      <p:sp>
+        <p:nvSpPr>
+          <p:cNvPr id="7" name="Rectangle 6"/>
+          <p:cNvSpPr/>
+          <p:nvPr/>
+        </p:nvSpPr>
+        <p:spPr>
+          <a:xfrm>
+            <a:off x="3512667" y="1691640"/>
+            <a:ext cx="2377440" cy="3474720"/>
+          </a:xfrm>
+          <a:prstGeom prst="rect">
+            <a:avLst/>
+          </a:prstGeom>
+          <a:solidFill>
+            <a:srgbClr val="F0F4FA"/>
+          </a:solidFill>
+          <a:ln w="19050">
+            <a:solidFill>
+              <a:srgbClr val="1A6BC8"/>
+            </a:solidFill>
+          </a:ln>
+        </p:spPr>
+        <p:style>
+          <a:lnRef idx="1">
+            <a:schemeClr val="accent1"/>
+          </a:lnRef>
+          <a:fillRef idx="3">
+            <a:schemeClr val="accent1"/>
+          </a:fillRef>
+          <a:effectRef idx="2">
+            <a:schemeClr val="accent1"/>
+          </a:effectRef>
+          <a:fontRef idx="minor">
+            <a:schemeClr val="lt1"/>
+          </a:fontRef>
+        </p:style>
+        <p:txBody>
+          <a:bodyPr rtlCol="0" anchor="ctr"/>
+          <a:lstStyle/>
+          <a:p>
+            <a:pPr algn="ctr"/>
+          </a:p>
+        </p:txBody>
+      </p:sp>
+      <p:sp>
+        <p:nvSpPr>
+          <p:cNvPr id="8" name="Oval 7"/>
+          <p:cNvSpPr/>
+          <p:nvPr/>
+        </p:nvSpPr>
+        <p:spPr>
+          <a:xfrm>
+            <a:off x="4198467" y="1920240"/>
+            <a:ext cx="1005840" cy="1005840"/>
+          </a:xfrm>
+          <a:prstGeom prst="ellipse">
+            <a:avLst/>
+          </a:prstGeom>
+          <a:solidFill>
+            <a:srgbClr val="1A6BC8"/>
+          </a:solidFill>
+          <a:ln>
+            <a:noFill/>
+          </a:ln>
+        </p:spPr>
+        <p:style>
+          <a:lnRef idx="1">
+            <a:schemeClr val="accent1"/>
+          </a:lnRef>
+          <a:fillRef idx="3">
+            <a:schemeClr val="accent1"/>
+          </a:fillRef>
+          <a:effectRef idx="2">
+            <a:schemeClr val="accent1"/>
+          </a:effectRef>
+          <a:fontRef idx="minor">
+            <a:schemeClr val="lt1"/>
+          </a:fontRef>
+        </p:style>
+        <p:txBody>
+          <a:bodyPr rtlCol="0" anchor="ctr"/>
+          <a:lstStyle/>
+          <a:p>
+            <a:pPr algn="ctr"/>
+            <a:r>
+              <a:rPr b="1" sz="1800">
+                <a:solidFill>
+                  <a:srgbClr val="FFFFFF"/>
+                </a:solidFill>
+              </a:rPr>
+              <a:t>DG</a:t>
+            </a:r>
+          </a:p>
+        </p:txBody>
+      </p:sp>
+      <p:sp>
+        <p:nvSpPr>
+          <p:cNvPr id="9" name="TextBox 8"/>
+          <p:cNvSpPr txBox="1"/>
+          <p:nvPr/>
+        </p:nvSpPr>
+        <p:spPr>
+          <a:xfrm>
+            <a:off x="3604107" y="3063240"/>
+            <a:ext cx="2194560" cy="731520"/>
+          </a:xfrm>
+          <a:prstGeom prst="rect">
+            <a:avLst/>
+          </a:prstGeom>
+          <a:noFill/>
+        </p:spPr>
+        <p:txBody>
+          <a:bodyPr wrap="none">
+            <a:spAutoFit/>
+          </a:bodyPr>
+          <a:lstStyle/>
+          <a:p>
+            <a:pPr algn="ctr"/>
+            <a:r>
+              <a:rPr b="1" sz="1400">
+                <a:solidFill>
+                  <a:srgbClr val="0A1F44"/>
+                </a:solidFill>
+              </a:rPr>
+              <a:t>Darshil Gandhi</a:t>
+            </a:r>
+          </a:p>
+        </p:txBody>
+      </p:sp>
+      <p:sp>
+        <p:nvSpPr>
+          <p:cNvPr id="10" name="Rectangle 9"/>
+          <p:cNvSpPr/>
+          <p:nvPr/>
+        </p:nvSpPr>
+        <p:spPr>
+          <a:xfrm>
+            <a:off x="6301587" y="1691640"/>
+            <a:ext cx="2377440" cy="3474720"/>
+          </a:xfrm>
+          <a:prstGeom prst="rect">
+            <a:avLst/>
+          </a:prstGeom>
+          <a:solidFill>
+            <a:srgbClr val="F0F4FA"/>
+          </a:solidFill>
+          <a:ln w="19050">
+            <a:solidFill>
+              <a:srgbClr val="1A6BC8"/>
+            </a:solidFill>
+          </a:ln>
+        </p:spPr>
+        <p:style>
+          <a:lnRef idx="1">
+            <a:schemeClr val="accent1"/>
+          </a:lnRef>
+          <a:fillRef idx="3">
+            <a:schemeClr val="accent1"/>
+          </a:fillRef>
+          <a:effectRef idx="2">
+            <a:schemeClr val="accent1"/>
+          </a:effectRef>
+          <a:fontRef idx="minor">
+            <a:schemeClr val="lt1"/>
+          </a:fontRef>
+        </p:style>
+        <p:txBody>
+          <a:bodyPr rtlCol="0" anchor="ctr"/>
+          <a:lstStyle/>
+          <a:p>
+            <a:pPr algn="ctr"/>
+          </a:p>
+        </p:txBody>
+      </p:sp>
+      <p:sp>
+        <p:nvSpPr>
+          <p:cNvPr id="11" name="Oval 10"/>
+          <p:cNvSpPr/>
+          <p:nvPr/>
+        </p:nvSpPr>
+        <p:spPr>
+          <a:xfrm>
+            <a:off x="6987387" y="1920240"/>
+            <a:ext cx="1005840" cy="1005840"/>
+          </a:xfrm>
+          <a:prstGeom prst="ellipse">
+            <a:avLst/>
+          </a:prstGeom>
+          <a:solidFill>
+            <a:srgbClr val="1A6BC8"/>
+          </a:solidFill>
+          <a:ln>
+            <a:noFill/>
+          </a:ln>
+        </p:spPr>
+        <p:style>
+          <a:lnRef idx="1">
+            <a:schemeClr val="accent1"/>
+          </a:lnRef>
+          <a:fillRef idx="3">
+            <a:schemeClr val="accent1"/>
+          </a:fillRef>
+          <a:effectRef idx="2">
+            <a:schemeClr val="accent1"/>
+          </a:effectRef>
+          <a:fontRef idx="minor">
+            <a:schemeClr val="lt1"/>
+          </a:fontRef>
+        </p:style>
+        <p:txBody>
+          <a:bodyPr rtlCol="0" anchor="ctr"/>
+          <a:lstStyle/>
+          <a:p>
+            <a:pPr algn="ctr"/>
+            <a:r>
+              <a:rPr b="1" sz="1800">
+                <a:solidFill>
+                  <a:srgbClr val="FFFFFF"/>
+                </a:solidFill>
+              </a:rPr>
+              <a:t>SM</a:t>
+            </a:r>
+          </a:p>
+        </p:txBody>
+      </p:sp>
+      <p:sp>
+        <p:nvSpPr>
+          <p:cNvPr id="12" name="TextBox 11"/>
+          <p:cNvSpPr txBox="1"/>
+          <p:nvPr/>
+        </p:nvSpPr>
+        <p:spPr>
+          <a:xfrm>
+            <a:off x="6393027" y="3063240"/>
+            <a:ext cx="2194560" cy="731520"/>
+          </a:xfrm>
+          <a:prstGeom prst="rect">
+            <a:avLst/>
+          </a:prstGeom>
+          <a:noFill/>
+        </p:spPr>
+        <p:txBody>
+          <a:bodyPr wrap="none">
+            <a:spAutoFit/>
+          </a:bodyPr>
+          <a:lstStyle/>
+          <a:p>
+            <a:pPr algn="ctr"/>
+            <a:r>
+              <a:rPr b="1" sz="1400">
+                <a:solidFill>
+                  <a:srgbClr val="0A1F44"/>
+                </a:solidFill>
+              </a:rPr>
+              <a:t>Sony Maharjan</a:t>
+            </a:r>
+          </a:p>
+        </p:txBody>
+      </p:sp>
+      <p:sp>
+        <p:nvSpPr>
+          <p:cNvPr id="13" name="Rectangle 12"/>
+          <p:cNvSpPr/>
+          <p:nvPr/>
+        </p:nvSpPr>
+        <p:spPr>
+          <a:xfrm>
+            <a:off x="9090507" y="1691640"/>
+            <a:ext cx="2377440" cy="3474720"/>
+          </a:xfrm>
+          <a:prstGeom prst="rect">
+            <a:avLst/>
+          </a:prstGeom>
+          <a:solidFill>
+            <a:srgbClr val="F0F4FA"/>
+          </a:solidFill>
+          <a:ln w="19050">
+            <a:solidFill>
+              <a:srgbClr val="1A6BC8"/>
+            </a:solidFill>
+          </a:ln>
+        </p:spPr>
+        <p:style>
+          <a:lnRef idx="1">
+            <a:schemeClr val="accent1"/>
+          </a:lnRef>
+          <a:fillRef idx="3">
+            <a:schemeClr val="accent1"/>
+          </a:fillRef>
+          <a:effectRef idx="2">
+            <a:schemeClr val="accent1"/>
+          </a:effectRef>
+          <a:fontRef idx="minor">
+            <a:schemeClr val="lt1"/>
+          </a:fontRef>
+        </p:style>
+        <p:txBody>
+          <a:bodyPr rtlCol="0" anchor="ctr"/>
+          <a:lstStyle/>
+          <a:p>
+            <a:pPr algn="ctr"/>
+          </a:p>
+        </p:txBody>
+      </p:sp>
+      <p:sp>
+        <p:nvSpPr>
+          <p:cNvPr id="14" name="Oval 13"/>
+          <p:cNvSpPr/>
+          <p:nvPr/>
+        </p:nvSpPr>
+        <p:spPr>
+          <a:xfrm>
+            <a:off x="9776307" y="1920240"/>
+            <a:ext cx="1005840" cy="1005840"/>
+          </a:xfrm>
+          <a:prstGeom prst="ellipse">
+            <a:avLst/>
+          </a:prstGeom>
+          <a:solidFill>
+            <a:srgbClr val="1A6BC8"/>
+          </a:solidFill>
+          <a:ln>
+            <a:noFill/>
+          </a:ln>
+        </p:spPr>
+        <p:style>
+          <a:lnRef idx="1">
+            <a:schemeClr val="accent1"/>
+          </a:lnRef>
+          <a:fillRef idx="3">
+            <a:schemeClr val="accent1"/>
+          </a:fillRef>
+          <a:effectRef idx="2">
+            <a:schemeClr val="accent1"/>
+          </a:effectRef>
+          <a:fontRef idx="minor">
+            <a:schemeClr val="lt1"/>
+          </a:fontRef>
+        </p:style>
+        <p:txBody>
+          <a:bodyPr rtlCol="0" anchor="ctr"/>
+          <a:lstStyle/>
+          <a:p>
+            <a:pPr algn="ctr"/>
+            <a:r>
+              <a:rPr b="1" sz="1800">
+                <a:solidFill>
+                  <a:srgbClr val="FFFFFF"/>
+                </a:solidFill>
+              </a:rPr>
+              <a:t>GR</a:t>
+            </a:r>
+          </a:p>
+        </p:txBody>
+      </p:sp>
+      <p:sp>
+        <p:nvSpPr>
+          <p:cNvPr id="15" name="TextBox 14"/>
+          <p:cNvSpPr txBox="1"/>
+          <p:nvPr/>
+        </p:nvSpPr>
+        <p:spPr>
+          <a:xfrm>
+            <a:off x="9181947" y="3063240"/>
+            <a:ext cx="2194560" cy="731520"/>
+          </a:xfrm>
+          <a:prstGeom prst="rect">
+            <a:avLst/>
+          </a:prstGeom>
+          <a:noFill/>
+        </p:spPr>
+        <p:txBody>
+          <a:bodyPr wrap="none">
+            <a:spAutoFit/>
+          </a:bodyPr>
+          <a:lstStyle/>
+          <a:p>
+            <a:pPr algn="ctr"/>
+            <a:r>
+              <a:rPr b="1" sz="1400">
+                <a:solidFill>
+                  <a:srgbClr val="0A1F44"/>
+                </a:solidFill>
+              </a:rPr>
+              <a:t>Gabriela Rodriguez</a:t>
+            </a:r>
+          </a:p>
+        </p:txBody>
+      </p:sp>
+    </p:spTree>
+  </p:cSld>
+  <p:clrMapOvr>
+    <a:masterClrMapping/>
+  </p:clrMapOvr>
+</p:sld>
+</file>
+
+<file path=ppt/slides/slide20.xml><?xml version="1.0" encoding="utf-8"?>
 <p:sld xmlns:a="http://schemas.openxmlformats.org/drawingml/2006/main" xmlns:r="http://schemas.openxmlformats.org/officeDocument/2006/relationships" xmlns:p="http://schemas.openxmlformats.org/presentationml/2006/main">
   <p:cSld name="Slide 19">
     <p:bg>
@@ -9537,1450 +11242,7 @@
 </p:sld>
 </file>
 
-<file path=ppt/slides/slide2.xml><?xml version="1.0" encoding="utf-8"?>
-<p:sld xmlns:a="http://schemas.openxmlformats.org/drawingml/2006/main" xmlns:r="http://schemas.openxmlformats.org/officeDocument/2006/relationships" xmlns:p="http://schemas.openxmlformats.org/presentationml/2006/main">
-  <p:cSld name="Slide 2">
-    <p:bg>
-      <p:bgPr>
-        <a:solidFill>
-          <a:srgbClr val="F4F7FC"/>
-        </a:solidFill>
-      </p:bgPr>
-    </p:bg>
-    <p:spTree>
-      <p:nvGrpSpPr>
-        <p:cNvPr id="1" name=""/>
-        <p:cNvGrpSpPr/>
-        <p:nvPr/>
-      </p:nvGrpSpPr>
-      <p:grpSpPr>
-        <a:xfrm>
-          <a:off x="0" y="0"/>
-          <a:ext cx="0" cy="0"/>
-          <a:chOff x="0" y="0"/>
-          <a:chExt cx="0" cy="0"/>
-        </a:xfrm>
-      </p:grpSpPr>
-      <p:sp>
-        <p:nvSpPr>
-          <p:cNvPr id="2" name="Shape 0"/>
-          <p:cNvSpPr/>
-          <p:nvPr/>
-        </p:nvSpPr>
-        <p:spPr>
-          <a:xfrm>
-            <a:off x="0" y="0"/>
-            <a:ext cx="9144000" cy="749808"/>
-          </a:xfrm>
-          <a:prstGeom prst="rect">
-            <a:avLst/>
-          </a:prstGeom>
-          <a:solidFill>
-            <a:srgbClr val="1B2A4A"/>
-          </a:solidFill>
-          <a:ln/>
-        </p:spPr>
-      </p:sp>
-      <p:sp>
-        <p:nvSpPr>
-          <p:cNvPr id="3" name="Shape 1"/>
-          <p:cNvSpPr/>
-          <p:nvPr/>
-        </p:nvSpPr>
-        <p:spPr>
-          <a:xfrm>
-            <a:off x="8595360" y="146304"/>
-            <a:ext cx="228600" cy="228600"/>
-          </a:xfrm>
-          <a:prstGeom prst="ellipse">
-            <a:avLst/>
-          </a:prstGeom>
-          <a:solidFill>
-            <a:srgbClr val="1F77B4"/>
-          </a:solidFill>
-          <a:ln/>
-        </p:spPr>
-      </p:sp>
-      <p:sp>
-        <p:nvSpPr>
-          <p:cNvPr id="4" name="Shape 2"/>
-          <p:cNvSpPr/>
-          <p:nvPr/>
-        </p:nvSpPr>
-        <p:spPr>
-          <a:xfrm>
-            <a:off x="8823960" y="146304"/>
-            <a:ext cx="228600" cy="228600"/>
-          </a:xfrm>
-          <a:prstGeom prst="ellipse">
-            <a:avLst/>
-          </a:prstGeom>
-          <a:solidFill>
-            <a:srgbClr val="FF7F0E"/>
-          </a:solidFill>
-          <a:ln/>
-        </p:spPr>
-      </p:sp>
-      <p:sp>
-        <p:nvSpPr>
-          <p:cNvPr id="5" name="Text 3"/>
-          <p:cNvSpPr/>
-          <p:nvPr/>
-        </p:nvSpPr>
-        <p:spPr>
-          <a:xfrm>
-            <a:off x="365760" y="73152"/>
-            <a:ext cx="8046720" cy="594360"/>
-          </a:xfrm>
-          <a:prstGeom prst="rect">
-            <a:avLst/>
-          </a:prstGeom>
-          <a:noFill/>
-          <a:ln/>
-        </p:spPr>
-        <p:txBody>
-          <a:bodyPr wrap="square" lIns="0" tIns="0" rIns="0" bIns="0" rtlCol="0" anchor="ctr"/>
-          <a:lstStyle/>
-          <a:p>
-            <a:pPr indent="0" marL="0">
-              <a:buNone/>
-            </a:pPr>
-            <a:r>
-              <a:rPr lang="en-US" sz="2200" b="1" dirty="0">
-                <a:solidFill>
-                  <a:srgbClr val="FFFFFF"/>
-                </a:solidFill>
-                <a:latin typeface="Calibri" pitchFamily="34" charset="0"/>
-                <a:ea typeface="Calibri" pitchFamily="34" charset="-122"/>
-                <a:cs typeface="Calibri" pitchFamily="34" charset="-120"/>
-              </a:rPr>
-              <a:t>Agenda</a:t>
-            </a:r>
-            <a:endParaRPr lang="en-US" sz="2200" dirty="0"/>
-          </a:p>
-        </p:txBody>
-      </p:sp>
-      <p:sp>
-        <p:nvSpPr>
-          <p:cNvPr id="6" name="Shape 4"/>
-          <p:cNvSpPr/>
-          <p:nvPr/>
-        </p:nvSpPr>
-        <p:spPr>
-          <a:xfrm>
-            <a:off x="320040" y="960120"/>
-            <a:ext cx="4297680" cy="841248"/>
-          </a:xfrm>
-          <a:prstGeom prst="rect">
-            <a:avLst/>
-          </a:prstGeom>
-          <a:solidFill>
-            <a:srgbClr val="FFFFFF"/>
-          </a:solidFill>
-          <a:ln/>
-          <a:effectLst>
-            <a:outerShdw sx="100000" sy="100000" kx="0" ky="0" algn="bl" rotWithShape="0" blurRad="101600" dist="38100" dir="8100000">
-              <a:srgbClr val="000000">
-                <a:alpha val="12000"/>
-              </a:srgbClr>
-            </a:outerShdw>
-          </a:effectLst>
-        </p:spPr>
-      </p:sp>
-      <p:sp>
-        <p:nvSpPr>
-          <p:cNvPr id="7" name="Shape 5"/>
-          <p:cNvSpPr/>
-          <p:nvPr/>
-        </p:nvSpPr>
-        <p:spPr>
-          <a:xfrm>
-            <a:off x="320040" y="960120"/>
-            <a:ext cx="91440" cy="841248"/>
-          </a:xfrm>
-          <a:prstGeom prst="rect">
-            <a:avLst/>
-          </a:prstGeom>
-          <a:solidFill>
-            <a:srgbClr val="1F77B4"/>
-          </a:solidFill>
-          <a:ln/>
-        </p:spPr>
-      </p:sp>
-      <p:sp>
-        <p:nvSpPr>
-          <p:cNvPr id="8" name="Text 6"/>
-          <p:cNvSpPr/>
-          <p:nvPr/>
-        </p:nvSpPr>
-        <p:spPr>
-          <a:xfrm>
-            <a:off x="484632" y="1033272"/>
-            <a:ext cx="457200" cy="320040"/>
-          </a:xfrm>
-          <a:prstGeom prst="rect">
-            <a:avLst/>
-          </a:prstGeom>
-          <a:noFill/>
-          <a:ln/>
-        </p:spPr>
-        <p:txBody>
-          <a:bodyPr wrap="square" lIns="0" tIns="0" rIns="0" bIns="0" rtlCol="0" anchor="ctr"/>
-          <a:lstStyle/>
-          <a:p>
-            <a:pPr indent="0" marL="0">
-              <a:buNone/>
-            </a:pPr>
-            <a:r>
-              <a:rPr lang="en-US" sz="1600" b="1" dirty="0">
-                <a:solidFill>
-                  <a:srgbClr val="1B2A4A"/>
-                </a:solidFill>
-                <a:latin typeface="Calibri" pitchFamily="34" charset="0"/>
-                <a:ea typeface="Calibri" pitchFamily="34" charset="-122"/>
-                <a:cs typeface="Calibri" pitchFamily="34" charset="-120"/>
-              </a:rPr>
-              <a:t>01</a:t>
-            </a:r>
-            <a:endParaRPr lang="en-US" sz="1600" dirty="0"/>
-          </a:p>
-        </p:txBody>
-      </p:sp>
-      <p:sp>
-        <p:nvSpPr>
-          <p:cNvPr id="9" name="Text 7"/>
-          <p:cNvSpPr/>
-          <p:nvPr/>
-        </p:nvSpPr>
-        <p:spPr>
-          <a:xfrm>
-            <a:off x="484632" y="1234440"/>
-            <a:ext cx="4069080" cy="274320"/>
-          </a:xfrm>
-          <a:prstGeom prst="rect">
-            <a:avLst/>
-          </a:prstGeom>
-          <a:noFill/>
-          <a:ln/>
-        </p:spPr>
-        <p:txBody>
-          <a:bodyPr wrap="square" lIns="0" tIns="0" rIns="0" bIns="0" rtlCol="0" anchor="ctr"/>
-          <a:lstStyle/>
-          <a:p>
-            <a:pPr indent="0" marL="0">
-              <a:buNone/>
-            </a:pPr>
-            <a:r>
-              <a:rPr lang="en-US" sz="1100" b="1" dirty="0">
-                <a:solidFill>
-                  <a:srgbClr val="1E293B"/>
-                </a:solidFill>
-                <a:latin typeface="Calibri" pitchFamily="34" charset="0"/>
-                <a:ea typeface="Calibri" pitchFamily="34" charset="-122"/>
-                <a:cs typeface="Calibri" pitchFamily="34" charset="-120"/>
-              </a:rPr>
-              <a:t>Research Background &amp; Questions</a:t>
-            </a:r>
-            <a:endParaRPr lang="en-US" sz="1100" dirty="0"/>
-          </a:p>
-        </p:txBody>
-      </p:sp>
-      <p:sp>
-        <p:nvSpPr>
-          <p:cNvPr id="10" name="Text 8"/>
-          <p:cNvSpPr/>
-          <p:nvPr/>
-        </p:nvSpPr>
-        <p:spPr>
-          <a:xfrm>
-            <a:off x="484632" y="1490472"/>
-            <a:ext cx="4069080" cy="274320"/>
-          </a:xfrm>
-          <a:prstGeom prst="rect">
-            <a:avLst/>
-          </a:prstGeom>
-          <a:noFill/>
-          <a:ln/>
-        </p:spPr>
-        <p:txBody>
-          <a:bodyPr wrap="square" lIns="0" tIns="0" rIns="0" bIns="0" rtlCol="0" anchor="ctr"/>
-          <a:lstStyle/>
-          <a:p>
-            <a:pPr indent="0" marL="0">
-              <a:buNone/>
-            </a:pPr>
-            <a:r>
-              <a:rPr lang="en-US" sz="900" dirty="0">
-                <a:solidFill>
-                  <a:srgbClr val="64748B"/>
-                </a:solidFill>
-                <a:latin typeface="Calibri" pitchFamily="34" charset="0"/>
-                <a:ea typeface="Calibri" pitchFamily="34" charset="-122"/>
-                <a:cs typeface="Calibri" pitchFamily="34" charset="-120"/>
-              </a:rPr>
-              <a:t>Why Apple vs Samsung, and what we aim to discover</a:t>
-            </a:r>
-            <a:endParaRPr lang="en-US" sz="900" dirty="0"/>
-          </a:p>
-        </p:txBody>
-      </p:sp>
-      <p:sp>
-        <p:nvSpPr>
-          <p:cNvPr id="11" name="Shape 9"/>
-          <p:cNvSpPr/>
-          <p:nvPr/>
-        </p:nvSpPr>
-        <p:spPr>
-          <a:xfrm>
-            <a:off x="4800600" y="960120"/>
-            <a:ext cx="4297680" cy="841248"/>
-          </a:xfrm>
-          <a:prstGeom prst="rect">
-            <a:avLst/>
-          </a:prstGeom>
-          <a:solidFill>
-            <a:srgbClr val="FFFFFF"/>
-          </a:solidFill>
-          <a:ln/>
-          <a:effectLst>
-            <a:outerShdw sx="100000" sy="100000" kx="0" ky="0" algn="bl" rotWithShape="0" blurRad="101600" dist="38100" dir="8100000">
-              <a:srgbClr val="000000">
-                <a:alpha val="12000"/>
-              </a:srgbClr>
-            </a:outerShdw>
-          </a:effectLst>
-        </p:spPr>
-      </p:sp>
-      <p:sp>
-        <p:nvSpPr>
-          <p:cNvPr id="12" name="Shape 10"/>
-          <p:cNvSpPr/>
-          <p:nvPr/>
-        </p:nvSpPr>
-        <p:spPr>
-          <a:xfrm>
-            <a:off x="4800600" y="960120"/>
-            <a:ext cx="91440" cy="841248"/>
-          </a:xfrm>
-          <a:prstGeom prst="rect">
-            <a:avLst/>
-          </a:prstGeom>
-          <a:solidFill>
-            <a:srgbClr val="FF7F0E"/>
-          </a:solidFill>
-          <a:ln/>
-        </p:spPr>
-      </p:sp>
-      <p:sp>
-        <p:nvSpPr>
-          <p:cNvPr id="13" name="Text 11"/>
-          <p:cNvSpPr/>
-          <p:nvPr/>
-        </p:nvSpPr>
-        <p:spPr>
-          <a:xfrm>
-            <a:off x="4965192" y="1033272"/>
-            <a:ext cx="457200" cy="320040"/>
-          </a:xfrm>
-          <a:prstGeom prst="rect">
-            <a:avLst/>
-          </a:prstGeom>
-          <a:noFill/>
-          <a:ln/>
-        </p:spPr>
-        <p:txBody>
-          <a:bodyPr wrap="square" lIns="0" tIns="0" rIns="0" bIns="0" rtlCol="0" anchor="ctr"/>
-          <a:lstStyle/>
-          <a:p>
-            <a:pPr indent="0" marL="0">
-              <a:buNone/>
-            </a:pPr>
-            <a:r>
-              <a:rPr lang="en-US" sz="1600" b="1" dirty="0">
-                <a:solidFill>
-                  <a:srgbClr val="1B2A4A"/>
-                </a:solidFill>
-                <a:latin typeface="Calibri" pitchFamily="34" charset="0"/>
-                <a:ea typeface="Calibri" pitchFamily="34" charset="-122"/>
-                <a:cs typeface="Calibri" pitchFamily="34" charset="-120"/>
-              </a:rPr>
-              <a:t>02</a:t>
-            </a:r>
-            <a:endParaRPr lang="en-US" sz="1600" dirty="0"/>
-          </a:p>
-        </p:txBody>
-      </p:sp>
-      <p:sp>
-        <p:nvSpPr>
-          <p:cNvPr id="14" name="Text 12"/>
-          <p:cNvSpPr/>
-          <p:nvPr/>
-        </p:nvSpPr>
-        <p:spPr>
-          <a:xfrm>
-            <a:off x="4965192" y="1234440"/>
-            <a:ext cx="4069080" cy="274320"/>
-          </a:xfrm>
-          <a:prstGeom prst="rect">
-            <a:avLst/>
-          </a:prstGeom>
-          <a:noFill/>
-          <a:ln/>
-        </p:spPr>
-        <p:txBody>
-          <a:bodyPr wrap="square" lIns="0" tIns="0" rIns="0" bIns="0" rtlCol="0" anchor="ctr"/>
-          <a:lstStyle/>
-          <a:p>
-            <a:pPr indent="0" marL="0">
-              <a:buNone/>
-            </a:pPr>
-            <a:r>
-              <a:rPr lang="en-US" sz="1100" b="1" dirty="0">
-                <a:solidFill>
-                  <a:srgbClr val="1E293B"/>
-                </a:solidFill>
-                <a:latin typeface="Calibri" pitchFamily="34" charset="0"/>
-                <a:ea typeface="Calibri" pitchFamily="34" charset="-122"/>
-                <a:cs typeface="Calibri" pitchFamily="34" charset="-120"/>
-              </a:rPr>
-              <a:t>Data Collection</a:t>
-            </a:r>
-            <a:endParaRPr lang="en-US" sz="1100" dirty="0"/>
-          </a:p>
-        </p:txBody>
-      </p:sp>
-      <p:sp>
-        <p:nvSpPr>
-          <p:cNvPr id="15" name="Text 13"/>
-          <p:cNvSpPr/>
-          <p:nvPr/>
-        </p:nvSpPr>
-        <p:spPr>
-          <a:xfrm>
-            <a:off x="4965192" y="1490472"/>
-            <a:ext cx="4069080" cy="274320"/>
-          </a:xfrm>
-          <a:prstGeom prst="rect">
-            <a:avLst/>
-          </a:prstGeom>
-          <a:noFill/>
-          <a:ln/>
-        </p:spPr>
-        <p:txBody>
-          <a:bodyPr wrap="square" lIns="0" tIns="0" rIns="0" bIns="0" rtlCol="0" anchor="ctr"/>
-          <a:lstStyle/>
-          <a:p>
-            <a:pPr indent="0" marL="0">
-              <a:buNone/>
-            </a:pPr>
-            <a:r>
-              <a:rPr lang="en-US" sz="900" dirty="0">
-                <a:solidFill>
-                  <a:srgbClr val="64748B"/>
-                </a:solidFill>
-                <a:latin typeface="Calibri" pitchFamily="34" charset="0"/>
-                <a:ea typeface="Calibri" pitchFamily="34" charset="-122"/>
-                <a:cs typeface="Calibri" pitchFamily="34" charset="-120"/>
-              </a:rPr>
-              <a:t>Sources, coverage, and variable definitions</a:t>
-            </a:r>
-            <a:endParaRPr lang="en-US" sz="900" dirty="0"/>
-          </a:p>
-        </p:txBody>
-      </p:sp>
-      <p:sp>
-        <p:nvSpPr>
-          <p:cNvPr id="16" name="Shape 14"/>
-          <p:cNvSpPr/>
-          <p:nvPr/>
-        </p:nvSpPr>
-        <p:spPr>
-          <a:xfrm>
-            <a:off x="320040" y="1920240"/>
-            <a:ext cx="4297680" cy="841248"/>
-          </a:xfrm>
-          <a:prstGeom prst="rect">
-            <a:avLst/>
-          </a:prstGeom>
-          <a:solidFill>
-            <a:srgbClr val="FFFFFF"/>
-          </a:solidFill>
-          <a:ln/>
-          <a:effectLst>
-            <a:outerShdw sx="100000" sy="100000" kx="0" ky="0" algn="bl" rotWithShape="0" blurRad="101600" dist="38100" dir="8100000">
-              <a:srgbClr val="000000">
-                <a:alpha val="12000"/>
-              </a:srgbClr>
-            </a:outerShdw>
-          </a:effectLst>
-        </p:spPr>
-      </p:sp>
-      <p:sp>
-        <p:nvSpPr>
-          <p:cNvPr id="17" name="Shape 15"/>
-          <p:cNvSpPr/>
-          <p:nvPr/>
-        </p:nvSpPr>
-        <p:spPr>
-          <a:xfrm>
-            <a:off x="320040" y="1920240"/>
-            <a:ext cx="91440" cy="841248"/>
-          </a:xfrm>
-          <a:prstGeom prst="rect">
-            <a:avLst/>
-          </a:prstGeom>
-          <a:solidFill>
-            <a:srgbClr val="1F77B4"/>
-          </a:solidFill>
-          <a:ln/>
-        </p:spPr>
-      </p:sp>
-      <p:sp>
-        <p:nvSpPr>
-          <p:cNvPr id="18" name="Text 16"/>
-          <p:cNvSpPr/>
-          <p:nvPr/>
-        </p:nvSpPr>
-        <p:spPr>
-          <a:xfrm>
-            <a:off x="484632" y="1993392"/>
-            <a:ext cx="457200" cy="320040"/>
-          </a:xfrm>
-          <a:prstGeom prst="rect">
-            <a:avLst/>
-          </a:prstGeom>
-          <a:noFill/>
-          <a:ln/>
-        </p:spPr>
-        <p:txBody>
-          <a:bodyPr wrap="square" lIns="0" tIns="0" rIns="0" bIns="0" rtlCol="0" anchor="ctr"/>
-          <a:lstStyle/>
-          <a:p>
-            <a:pPr indent="0" marL="0">
-              <a:buNone/>
-            </a:pPr>
-            <a:r>
-              <a:rPr lang="en-US" sz="1600" b="1" dirty="0">
-                <a:solidFill>
-                  <a:srgbClr val="1B2A4A"/>
-                </a:solidFill>
-                <a:latin typeface="Calibri" pitchFamily="34" charset="0"/>
-                <a:ea typeface="Calibri" pitchFamily="34" charset="-122"/>
-                <a:cs typeface="Calibri" pitchFamily="34" charset="-120"/>
-              </a:rPr>
-              <a:t>03</a:t>
-            </a:r>
-            <a:endParaRPr lang="en-US" sz="1600" dirty="0"/>
-          </a:p>
-        </p:txBody>
-      </p:sp>
-      <p:sp>
-        <p:nvSpPr>
-          <p:cNvPr id="19" name="Text 17"/>
-          <p:cNvSpPr/>
-          <p:nvPr/>
-        </p:nvSpPr>
-        <p:spPr>
-          <a:xfrm>
-            <a:off x="484632" y="2194560"/>
-            <a:ext cx="4069080" cy="274320"/>
-          </a:xfrm>
-          <a:prstGeom prst="rect">
-            <a:avLst/>
-          </a:prstGeom>
-          <a:noFill/>
-          <a:ln/>
-        </p:spPr>
-        <p:txBody>
-          <a:bodyPr wrap="square" lIns="0" tIns="0" rIns="0" bIns="0" rtlCol="0" anchor="ctr"/>
-          <a:lstStyle/>
-          <a:p>
-            <a:pPr indent="0" marL="0">
-              <a:buNone/>
-            </a:pPr>
-            <a:r>
-              <a:rPr lang="en-US" sz="1100" b="1" dirty="0">
-                <a:solidFill>
-                  <a:srgbClr val="1E293B"/>
-                </a:solidFill>
-                <a:latin typeface="Calibri" pitchFamily="34" charset="0"/>
-                <a:ea typeface="Calibri" pitchFamily="34" charset="-122"/>
-                <a:cs typeface="Calibri" pitchFamily="34" charset="-120"/>
-              </a:rPr>
-              <a:t>Data Cleaning &amp; Manipulation</a:t>
-            </a:r>
-            <a:endParaRPr lang="en-US" sz="1100" dirty="0"/>
-          </a:p>
-        </p:txBody>
-      </p:sp>
-      <p:sp>
-        <p:nvSpPr>
-          <p:cNvPr id="20" name="Text 18"/>
-          <p:cNvSpPr/>
-          <p:nvPr/>
-        </p:nvSpPr>
-        <p:spPr>
-          <a:xfrm>
-            <a:off x="484632" y="2450592"/>
-            <a:ext cx="4069080" cy="274320"/>
-          </a:xfrm>
-          <a:prstGeom prst="rect">
-            <a:avLst/>
-          </a:prstGeom>
-          <a:noFill/>
-          <a:ln/>
-        </p:spPr>
-        <p:txBody>
-          <a:bodyPr wrap="square" lIns="0" tIns="0" rIns="0" bIns="0" rtlCol="0" anchor="ctr"/>
-          <a:lstStyle/>
-          <a:p>
-            <a:pPr indent="0" marL="0">
-              <a:buNone/>
-            </a:pPr>
-            <a:r>
-              <a:rPr lang="en-US" sz="900" dirty="0">
-                <a:solidFill>
-                  <a:srgbClr val="64748B"/>
-                </a:solidFill>
-                <a:latin typeface="Calibri" pitchFamily="34" charset="0"/>
-                <a:ea typeface="Calibri" pitchFamily="34" charset="-122"/>
-                <a:cs typeface="Calibri" pitchFamily="34" charset="-120"/>
-              </a:rPr>
-              <a:t>Processing steps applied to prepare data</a:t>
-            </a:r>
-            <a:endParaRPr lang="en-US" sz="900" dirty="0"/>
-          </a:p>
-        </p:txBody>
-      </p:sp>
-      <p:sp>
-        <p:nvSpPr>
-          <p:cNvPr id="21" name="Shape 19"/>
-          <p:cNvSpPr/>
-          <p:nvPr/>
-        </p:nvSpPr>
-        <p:spPr>
-          <a:xfrm>
-            <a:off x="4800600" y="1920240"/>
-            <a:ext cx="4297680" cy="841248"/>
-          </a:xfrm>
-          <a:prstGeom prst="rect">
-            <a:avLst/>
-          </a:prstGeom>
-          <a:solidFill>
-            <a:srgbClr val="FFFFFF"/>
-          </a:solidFill>
-          <a:ln/>
-          <a:effectLst>
-            <a:outerShdw sx="100000" sy="100000" kx="0" ky="0" algn="bl" rotWithShape="0" blurRad="101600" dist="38100" dir="8100000">
-              <a:srgbClr val="000000">
-                <a:alpha val="12000"/>
-              </a:srgbClr>
-            </a:outerShdw>
-          </a:effectLst>
-        </p:spPr>
-      </p:sp>
-      <p:sp>
-        <p:nvSpPr>
-          <p:cNvPr id="22" name="Shape 20"/>
-          <p:cNvSpPr/>
-          <p:nvPr/>
-        </p:nvSpPr>
-        <p:spPr>
-          <a:xfrm>
-            <a:off x="4800600" y="1920240"/>
-            <a:ext cx="91440" cy="841248"/>
-          </a:xfrm>
-          <a:prstGeom prst="rect">
-            <a:avLst/>
-          </a:prstGeom>
-          <a:solidFill>
-            <a:srgbClr val="FF7F0E"/>
-          </a:solidFill>
-          <a:ln/>
-        </p:spPr>
-      </p:sp>
-      <p:sp>
-        <p:nvSpPr>
-          <p:cNvPr id="23" name="Text 21"/>
-          <p:cNvSpPr/>
-          <p:nvPr/>
-        </p:nvSpPr>
-        <p:spPr>
-          <a:xfrm>
-            <a:off x="4965192" y="1993392"/>
-            <a:ext cx="457200" cy="320040"/>
-          </a:xfrm>
-          <a:prstGeom prst="rect">
-            <a:avLst/>
-          </a:prstGeom>
-          <a:noFill/>
-          <a:ln/>
-        </p:spPr>
-        <p:txBody>
-          <a:bodyPr wrap="square" lIns="0" tIns="0" rIns="0" bIns="0" rtlCol="0" anchor="ctr"/>
-          <a:lstStyle/>
-          <a:p>
-            <a:pPr indent="0" marL="0">
-              <a:buNone/>
-            </a:pPr>
-            <a:r>
-              <a:rPr lang="en-US" sz="1600" b="1" dirty="0">
-                <a:solidFill>
-                  <a:srgbClr val="1B2A4A"/>
-                </a:solidFill>
-                <a:latin typeface="Calibri" pitchFamily="34" charset="0"/>
-                <a:ea typeface="Calibri" pitchFamily="34" charset="-122"/>
-                <a:cs typeface="Calibri" pitchFamily="34" charset="-120"/>
-              </a:rPr>
-              <a:t>04</a:t>
-            </a:r>
-            <a:endParaRPr lang="en-US" sz="1600" dirty="0"/>
-          </a:p>
-        </p:txBody>
-      </p:sp>
-      <p:sp>
-        <p:nvSpPr>
-          <p:cNvPr id="24" name="Text 22"/>
-          <p:cNvSpPr/>
-          <p:nvPr/>
-        </p:nvSpPr>
-        <p:spPr>
-          <a:xfrm>
-            <a:off x="4965192" y="2194560"/>
-            <a:ext cx="4069080" cy="274320"/>
-          </a:xfrm>
-          <a:prstGeom prst="rect">
-            <a:avLst/>
-          </a:prstGeom>
-          <a:noFill/>
-          <a:ln/>
-        </p:spPr>
-        <p:txBody>
-          <a:bodyPr wrap="square" lIns="0" tIns="0" rIns="0" bIns="0" rtlCol="0" anchor="ctr"/>
-          <a:lstStyle/>
-          <a:p>
-            <a:pPr indent="0" marL="0">
-              <a:buNone/>
-            </a:pPr>
-            <a:r>
-              <a:rPr lang="en-US" sz="1100" b="1" dirty="0">
-                <a:solidFill>
-                  <a:srgbClr val="1E293B"/>
-                </a:solidFill>
-                <a:latin typeface="Calibri" pitchFamily="34" charset="0"/>
-                <a:ea typeface="Calibri" pitchFamily="34" charset="-122"/>
-                <a:cs typeface="Calibri" pitchFamily="34" charset="-120"/>
-              </a:rPr>
-              <a:t>Analysis 1 — Stock Performance &amp; Correlation</a:t>
-            </a:r>
-            <a:endParaRPr lang="en-US" sz="1100" dirty="0"/>
-          </a:p>
-        </p:txBody>
-      </p:sp>
-      <p:sp>
-        <p:nvSpPr>
-          <p:cNvPr id="25" name="Text 23"/>
-          <p:cNvSpPr/>
-          <p:nvPr/>
-        </p:nvSpPr>
-        <p:spPr>
-          <a:xfrm>
-            <a:off x="4965192" y="2450592"/>
-            <a:ext cx="4069080" cy="274320"/>
-          </a:xfrm>
-          <a:prstGeom prst="rect">
-            <a:avLst/>
-          </a:prstGeom>
-          <a:noFill/>
-          <a:ln/>
-        </p:spPr>
-        <p:txBody>
-          <a:bodyPr wrap="square" lIns="0" tIns="0" rIns="0" bIns="0" rtlCol="0" anchor="ctr"/>
-          <a:lstStyle/>
-          <a:p>
-            <a:pPr indent="0" marL="0">
-              <a:buNone/>
-            </a:pPr>
-            <a:r>
-              <a:rPr lang="en-US" sz="900" dirty="0">
-                <a:solidFill>
-                  <a:srgbClr val="64748B"/>
-                </a:solidFill>
-                <a:latin typeface="Calibri" pitchFamily="34" charset="0"/>
-                <a:ea typeface="Calibri" pitchFamily="34" charset="-122"/>
-                <a:cs typeface="Calibri" pitchFamily="34" charset="-120"/>
-              </a:rPr>
-              <a:t>Price trends, correlation, and volatility (2015–2026)</a:t>
-            </a:r>
-            <a:endParaRPr lang="en-US" sz="900" dirty="0"/>
-          </a:p>
-        </p:txBody>
-      </p:sp>
-      <p:sp>
-        <p:nvSpPr>
-          <p:cNvPr id="26" name="Shape 24"/>
-          <p:cNvSpPr/>
-          <p:nvPr/>
-        </p:nvSpPr>
-        <p:spPr>
-          <a:xfrm>
-            <a:off x="320040" y="2880360"/>
-            <a:ext cx="4297680" cy="841248"/>
-          </a:xfrm>
-          <a:prstGeom prst="rect">
-            <a:avLst/>
-          </a:prstGeom>
-          <a:solidFill>
-            <a:srgbClr val="FFFFFF"/>
-          </a:solidFill>
-          <a:ln/>
-          <a:effectLst>
-            <a:outerShdw sx="100000" sy="100000" kx="0" ky="0" algn="bl" rotWithShape="0" blurRad="101600" dist="38100" dir="8100000">
-              <a:srgbClr val="000000">
-                <a:alpha val="12000"/>
-              </a:srgbClr>
-            </a:outerShdw>
-          </a:effectLst>
-        </p:spPr>
-      </p:sp>
-      <p:sp>
-        <p:nvSpPr>
-          <p:cNvPr id="27" name="Shape 25"/>
-          <p:cNvSpPr/>
-          <p:nvPr/>
-        </p:nvSpPr>
-        <p:spPr>
-          <a:xfrm>
-            <a:off x="320040" y="2880360"/>
-            <a:ext cx="91440" cy="841248"/>
-          </a:xfrm>
-          <a:prstGeom prst="rect">
-            <a:avLst/>
-          </a:prstGeom>
-          <a:solidFill>
-            <a:srgbClr val="1F77B4"/>
-          </a:solidFill>
-          <a:ln/>
-        </p:spPr>
-      </p:sp>
-      <p:sp>
-        <p:nvSpPr>
-          <p:cNvPr id="28" name="Text 26"/>
-          <p:cNvSpPr/>
-          <p:nvPr/>
-        </p:nvSpPr>
-        <p:spPr>
-          <a:xfrm>
-            <a:off x="484632" y="2953512"/>
-            <a:ext cx="457200" cy="320040"/>
-          </a:xfrm>
-          <a:prstGeom prst="rect">
-            <a:avLst/>
-          </a:prstGeom>
-          <a:noFill/>
-          <a:ln/>
-        </p:spPr>
-        <p:txBody>
-          <a:bodyPr wrap="square" lIns="0" tIns="0" rIns="0" bIns="0" rtlCol="0" anchor="ctr"/>
-          <a:lstStyle/>
-          <a:p>
-            <a:pPr indent="0" marL="0">
-              <a:buNone/>
-            </a:pPr>
-            <a:r>
-              <a:rPr lang="en-US" sz="1600" b="1" dirty="0">
-                <a:solidFill>
-                  <a:srgbClr val="1B2A4A"/>
-                </a:solidFill>
-                <a:latin typeface="Calibri" pitchFamily="34" charset="0"/>
-                <a:ea typeface="Calibri" pitchFamily="34" charset="-122"/>
-                <a:cs typeface="Calibri" pitchFamily="34" charset="-120"/>
-              </a:rPr>
-              <a:t>05</a:t>
-            </a:r>
-            <a:endParaRPr lang="en-US" sz="1600" dirty="0"/>
-          </a:p>
-        </p:txBody>
-      </p:sp>
-      <p:sp>
-        <p:nvSpPr>
-          <p:cNvPr id="29" name="Text 27"/>
-          <p:cNvSpPr/>
-          <p:nvPr/>
-        </p:nvSpPr>
-        <p:spPr>
-          <a:xfrm>
-            <a:off x="484632" y="3154680"/>
-            <a:ext cx="4069080" cy="274320"/>
-          </a:xfrm>
-          <a:prstGeom prst="rect">
-            <a:avLst/>
-          </a:prstGeom>
-          <a:noFill/>
-          <a:ln/>
-        </p:spPr>
-        <p:txBody>
-          <a:bodyPr wrap="square" lIns="0" tIns="0" rIns="0" bIns="0" rtlCol="0" anchor="ctr"/>
-          <a:lstStyle/>
-          <a:p>
-            <a:pPr indent="0" marL="0">
-              <a:buNone/>
-            </a:pPr>
-            <a:r>
-              <a:rPr lang="en-US" sz="1100" b="1" dirty="0">
-                <a:solidFill>
-                  <a:srgbClr val="1E293B"/>
-                </a:solidFill>
-                <a:latin typeface="Calibri" pitchFamily="34" charset="0"/>
-                <a:ea typeface="Calibri" pitchFamily="34" charset="-122"/>
-                <a:cs typeface="Calibri" pitchFamily="34" charset="-120"/>
-              </a:rPr>
-              <a:t>Analysis 2 — Financial Fundamentals</a:t>
-            </a:r>
-            <a:endParaRPr lang="en-US" sz="1100" dirty="0"/>
-          </a:p>
-        </p:txBody>
-      </p:sp>
-      <p:sp>
-        <p:nvSpPr>
-          <p:cNvPr id="30" name="Text 28"/>
-          <p:cNvSpPr/>
-          <p:nvPr/>
-        </p:nvSpPr>
-        <p:spPr>
-          <a:xfrm>
-            <a:off x="484632" y="3410712"/>
-            <a:ext cx="4069080" cy="274320"/>
-          </a:xfrm>
-          <a:prstGeom prst="rect">
-            <a:avLst/>
-          </a:prstGeom>
-          <a:noFill/>
-          <a:ln/>
-        </p:spPr>
-        <p:txBody>
-          <a:bodyPr wrap="square" lIns="0" tIns="0" rIns="0" bIns="0" rtlCol="0" anchor="ctr"/>
-          <a:lstStyle/>
-          <a:p>
-            <a:pPr indent="0" marL="0">
-              <a:buNone/>
-            </a:pPr>
-            <a:r>
-              <a:rPr lang="en-US" sz="900" dirty="0">
-                <a:solidFill>
-                  <a:srgbClr val="64748B"/>
-                </a:solidFill>
-                <a:latin typeface="Calibri" pitchFamily="34" charset="0"/>
-                <a:ea typeface="Calibri" pitchFamily="34" charset="-122"/>
-                <a:cs typeface="Calibri" pitchFamily="34" charset="-120"/>
-              </a:rPr>
-              <a:t>Revenue, profitability margins, and cash flow</a:t>
-            </a:r>
-            <a:endParaRPr lang="en-US" sz="900" dirty="0"/>
-          </a:p>
-        </p:txBody>
-      </p:sp>
-      <p:sp>
-        <p:nvSpPr>
-          <p:cNvPr id="31" name="Shape 29"/>
-          <p:cNvSpPr/>
-          <p:nvPr/>
-        </p:nvSpPr>
-        <p:spPr>
-          <a:xfrm>
-            <a:off x="4800600" y="2880360"/>
-            <a:ext cx="4297680" cy="841248"/>
-          </a:xfrm>
-          <a:prstGeom prst="rect">
-            <a:avLst/>
-          </a:prstGeom>
-          <a:solidFill>
-            <a:srgbClr val="FFFFFF"/>
-          </a:solidFill>
-          <a:ln/>
-          <a:effectLst>
-            <a:outerShdw sx="100000" sy="100000" kx="0" ky="0" algn="bl" rotWithShape="0" blurRad="101600" dist="38100" dir="8100000">
-              <a:srgbClr val="000000">
-                <a:alpha val="12000"/>
-              </a:srgbClr>
-            </a:outerShdw>
-          </a:effectLst>
-        </p:spPr>
-      </p:sp>
-      <p:sp>
-        <p:nvSpPr>
-          <p:cNvPr id="32" name="Shape 30"/>
-          <p:cNvSpPr/>
-          <p:nvPr/>
-        </p:nvSpPr>
-        <p:spPr>
-          <a:xfrm>
-            <a:off x="4800600" y="2880360"/>
-            <a:ext cx="91440" cy="841248"/>
-          </a:xfrm>
-          <a:prstGeom prst="rect">
-            <a:avLst/>
-          </a:prstGeom>
-          <a:solidFill>
-            <a:srgbClr val="FF7F0E"/>
-          </a:solidFill>
-          <a:ln/>
-        </p:spPr>
-      </p:sp>
-      <p:sp>
-        <p:nvSpPr>
-          <p:cNvPr id="33" name="Text 31"/>
-          <p:cNvSpPr/>
-          <p:nvPr/>
-        </p:nvSpPr>
-        <p:spPr>
-          <a:xfrm>
-            <a:off x="4965192" y="2953512"/>
-            <a:ext cx="457200" cy="320040"/>
-          </a:xfrm>
-          <a:prstGeom prst="rect">
-            <a:avLst/>
-          </a:prstGeom>
-          <a:noFill/>
-          <a:ln/>
-        </p:spPr>
-        <p:txBody>
-          <a:bodyPr wrap="square" lIns="0" tIns="0" rIns="0" bIns="0" rtlCol="0" anchor="ctr"/>
-          <a:lstStyle/>
-          <a:p>
-            <a:pPr indent="0" marL="0">
-              <a:buNone/>
-            </a:pPr>
-            <a:r>
-              <a:rPr lang="en-US" sz="1600" b="1" dirty="0">
-                <a:solidFill>
-                  <a:srgbClr val="1B2A4A"/>
-                </a:solidFill>
-                <a:latin typeface="Calibri" pitchFamily="34" charset="0"/>
-                <a:ea typeface="Calibri" pitchFamily="34" charset="-122"/>
-                <a:cs typeface="Calibri" pitchFamily="34" charset="-120"/>
-              </a:rPr>
-              <a:t>06</a:t>
-            </a:r>
-            <a:endParaRPr lang="en-US" sz="1600" dirty="0"/>
-          </a:p>
-        </p:txBody>
-      </p:sp>
-      <p:sp>
-        <p:nvSpPr>
-          <p:cNvPr id="34" name="Text 32"/>
-          <p:cNvSpPr/>
-          <p:nvPr/>
-        </p:nvSpPr>
-        <p:spPr>
-          <a:xfrm>
-            <a:off x="4965192" y="3154680"/>
-            <a:ext cx="4069080" cy="274320"/>
-          </a:xfrm>
-          <a:prstGeom prst="rect">
-            <a:avLst/>
-          </a:prstGeom>
-          <a:noFill/>
-          <a:ln/>
-        </p:spPr>
-        <p:txBody>
-          <a:bodyPr wrap="square" lIns="0" tIns="0" rIns="0" bIns="0" rtlCol="0" anchor="ctr"/>
-          <a:lstStyle/>
-          <a:p>
-            <a:pPr indent="0" marL="0">
-              <a:buNone/>
-            </a:pPr>
-            <a:r>
-              <a:rPr lang="en-US" sz="1100" b="1" dirty="0">
-                <a:solidFill>
-                  <a:srgbClr val="1E293B"/>
-                </a:solidFill>
-                <a:latin typeface="Calibri" pitchFamily="34" charset="0"/>
-                <a:ea typeface="Calibri" pitchFamily="34" charset="-122"/>
-                <a:cs typeface="Calibri" pitchFamily="34" charset="-120"/>
-              </a:rPr>
-              <a:t>Analysis 3 — Macro Regression</a:t>
-            </a:r>
-            <a:endParaRPr lang="en-US" sz="1100" dirty="0"/>
-          </a:p>
-        </p:txBody>
-      </p:sp>
-      <p:sp>
-        <p:nvSpPr>
-          <p:cNvPr id="35" name="Text 33"/>
-          <p:cNvSpPr/>
-          <p:nvPr/>
-        </p:nvSpPr>
-        <p:spPr>
-          <a:xfrm>
-            <a:off x="4965192" y="3410712"/>
-            <a:ext cx="4069080" cy="274320"/>
-          </a:xfrm>
-          <a:prstGeom prst="rect">
-            <a:avLst/>
-          </a:prstGeom>
-          <a:noFill/>
-          <a:ln/>
-        </p:spPr>
-        <p:txBody>
-          <a:bodyPr wrap="square" lIns="0" tIns="0" rIns="0" bIns="0" rtlCol="0" anchor="ctr"/>
-          <a:lstStyle/>
-          <a:p>
-            <a:pPr indent="0" marL="0">
-              <a:buNone/>
-            </a:pPr>
-            <a:r>
-              <a:rPr lang="en-US" sz="900" dirty="0">
-                <a:solidFill>
-                  <a:srgbClr val="64748B"/>
-                </a:solidFill>
-                <a:latin typeface="Calibri" pitchFamily="34" charset="0"/>
-                <a:ea typeface="Calibri" pitchFamily="34" charset="-122"/>
-                <a:cs typeface="Calibri" pitchFamily="34" charset="-120"/>
-              </a:rPr>
-              <a:t>Inflation and interest rates as return predictors</a:t>
-            </a:r>
-            <a:endParaRPr lang="en-US" sz="900" dirty="0"/>
-          </a:p>
-        </p:txBody>
-      </p:sp>
-      <p:sp>
-        <p:nvSpPr>
-          <p:cNvPr id="36" name="Shape 34"/>
-          <p:cNvSpPr/>
-          <p:nvPr/>
-        </p:nvSpPr>
-        <p:spPr>
-          <a:xfrm>
-            <a:off x="320040" y="3840480"/>
-            <a:ext cx="4297680" cy="841248"/>
-          </a:xfrm>
-          <a:prstGeom prst="rect">
-            <a:avLst/>
-          </a:prstGeom>
-          <a:solidFill>
-            <a:srgbClr val="FFFFFF"/>
-          </a:solidFill>
-          <a:ln/>
-          <a:effectLst>
-            <a:outerShdw sx="100000" sy="100000" kx="0" ky="0" algn="bl" rotWithShape="0" blurRad="101600" dist="38100" dir="8100000">
-              <a:srgbClr val="000000">
-                <a:alpha val="12000"/>
-              </a:srgbClr>
-            </a:outerShdw>
-          </a:effectLst>
-        </p:spPr>
-      </p:sp>
-      <p:sp>
-        <p:nvSpPr>
-          <p:cNvPr id="37" name="Shape 35"/>
-          <p:cNvSpPr/>
-          <p:nvPr/>
-        </p:nvSpPr>
-        <p:spPr>
-          <a:xfrm>
-            <a:off x="320040" y="3840480"/>
-            <a:ext cx="91440" cy="841248"/>
-          </a:xfrm>
-          <a:prstGeom prst="rect">
-            <a:avLst/>
-          </a:prstGeom>
-          <a:solidFill>
-            <a:srgbClr val="1F77B4"/>
-          </a:solidFill>
-          <a:ln/>
-        </p:spPr>
-      </p:sp>
-      <p:sp>
-        <p:nvSpPr>
-          <p:cNvPr id="38" name="Text 36"/>
-          <p:cNvSpPr/>
-          <p:nvPr/>
-        </p:nvSpPr>
-        <p:spPr>
-          <a:xfrm>
-            <a:off x="484632" y="3913632"/>
-            <a:ext cx="457200" cy="320040"/>
-          </a:xfrm>
-          <a:prstGeom prst="rect">
-            <a:avLst/>
-          </a:prstGeom>
-          <a:noFill/>
-          <a:ln/>
-        </p:spPr>
-        <p:txBody>
-          <a:bodyPr wrap="square" lIns="0" tIns="0" rIns="0" bIns="0" rtlCol="0" anchor="ctr"/>
-          <a:lstStyle/>
-          <a:p>
-            <a:pPr indent="0" marL="0">
-              <a:buNone/>
-            </a:pPr>
-            <a:r>
-              <a:rPr lang="en-US" sz="1600" b="1" dirty="0">
-                <a:solidFill>
-                  <a:srgbClr val="1B2A4A"/>
-                </a:solidFill>
-                <a:latin typeface="Calibri" pitchFamily="34" charset="0"/>
-                <a:ea typeface="Calibri" pitchFamily="34" charset="-122"/>
-                <a:cs typeface="Calibri" pitchFamily="34" charset="-120"/>
-              </a:rPr>
-              <a:t>07</a:t>
-            </a:r>
-            <a:endParaRPr lang="en-US" sz="1600" dirty="0"/>
-          </a:p>
-        </p:txBody>
-      </p:sp>
-      <p:sp>
-        <p:nvSpPr>
-          <p:cNvPr id="39" name="Text 37"/>
-          <p:cNvSpPr/>
-          <p:nvPr/>
-        </p:nvSpPr>
-        <p:spPr>
-          <a:xfrm>
-            <a:off x="484632" y="4114800"/>
-            <a:ext cx="4069080" cy="274320"/>
-          </a:xfrm>
-          <a:prstGeom prst="rect">
-            <a:avLst/>
-          </a:prstGeom>
-          <a:noFill/>
-          <a:ln/>
-        </p:spPr>
-        <p:txBody>
-          <a:bodyPr wrap="square" lIns="0" tIns="0" rIns="0" bIns="0" rtlCol="0" anchor="ctr"/>
-          <a:lstStyle/>
-          <a:p>
-            <a:pPr indent="0" marL="0">
-              <a:buNone/>
-            </a:pPr>
-            <a:r>
-              <a:rPr lang="en-US" sz="1100" b="1" dirty="0">
-                <a:solidFill>
-                  <a:srgbClr val="1E293B"/>
-                </a:solidFill>
-                <a:latin typeface="Calibri" pitchFamily="34" charset="0"/>
-                <a:ea typeface="Calibri" pitchFamily="34" charset="-122"/>
-                <a:cs typeface="Calibri" pitchFamily="34" charset="-120"/>
-              </a:rPr>
-              <a:t>Discussion &amp; Limitations</a:t>
-            </a:r>
-            <a:endParaRPr lang="en-US" sz="1100" dirty="0"/>
-          </a:p>
-        </p:txBody>
-      </p:sp>
-      <p:sp>
-        <p:nvSpPr>
-          <p:cNvPr id="40" name="Text 38"/>
-          <p:cNvSpPr/>
-          <p:nvPr/>
-        </p:nvSpPr>
-        <p:spPr>
-          <a:xfrm>
-            <a:off x="484632" y="4370832"/>
-            <a:ext cx="4069080" cy="274320"/>
-          </a:xfrm>
-          <a:prstGeom prst="rect">
-            <a:avLst/>
-          </a:prstGeom>
-          <a:noFill/>
-          <a:ln/>
-        </p:spPr>
-        <p:txBody>
-          <a:bodyPr wrap="square" lIns="0" tIns="0" rIns="0" bIns="0" rtlCol="0" anchor="ctr"/>
-          <a:lstStyle/>
-          <a:p>
-            <a:pPr indent="0" marL="0">
-              <a:buNone/>
-            </a:pPr>
-            <a:r>
-              <a:rPr lang="en-US" sz="900" dirty="0">
-                <a:solidFill>
-                  <a:srgbClr val="64748B"/>
-                </a:solidFill>
-                <a:latin typeface="Calibri" pitchFamily="34" charset="0"/>
-                <a:ea typeface="Calibri" pitchFamily="34" charset="-122"/>
-                <a:cs typeface="Calibri" pitchFamily="34" charset="-120"/>
-              </a:rPr>
-              <a:t>Key findings, limitations, and future work</a:t>
-            </a:r>
-            <a:endParaRPr lang="en-US" sz="900" dirty="0"/>
-          </a:p>
-        </p:txBody>
-      </p:sp>
-      <p:sp>
-        <p:nvSpPr>
-          <p:cNvPr id="41" name="Shape 39"/>
-          <p:cNvSpPr/>
-          <p:nvPr/>
-        </p:nvSpPr>
-        <p:spPr>
-          <a:xfrm>
-            <a:off x="4800600" y="3840480"/>
-            <a:ext cx="4297680" cy="841248"/>
-          </a:xfrm>
-          <a:prstGeom prst="rect">
-            <a:avLst/>
-          </a:prstGeom>
-          <a:solidFill>
-            <a:srgbClr val="FFFFFF"/>
-          </a:solidFill>
-          <a:ln/>
-          <a:effectLst>
-            <a:outerShdw sx="100000" sy="100000" kx="0" ky="0" algn="bl" rotWithShape="0" blurRad="101600" dist="38100" dir="8100000">
-              <a:srgbClr val="000000">
-                <a:alpha val="12000"/>
-              </a:srgbClr>
-            </a:outerShdw>
-          </a:effectLst>
-        </p:spPr>
-      </p:sp>
-      <p:sp>
-        <p:nvSpPr>
-          <p:cNvPr id="42" name="Shape 40"/>
-          <p:cNvSpPr/>
-          <p:nvPr/>
-        </p:nvSpPr>
-        <p:spPr>
-          <a:xfrm>
-            <a:off x="4800600" y="3840480"/>
-            <a:ext cx="91440" cy="841248"/>
-          </a:xfrm>
-          <a:prstGeom prst="rect">
-            <a:avLst/>
-          </a:prstGeom>
-          <a:solidFill>
-            <a:srgbClr val="FF7F0E"/>
-          </a:solidFill>
-          <a:ln/>
-        </p:spPr>
-      </p:sp>
-      <p:sp>
-        <p:nvSpPr>
-          <p:cNvPr id="43" name="Text 41"/>
-          <p:cNvSpPr/>
-          <p:nvPr/>
-        </p:nvSpPr>
-        <p:spPr>
-          <a:xfrm>
-            <a:off x="4965192" y="3913632"/>
-            <a:ext cx="457200" cy="320040"/>
-          </a:xfrm>
-          <a:prstGeom prst="rect">
-            <a:avLst/>
-          </a:prstGeom>
-          <a:noFill/>
-          <a:ln/>
-        </p:spPr>
-        <p:txBody>
-          <a:bodyPr wrap="square" lIns="0" tIns="0" rIns="0" bIns="0" rtlCol="0" anchor="ctr"/>
-          <a:lstStyle/>
-          <a:p>
-            <a:pPr indent="0" marL="0">
-              <a:buNone/>
-            </a:pPr>
-            <a:r>
-              <a:rPr lang="en-US" sz="1600" b="1" dirty="0">
-                <a:solidFill>
-                  <a:srgbClr val="1B2A4A"/>
-                </a:solidFill>
-                <a:latin typeface="Calibri" pitchFamily="34" charset="0"/>
-                <a:ea typeface="Calibri" pitchFamily="34" charset="-122"/>
-                <a:cs typeface="Calibri" pitchFamily="34" charset="-120"/>
-              </a:rPr>
-              <a:t>08</a:t>
-            </a:r>
-            <a:endParaRPr lang="en-US" sz="1600" dirty="0"/>
-          </a:p>
-        </p:txBody>
-      </p:sp>
-      <p:sp>
-        <p:nvSpPr>
-          <p:cNvPr id="44" name="Text 42"/>
-          <p:cNvSpPr/>
-          <p:nvPr/>
-        </p:nvSpPr>
-        <p:spPr>
-          <a:xfrm>
-            <a:off x="4965192" y="4114800"/>
-            <a:ext cx="4069080" cy="274320"/>
-          </a:xfrm>
-          <a:prstGeom prst="rect">
-            <a:avLst/>
-          </a:prstGeom>
-          <a:noFill/>
-          <a:ln/>
-        </p:spPr>
-        <p:txBody>
-          <a:bodyPr wrap="square" lIns="0" tIns="0" rIns="0" bIns="0" rtlCol="0" anchor="ctr"/>
-          <a:lstStyle/>
-          <a:p>
-            <a:pPr indent="0" marL="0">
-              <a:buNone/>
-            </a:pPr>
-            <a:r>
-              <a:rPr lang="en-US" sz="1100" b="1" dirty="0">
-                <a:solidFill>
-                  <a:srgbClr val="1E293B"/>
-                </a:solidFill>
-                <a:latin typeface="Calibri" pitchFamily="34" charset="0"/>
-                <a:ea typeface="Calibri" pitchFamily="34" charset="-122"/>
-                <a:cs typeface="Calibri" pitchFamily="34" charset="-120"/>
-              </a:rPr>
-              <a:t>Team Roles &amp; References</a:t>
-            </a:r>
-            <a:endParaRPr lang="en-US" sz="1100" dirty="0"/>
-          </a:p>
-        </p:txBody>
-      </p:sp>
-      <p:sp>
-        <p:nvSpPr>
-          <p:cNvPr id="45" name="Text 43"/>
-          <p:cNvSpPr/>
-          <p:nvPr/>
-        </p:nvSpPr>
-        <p:spPr>
-          <a:xfrm>
-            <a:off x="4965192" y="4370832"/>
-            <a:ext cx="4069080" cy="274320"/>
-          </a:xfrm>
-          <a:prstGeom prst="rect">
-            <a:avLst/>
-          </a:prstGeom>
-          <a:noFill/>
-          <a:ln/>
-        </p:spPr>
-        <p:txBody>
-          <a:bodyPr wrap="square" lIns="0" tIns="0" rIns="0" bIns="0" rtlCol="0" anchor="ctr"/>
-          <a:lstStyle/>
-          <a:p>
-            <a:pPr indent="0" marL="0">
-              <a:buNone/>
-            </a:pPr>
-            <a:r>
-              <a:rPr lang="en-US" sz="900" dirty="0">
-                <a:solidFill>
-                  <a:srgbClr val="64748B"/>
-                </a:solidFill>
-                <a:latin typeface="Calibri" pitchFamily="34" charset="0"/>
-                <a:ea typeface="Calibri" pitchFamily="34" charset="-122"/>
-                <a:cs typeface="Calibri" pitchFamily="34" charset="-120"/>
-              </a:rPr>
-              <a:t>Contributions and data sources</a:t>
-            </a:r>
-            <a:endParaRPr lang="en-US" sz="900" dirty="0"/>
-          </a:p>
-        </p:txBody>
-      </p:sp>
-    </p:spTree>
-  </p:cSld>
-  <p:clrMapOvr>
-    <a:masterClrMapping/>
-  </p:clrMapOvr>
-</p:sld>
-</file>
-
-<file path=ppt/slides/slide20.xml><?xml version="1.0" encoding="utf-8"?>
+<file path=ppt/slides/slide21.xml><?xml version="1.0" encoding="utf-8"?>
 <p:sld xmlns:a="http://schemas.openxmlformats.org/drawingml/2006/main" xmlns:r="http://schemas.openxmlformats.org/officeDocument/2006/relationships" xmlns:p="http://schemas.openxmlformats.org/presentationml/2006/main">
   <p:cSld name="Slide 20">
     <p:bg>
@@ -11455,1359 +11717,6 @@
           </a:p>
         </p:txBody>
       </p:sp>
-    </p:spTree>
-  </p:cSld>
-  <p:clrMapOvr>
-    <a:masterClrMapping/>
-  </p:clrMapOvr>
-</p:sld>
-</file>
-
-<file path=ppt/slides/slide21.xml><?xml version="1.0" encoding="utf-8"?>
-<p:sld xmlns:a="http://schemas.openxmlformats.org/drawingml/2006/main" xmlns:r="http://schemas.openxmlformats.org/officeDocument/2006/relationships" xmlns:p="http://schemas.openxmlformats.org/presentationml/2006/main">
-  <p:cSld name="Slide 21">
-    <p:bg>
-      <p:bgPr>
-        <a:solidFill>
-          <a:srgbClr val="F4F7FC"/>
-        </a:solidFill>
-      </p:bgPr>
-    </p:bg>
-    <p:spTree>
-      <p:nvGrpSpPr>
-        <p:cNvPr id="1" name=""/>
-        <p:cNvGrpSpPr/>
-        <p:nvPr/>
-      </p:nvGrpSpPr>
-      <p:grpSpPr>
-        <a:xfrm>
-          <a:off x="0" y="0"/>
-          <a:ext cx="0" cy="0"/>
-          <a:chOff x="0" y="0"/>
-          <a:chExt cx="0" cy="0"/>
-        </a:xfrm>
-      </p:grpSpPr>
-      <p:sp>
-        <p:nvSpPr>
-          <p:cNvPr id="2" name="Shape 0"/>
-          <p:cNvSpPr/>
-          <p:nvPr/>
-        </p:nvSpPr>
-        <p:spPr>
-          <a:xfrm>
-            <a:off x="0" y="0"/>
-            <a:ext cx="9144000" cy="749808"/>
-          </a:xfrm>
-          <a:prstGeom prst="rect">
-            <a:avLst/>
-          </a:prstGeom>
-          <a:solidFill>
-            <a:srgbClr val="1B2A4A"/>
-          </a:solidFill>
-          <a:ln/>
-        </p:spPr>
-      </p:sp>
-      <p:sp>
-        <p:nvSpPr>
-          <p:cNvPr id="3" name="Shape 1"/>
-          <p:cNvSpPr/>
-          <p:nvPr/>
-        </p:nvSpPr>
-        <p:spPr>
-          <a:xfrm>
-            <a:off x="8595360" y="146304"/>
-            <a:ext cx="228600" cy="228600"/>
-          </a:xfrm>
-          <a:prstGeom prst="ellipse">
-            <a:avLst/>
-          </a:prstGeom>
-          <a:solidFill>
-            <a:srgbClr val="1F77B4"/>
-          </a:solidFill>
-          <a:ln/>
-        </p:spPr>
-      </p:sp>
-      <p:sp>
-        <p:nvSpPr>
-          <p:cNvPr id="4" name="Shape 2"/>
-          <p:cNvSpPr/>
-          <p:nvPr/>
-        </p:nvSpPr>
-        <p:spPr>
-          <a:xfrm>
-            <a:off x="8823960" y="146304"/>
-            <a:ext cx="228600" cy="228600"/>
-          </a:xfrm>
-          <a:prstGeom prst="ellipse">
-            <a:avLst/>
-          </a:prstGeom>
-          <a:solidFill>
-            <a:srgbClr val="FF7F0E"/>
-          </a:solidFill>
-          <a:ln/>
-        </p:spPr>
-      </p:sp>
-      <p:sp>
-        <p:nvSpPr>
-          <p:cNvPr id="5" name="Text 3"/>
-          <p:cNvSpPr/>
-          <p:nvPr/>
-        </p:nvSpPr>
-        <p:spPr>
-          <a:xfrm>
-            <a:off x="365760" y="73152"/>
-            <a:ext cx="8046720" cy="594360"/>
-          </a:xfrm>
-          <a:prstGeom prst="rect">
-            <a:avLst/>
-          </a:prstGeom>
-          <a:noFill/>
-          <a:ln/>
-        </p:spPr>
-        <p:txBody>
-          <a:bodyPr wrap="square" lIns="0" tIns="0" rIns="0" bIns="0" rtlCol="0" anchor="ctr"/>
-          <a:lstStyle/>
-          <a:p>
-            <a:pPr indent="0" marL="0">
-              <a:buNone/>
-            </a:pPr>
-            <a:r>
-              <a:rPr lang="en-US" sz="2200" b="1" dirty="0">
-                <a:solidFill>
-                  <a:srgbClr val="FFFFFF"/>
-                </a:solidFill>
-                <a:latin typeface="Calibri" pitchFamily="34" charset="0"/>
-                <a:ea typeface="Calibri" pitchFamily="34" charset="-122"/>
-                <a:cs typeface="Calibri" pitchFamily="34" charset="-120"/>
-              </a:rPr>
-              <a:t>Team Member Roles &amp; Contributions</a:t>
-            </a:r>
-            <a:endParaRPr lang="en-US" sz="2200" dirty="0"/>
-          </a:p>
-        </p:txBody>
-      </p:sp>
-      <p:graphicFrame>
-        <p:nvGraphicFramePr>
-          <p:cNvPr id="22" name="Table 0"/>
-          <p:cNvGraphicFramePr>
-            <a:graphicFrameLocks noGrp="1"/>
-          </p:cNvGraphicFramePr>
-          <p:nvPr>
-            <p:extLst>
-              <p:ext uri="{D42A27DB-BD31-4B8C-83A1-F6EECF244321}">
-                <p14:modId xmlns:p14="http://schemas.microsoft.com/office/powerpoint/2010/main" val="1579011935"/>
-              </p:ext>
-            </p:extLst>
-          </p:nvPr>
-        </p:nvGraphicFramePr>
-        <p:xfrm>
-          <a:off x="320040" y="868680"/>
-          <a:ext cx="8503920" cy="4114800"/>
-        </p:xfrm>
-        <a:graphic>
-          <a:graphicData uri="http://schemas.openxmlformats.org/drawingml/2006/table">
-            <a:tbl>
-              <a:tblPr/>
-              <a:tblGrid>
-                <a:gridCol w="1371600"/>
-                <a:gridCol w="2011680"/>
-                <a:gridCol w="5120640"/>
-              </a:tblGrid>
-              <a:tr h="685800">
-                <a:tc>
-                  <a:txBody>
-                    <a:bodyPr/>
-                    <a:lstStyle/>
-                    <a:p>
-                      <a:pPr indent="0" marL="0">
-                        <a:buNone/>
-                      </a:pPr>
-                      <a:r>
-                        <a:rPr lang="en-US" sz="1100" b="1" dirty="0">
-                          <a:solidFill>
-                            <a:srgbClr val="FFFFFF"/>
-                          </a:solidFill>
-                          <a:latin typeface="Calibri" pitchFamily="34" charset="0"/>
-                          <a:ea typeface="Calibri" pitchFamily="34" charset="-122"/>
-                          <a:cs typeface="Calibri" pitchFamily="34" charset="-120"/>
-                        </a:rPr>
-                        <a:t>Member</a:t>
-                      </a:r>
-                      <a:endParaRPr lang="en-US" sz="1100" dirty="0">
-                        <a:latin typeface="Calibri" charset="0"/>
-                        <a:ea typeface="Calibri" charset="0"/>
-                        <a:cs typeface="Calibri" charset="0"/>
-                      </a:endParaRPr>
-                    </a:p>
-                  </a:txBody>
-                  <a:tcPr marL="91440" marR="91440" marT="45720" marB="45720">
-                    <a:lnL w="12700" cap="flat" cmpd="sng" algn="ctr">
-                      <a:solidFill>
-                        <a:srgbClr val="CBD5E1"/>
-                      </a:solidFill>
-                      <a:prstDash val="solid"/>
-                      <a:round/>
-                      <a:headEnd type="none" w="med" len="med"/>
-                      <a:tailEnd type="none" w="med" len="med"/>
-                    </a:lnL>
-                    <a:lnR w="12700" cap="flat" cmpd="sng" algn="ctr">
-                      <a:solidFill>
-                        <a:srgbClr val="CBD5E1"/>
-                      </a:solidFill>
-                      <a:prstDash val="solid"/>
-                      <a:round/>
-                      <a:headEnd type="none" w="med" len="med"/>
-                      <a:tailEnd type="none" w="med" len="med"/>
-                    </a:lnR>
-                    <a:lnT w="12700" cap="flat" cmpd="sng" algn="ctr">
-                      <a:solidFill>
-                        <a:srgbClr val="CBD5E1"/>
-                      </a:solidFill>
-                      <a:prstDash val="solid"/>
-                      <a:round/>
-                      <a:headEnd type="none" w="med" len="med"/>
-                      <a:tailEnd type="none" w="med" len="med"/>
-                    </a:lnT>
-                    <a:lnB w="12700" cap="flat" cmpd="sng" algn="ctr">
-                      <a:solidFill>
-                        <a:srgbClr val="CBD5E1"/>
-                      </a:solidFill>
-                      <a:prstDash val="solid"/>
-                      <a:round/>
-                      <a:headEnd type="none" w="med" len="med"/>
-                      <a:tailEnd type="none" w="med" len="med"/>
-                    </a:lnB>
-                    <a:solidFill>
-                      <a:srgbClr val="1B2A4A"/>
-                    </a:solidFill>
-                  </a:tcPr>
-                </a:tc>
-                <a:tc>
-                  <a:txBody>
-                    <a:bodyPr/>
-                    <a:lstStyle/>
-                    <a:p>
-                      <a:pPr indent="0" marL="0">
-                        <a:buNone/>
-                      </a:pPr>
-                      <a:r>
-                        <a:rPr lang="en-US" sz="1100" b="1" dirty="0">
-                          <a:solidFill>
-                            <a:srgbClr val="FFFFFF"/>
-                          </a:solidFill>
-                          <a:latin typeface="Calibri" pitchFamily="34" charset="0"/>
-                          <a:ea typeface="Calibri" pitchFamily="34" charset="-122"/>
-                          <a:cs typeface="Calibri" pitchFamily="34" charset="-120"/>
-                        </a:rPr>
-                        <a:t>Role</a:t>
-                      </a:r>
-                      <a:endParaRPr lang="en-US" sz="1100" dirty="0">
-                        <a:latin typeface="Calibri" charset="0"/>
-                        <a:ea typeface="Calibri" charset="0"/>
-                        <a:cs typeface="Calibri" charset="0"/>
-                      </a:endParaRPr>
-                    </a:p>
-                  </a:txBody>
-                  <a:tcPr marL="91440" marR="91440" marT="45720" marB="45720">
-                    <a:lnL w="12700" cap="flat" cmpd="sng" algn="ctr">
-                      <a:solidFill>
-                        <a:srgbClr val="CBD5E1"/>
-                      </a:solidFill>
-                      <a:prstDash val="solid"/>
-                      <a:round/>
-                      <a:headEnd type="none" w="med" len="med"/>
-                      <a:tailEnd type="none" w="med" len="med"/>
-                    </a:lnL>
-                    <a:lnR w="12700" cap="flat" cmpd="sng" algn="ctr">
-                      <a:solidFill>
-                        <a:srgbClr val="CBD5E1"/>
-                      </a:solidFill>
-                      <a:prstDash val="solid"/>
-                      <a:round/>
-                      <a:headEnd type="none" w="med" len="med"/>
-                      <a:tailEnd type="none" w="med" len="med"/>
-                    </a:lnR>
-                    <a:lnT w="12700" cap="flat" cmpd="sng" algn="ctr">
-                      <a:solidFill>
-                        <a:srgbClr val="CBD5E1"/>
-                      </a:solidFill>
-                      <a:prstDash val="solid"/>
-                      <a:round/>
-                      <a:headEnd type="none" w="med" len="med"/>
-                      <a:tailEnd type="none" w="med" len="med"/>
-                    </a:lnT>
-                    <a:lnB w="12700" cap="flat" cmpd="sng" algn="ctr">
-                      <a:solidFill>
-                        <a:srgbClr val="CBD5E1"/>
-                      </a:solidFill>
-                      <a:prstDash val="solid"/>
-                      <a:round/>
-                      <a:headEnd type="none" w="med" len="med"/>
-                      <a:tailEnd type="none" w="med" len="med"/>
-                    </a:lnB>
-                    <a:solidFill>
-                      <a:srgbClr val="1B2A4A"/>
-                    </a:solidFill>
-                  </a:tcPr>
-                </a:tc>
-                <a:tc>
-                  <a:txBody>
-                    <a:bodyPr/>
-                    <a:lstStyle/>
-                    <a:p>
-                      <a:pPr indent="0" marL="0">
-                        <a:buNone/>
-                      </a:pPr>
-                      <a:r>
-                        <a:rPr lang="en-US" sz="1100" b="1" dirty="0">
-                          <a:solidFill>
-                            <a:srgbClr val="FFFFFF"/>
-                          </a:solidFill>
-                          <a:latin typeface="Calibri" pitchFamily="34" charset="0"/>
-                          <a:ea typeface="Calibri" pitchFamily="34" charset="-122"/>
-                          <a:cs typeface="Calibri" pitchFamily="34" charset="-120"/>
-                        </a:rPr>
-                        <a:t>Tasks</a:t>
-                      </a:r>
-                      <a:endParaRPr lang="en-US" sz="1100" dirty="0">
-                        <a:latin typeface="Calibri" charset="0"/>
-                        <a:ea typeface="Calibri" charset="0"/>
-                        <a:cs typeface="Calibri" charset="0"/>
-                      </a:endParaRPr>
-                    </a:p>
-                  </a:txBody>
-                  <a:tcPr marL="91440" marR="91440" marT="45720" marB="45720">
-                    <a:lnL w="12700" cap="flat" cmpd="sng" algn="ctr">
-                      <a:solidFill>
-                        <a:srgbClr val="CBD5E1"/>
-                      </a:solidFill>
-                      <a:prstDash val="solid"/>
-                      <a:round/>
-                      <a:headEnd type="none" w="med" len="med"/>
-                      <a:tailEnd type="none" w="med" len="med"/>
-                    </a:lnL>
-                    <a:lnR w="12700" cap="flat" cmpd="sng" algn="ctr">
-                      <a:solidFill>
-                        <a:srgbClr val="CBD5E1"/>
-                      </a:solidFill>
-                      <a:prstDash val="solid"/>
-                      <a:round/>
-                      <a:headEnd type="none" w="med" len="med"/>
-                      <a:tailEnd type="none" w="med" len="med"/>
-                    </a:lnR>
-                    <a:lnT w="12700" cap="flat" cmpd="sng" algn="ctr">
-                      <a:solidFill>
-                        <a:srgbClr val="CBD5E1"/>
-                      </a:solidFill>
-                      <a:prstDash val="solid"/>
-                      <a:round/>
-                      <a:headEnd type="none" w="med" len="med"/>
-                      <a:tailEnd type="none" w="med" len="med"/>
-                    </a:lnT>
-                    <a:lnB w="12700" cap="flat" cmpd="sng" algn="ctr">
-                      <a:solidFill>
-                        <a:srgbClr val="CBD5E1"/>
-                      </a:solidFill>
-                      <a:prstDash val="solid"/>
-                      <a:round/>
-                      <a:headEnd type="none" w="med" len="med"/>
-                      <a:tailEnd type="none" w="med" len="med"/>
-                    </a:lnB>
-                    <a:solidFill>
-                      <a:srgbClr val="1B2A4A"/>
-                    </a:solidFill>
-                  </a:tcPr>
-                </a:tc>
-              </a:tr>
-              <a:tr h="685800">
-                <a:tc>
-                  <a:txBody>
-                    <a:bodyPr/>
-                    <a:lstStyle/>
-                    <a:p>
-                      <a:pPr indent="0" marL="0">
-                        <a:buNone/>
-                      </a:pPr>
-                      <a:r>
-                        <a:rPr lang="en-US" sz="1000" dirty="0">
-                          <a:solidFill>
-                            <a:srgbClr val="000000"/>
-                          </a:solidFill>
-                          <a:latin typeface="Calibri" pitchFamily="34" charset="0"/>
-                          <a:ea typeface="Calibri" pitchFamily="34" charset="-122"/>
-                          <a:cs typeface="Calibri" pitchFamily="34" charset="-120"/>
-                        </a:rPr>
-                        <a:t>Member 1</a:t>
-                      </a:r>
-                      <a:endParaRPr lang="en-US" sz="1000" dirty="0">
-                        <a:latin typeface="Calibri" charset="0"/>
-                        <a:ea typeface="Calibri" charset="0"/>
-                        <a:cs typeface="Calibri" charset="0"/>
-                      </a:endParaRPr>
-                    </a:p>
-                  </a:txBody>
-                  <a:tcPr marL="91440" marR="91440" marT="45720" marB="45720">
-                    <a:lnL w="12700" cap="flat" cmpd="sng" algn="ctr">
-                      <a:solidFill>
-                        <a:srgbClr val="CBD5E1"/>
-                      </a:solidFill>
-                      <a:prstDash val="solid"/>
-                      <a:round/>
-                      <a:headEnd type="none" w="med" len="med"/>
-                      <a:tailEnd type="none" w="med" len="med"/>
-                    </a:lnL>
-                    <a:lnR w="12700" cap="flat" cmpd="sng" algn="ctr">
-                      <a:solidFill>
-                        <a:srgbClr val="CBD5E1"/>
-                      </a:solidFill>
-                      <a:prstDash val="solid"/>
-                      <a:round/>
-                      <a:headEnd type="none" w="med" len="med"/>
-                      <a:tailEnd type="none" w="med" len="med"/>
-                    </a:lnR>
-                    <a:lnT w="12700" cap="flat" cmpd="sng" algn="ctr">
-                      <a:solidFill>
-                        <a:srgbClr val="CBD5E1"/>
-                      </a:solidFill>
-                      <a:prstDash val="solid"/>
-                      <a:round/>
-                      <a:headEnd type="none" w="med" len="med"/>
-                      <a:tailEnd type="none" w="med" len="med"/>
-                    </a:lnT>
-                    <a:lnB w="12700" cap="flat" cmpd="sng" algn="ctr">
-                      <a:solidFill>
-                        <a:srgbClr val="CBD5E1"/>
-                      </a:solidFill>
-                      <a:prstDash val="solid"/>
-                      <a:round/>
-                      <a:headEnd type="none" w="med" len="med"/>
-                      <a:tailEnd type="none" w="med" len="med"/>
-                    </a:lnB>
-                  </a:tcPr>
-                </a:tc>
-                <a:tc>
-                  <a:txBody>
-                    <a:bodyPr/>
-                    <a:lstStyle/>
-                    <a:p>
-                      <a:pPr indent="0" marL="0">
-                        <a:buNone/>
-                      </a:pPr>
-                      <a:r>
-                        <a:rPr lang="en-US" sz="1000" dirty="0">
-                          <a:solidFill>
-                            <a:srgbClr val="000000"/>
-                          </a:solidFill>
-                          <a:latin typeface="Calibri" pitchFamily="34" charset="0"/>
-                          <a:ea typeface="Calibri" pitchFamily="34" charset="-122"/>
-                          <a:cs typeface="Calibri" pitchFamily="34" charset="-120"/>
-                        </a:rPr>
-                        <a:t>Project Lead &amp; Data Collection</a:t>
-                      </a:r>
-                      <a:endParaRPr lang="en-US" sz="1000" dirty="0">
-                        <a:latin typeface="Calibri" charset="0"/>
-                        <a:ea typeface="Calibri" charset="0"/>
-                        <a:cs typeface="Calibri" charset="0"/>
-                      </a:endParaRPr>
-                    </a:p>
-                  </a:txBody>
-                  <a:tcPr marL="91440" marR="91440" marT="45720" marB="45720">
-                    <a:lnL w="12700" cap="flat" cmpd="sng" algn="ctr">
-                      <a:solidFill>
-                        <a:srgbClr val="CBD5E1"/>
-                      </a:solidFill>
-                      <a:prstDash val="solid"/>
-                      <a:round/>
-                      <a:headEnd type="none" w="med" len="med"/>
-                      <a:tailEnd type="none" w="med" len="med"/>
-                    </a:lnL>
-                    <a:lnR w="12700" cap="flat" cmpd="sng" algn="ctr">
-                      <a:solidFill>
-                        <a:srgbClr val="CBD5E1"/>
-                      </a:solidFill>
-                      <a:prstDash val="solid"/>
-                      <a:round/>
-                      <a:headEnd type="none" w="med" len="med"/>
-                      <a:tailEnd type="none" w="med" len="med"/>
-                    </a:lnR>
-                    <a:lnT w="12700" cap="flat" cmpd="sng" algn="ctr">
-                      <a:solidFill>
-                        <a:srgbClr val="CBD5E1"/>
-                      </a:solidFill>
-                      <a:prstDash val="solid"/>
-                      <a:round/>
-                      <a:headEnd type="none" w="med" len="med"/>
-                      <a:tailEnd type="none" w="med" len="med"/>
-                    </a:lnT>
-                    <a:lnB w="12700" cap="flat" cmpd="sng" algn="ctr">
-                      <a:solidFill>
-                        <a:srgbClr val="CBD5E1"/>
-                      </a:solidFill>
-                      <a:prstDash val="solid"/>
-                      <a:round/>
-                      <a:headEnd type="none" w="med" len="med"/>
-                      <a:tailEnd type="none" w="med" len="med"/>
-                    </a:lnB>
-                  </a:tcPr>
-                </a:tc>
-                <a:tc>
-                  <a:txBody>
-                    <a:bodyPr/>
-                    <a:lstStyle/>
-                    <a:p>
-                      <a:pPr indent="0" marL="0">
-                        <a:buNone/>
-                      </a:pPr>
-                      <a:r>
-                        <a:rPr lang="en-US" sz="1000" dirty="0">
-                          <a:solidFill>
-                            <a:srgbClr val="000000"/>
-                          </a:solidFill>
-                          <a:latin typeface="Calibri" pitchFamily="34" charset="0"/>
-                          <a:ea typeface="Calibri" pitchFamily="34" charset="-122"/>
-                          <a:cs typeface="Calibri" pitchFamily="34" charset="-120"/>
-                        </a:rPr>
-                        <a:t>Defined research questions; downloaded stock and financial data using yfinance; managed project repository</a:t>
-                      </a:r>
-                      <a:endParaRPr lang="en-US" sz="1000" dirty="0">
-                        <a:latin typeface="Calibri" charset="0"/>
-                        <a:ea typeface="Calibri" charset="0"/>
-                        <a:cs typeface="Calibri" charset="0"/>
-                      </a:endParaRPr>
-                    </a:p>
-                  </a:txBody>
-                  <a:tcPr marL="91440" marR="91440" marT="45720" marB="45720">
-                    <a:lnL w="12700" cap="flat" cmpd="sng" algn="ctr">
-                      <a:solidFill>
-                        <a:srgbClr val="CBD5E1"/>
-                      </a:solidFill>
-                      <a:prstDash val="solid"/>
-                      <a:round/>
-                      <a:headEnd type="none" w="med" len="med"/>
-                      <a:tailEnd type="none" w="med" len="med"/>
-                    </a:lnL>
-                    <a:lnR w="12700" cap="flat" cmpd="sng" algn="ctr">
-                      <a:solidFill>
-                        <a:srgbClr val="CBD5E1"/>
-                      </a:solidFill>
-                      <a:prstDash val="solid"/>
-                      <a:round/>
-                      <a:headEnd type="none" w="med" len="med"/>
-                      <a:tailEnd type="none" w="med" len="med"/>
-                    </a:lnR>
-                    <a:lnT w="12700" cap="flat" cmpd="sng" algn="ctr">
-                      <a:solidFill>
-                        <a:srgbClr val="CBD5E1"/>
-                      </a:solidFill>
-                      <a:prstDash val="solid"/>
-                      <a:round/>
-                      <a:headEnd type="none" w="med" len="med"/>
-                      <a:tailEnd type="none" w="med" len="med"/>
-                    </a:lnT>
-                    <a:lnB w="12700" cap="flat" cmpd="sng" algn="ctr">
-                      <a:solidFill>
-                        <a:srgbClr val="CBD5E1"/>
-                      </a:solidFill>
-                      <a:prstDash val="solid"/>
-                      <a:round/>
-                      <a:headEnd type="none" w="med" len="med"/>
-                      <a:tailEnd type="none" w="med" len="med"/>
-                    </a:lnB>
-                  </a:tcPr>
-                </a:tc>
-              </a:tr>
-              <a:tr h="685800">
-                <a:tc>
-                  <a:txBody>
-                    <a:bodyPr/>
-                    <a:lstStyle/>
-                    <a:p>
-                      <a:pPr indent="0" marL="0">
-                        <a:buNone/>
-                      </a:pPr>
-                      <a:r>
-                        <a:rPr lang="en-US" sz="1000" dirty="0">
-                          <a:solidFill>
-                            <a:srgbClr val="000000"/>
-                          </a:solidFill>
-                          <a:latin typeface="Calibri" pitchFamily="34" charset="0"/>
-                          <a:ea typeface="Calibri" pitchFamily="34" charset="-122"/>
-                          <a:cs typeface="Calibri" pitchFamily="34" charset="-120"/>
-                        </a:rPr>
-                        <a:t>Member 2</a:t>
-                      </a:r>
-                      <a:endParaRPr lang="en-US" sz="1000" dirty="0">
-                        <a:latin typeface="Calibri" charset="0"/>
-                        <a:ea typeface="Calibri" charset="0"/>
-                        <a:cs typeface="Calibri" charset="0"/>
-                      </a:endParaRPr>
-                    </a:p>
-                  </a:txBody>
-                  <a:tcPr marL="91440" marR="91440" marT="45720" marB="45720">
-                    <a:lnL w="12700" cap="flat" cmpd="sng" algn="ctr">
-                      <a:solidFill>
-                        <a:srgbClr val="CBD5E1"/>
-                      </a:solidFill>
-                      <a:prstDash val="solid"/>
-                      <a:round/>
-                      <a:headEnd type="none" w="med" len="med"/>
-                      <a:tailEnd type="none" w="med" len="med"/>
-                    </a:lnL>
-                    <a:lnR w="12700" cap="flat" cmpd="sng" algn="ctr">
-                      <a:solidFill>
-                        <a:srgbClr val="CBD5E1"/>
-                      </a:solidFill>
-                      <a:prstDash val="solid"/>
-                      <a:round/>
-                      <a:headEnd type="none" w="med" len="med"/>
-                      <a:tailEnd type="none" w="med" len="med"/>
-                    </a:lnR>
-                    <a:lnT w="12700" cap="flat" cmpd="sng" algn="ctr">
-                      <a:solidFill>
-                        <a:srgbClr val="CBD5E1"/>
-                      </a:solidFill>
-                      <a:prstDash val="solid"/>
-                      <a:round/>
-                      <a:headEnd type="none" w="med" len="med"/>
-                      <a:tailEnd type="none" w="med" len="med"/>
-                    </a:lnT>
-                    <a:lnB w="12700" cap="flat" cmpd="sng" algn="ctr">
-                      <a:solidFill>
-                        <a:srgbClr val="CBD5E1"/>
-                      </a:solidFill>
-                      <a:prstDash val="solid"/>
-                      <a:round/>
-                      <a:headEnd type="none" w="med" len="med"/>
-                      <a:tailEnd type="none" w="med" len="med"/>
-                    </a:lnB>
-                  </a:tcPr>
-                </a:tc>
-                <a:tc>
-                  <a:txBody>
-                    <a:bodyPr/>
-                    <a:lstStyle/>
-                    <a:p>
-                      <a:pPr indent="0" marL="0">
-                        <a:buNone/>
-                      </a:pPr>
-                      <a:r>
-                        <a:rPr lang="en-US" sz="1000" dirty="0">
-                          <a:solidFill>
-                            <a:srgbClr val="000000"/>
-                          </a:solidFill>
-                          <a:latin typeface="Calibri" pitchFamily="34" charset="0"/>
-                          <a:ea typeface="Calibri" pitchFamily="34" charset="-122"/>
-                          <a:cs typeface="Calibri" pitchFamily="34" charset="-120"/>
-                        </a:rPr>
-                        <a:t>Data Cleaning &amp; EDA</a:t>
-                      </a:r>
-                      <a:endParaRPr lang="en-US" sz="1000" dirty="0">
-                        <a:latin typeface="Calibri" charset="0"/>
-                        <a:ea typeface="Calibri" charset="0"/>
-                        <a:cs typeface="Calibri" charset="0"/>
-                      </a:endParaRPr>
-                    </a:p>
-                  </a:txBody>
-                  <a:tcPr marL="91440" marR="91440" marT="45720" marB="45720">
-                    <a:lnL w="12700" cap="flat" cmpd="sng" algn="ctr">
-                      <a:solidFill>
-                        <a:srgbClr val="CBD5E1"/>
-                      </a:solidFill>
-                      <a:prstDash val="solid"/>
-                      <a:round/>
-                      <a:headEnd type="none" w="med" len="med"/>
-                      <a:tailEnd type="none" w="med" len="med"/>
-                    </a:lnL>
-                    <a:lnR w="12700" cap="flat" cmpd="sng" algn="ctr">
-                      <a:solidFill>
-                        <a:srgbClr val="CBD5E1"/>
-                      </a:solidFill>
-                      <a:prstDash val="solid"/>
-                      <a:round/>
-                      <a:headEnd type="none" w="med" len="med"/>
-                      <a:tailEnd type="none" w="med" len="med"/>
-                    </a:lnR>
-                    <a:lnT w="12700" cap="flat" cmpd="sng" algn="ctr">
-                      <a:solidFill>
-                        <a:srgbClr val="CBD5E1"/>
-                      </a:solidFill>
-                      <a:prstDash val="solid"/>
-                      <a:round/>
-                      <a:headEnd type="none" w="med" len="med"/>
-                      <a:tailEnd type="none" w="med" len="med"/>
-                    </a:lnT>
-                    <a:lnB w="12700" cap="flat" cmpd="sng" algn="ctr">
-                      <a:solidFill>
-                        <a:srgbClr val="CBD5E1"/>
-                      </a:solidFill>
-                      <a:prstDash val="solid"/>
-                      <a:round/>
-                      <a:headEnd type="none" w="med" len="med"/>
-                      <a:tailEnd type="none" w="med" len="med"/>
-                    </a:lnB>
-                  </a:tcPr>
-                </a:tc>
-                <a:tc>
-                  <a:txBody>
-                    <a:bodyPr/>
-                    <a:lstStyle/>
-                    <a:p>
-                      <a:pPr indent="0" marL="0">
-                        <a:buNone/>
-                      </a:pPr>
-                      <a:r>
-                        <a:rPr lang="en-US" sz="1000" dirty="0">
-                          <a:solidFill>
-                            <a:srgbClr val="000000"/>
-                          </a:solidFill>
-                          <a:latin typeface="Calibri" pitchFamily="34" charset="0"/>
-                          <a:ea typeface="Calibri" pitchFamily="34" charset="-122"/>
-                          <a:cs typeface="Calibri" pitchFamily="34" charset="-120"/>
-                        </a:rPr>
-                        <a:t>Cleaned datasets; handled missing values; built descriptive statistics; created normalized price and volatility charts</a:t>
-                      </a:r>
-                      <a:endParaRPr lang="en-US" sz="1000" dirty="0">
-                        <a:latin typeface="Calibri" charset="0"/>
-                        <a:ea typeface="Calibri" charset="0"/>
-                        <a:cs typeface="Calibri" charset="0"/>
-                      </a:endParaRPr>
-                    </a:p>
-                  </a:txBody>
-                  <a:tcPr marL="91440" marR="91440" marT="45720" marB="45720">
-                    <a:lnL w="12700" cap="flat" cmpd="sng" algn="ctr">
-                      <a:solidFill>
-                        <a:srgbClr val="CBD5E1"/>
-                      </a:solidFill>
-                      <a:prstDash val="solid"/>
-                      <a:round/>
-                      <a:headEnd type="none" w="med" len="med"/>
-                      <a:tailEnd type="none" w="med" len="med"/>
-                    </a:lnL>
-                    <a:lnR w="12700" cap="flat" cmpd="sng" algn="ctr">
-                      <a:solidFill>
-                        <a:srgbClr val="CBD5E1"/>
-                      </a:solidFill>
-                      <a:prstDash val="solid"/>
-                      <a:round/>
-                      <a:headEnd type="none" w="med" len="med"/>
-                      <a:tailEnd type="none" w="med" len="med"/>
-                    </a:lnR>
-                    <a:lnT w="12700" cap="flat" cmpd="sng" algn="ctr">
-                      <a:solidFill>
-                        <a:srgbClr val="CBD5E1"/>
-                      </a:solidFill>
-                      <a:prstDash val="solid"/>
-                      <a:round/>
-                      <a:headEnd type="none" w="med" len="med"/>
-                      <a:tailEnd type="none" w="med" len="med"/>
-                    </a:lnT>
-                    <a:lnB w="12700" cap="flat" cmpd="sng" algn="ctr">
-                      <a:solidFill>
-                        <a:srgbClr val="CBD5E1"/>
-                      </a:solidFill>
-                      <a:prstDash val="solid"/>
-                      <a:round/>
-                      <a:headEnd type="none" w="med" len="med"/>
-                      <a:tailEnd type="none" w="med" len="med"/>
-                    </a:lnB>
-                  </a:tcPr>
-                </a:tc>
-              </a:tr>
-              <a:tr h="685800">
-                <a:tc>
-                  <a:txBody>
-                    <a:bodyPr/>
-                    <a:lstStyle/>
-                    <a:p>
-                      <a:pPr indent="0" marL="0">
-                        <a:buNone/>
-                      </a:pPr>
-                      <a:r>
-                        <a:rPr lang="en-US" sz="1000" dirty="0">
-                          <a:solidFill>
-                            <a:srgbClr val="000000"/>
-                          </a:solidFill>
-                          <a:latin typeface="Calibri" pitchFamily="34" charset="0"/>
-                          <a:ea typeface="Calibri" pitchFamily="34" charset="-122"/>
-                          <a:cs typeface="Calibri" pitchFamily="34" charset="-120"/>
-                        </a:rPr>
-                        <a:t>Member 3</a:t>
-                      </a:r>
-                      <a:endParaRPr lang="en-US" sz="1000" dirty="0">
-                        <a:latin typeface="Calibri" charset="0"/>
-                        <a:ea typeface="Calibri" charset="0"/>
-                        <a:cs typeface="Calibri" charset="0"/>
-                      </a:endParaRPr>
-                    </a:p>
-                  </a:txBody>
-                  <a:tcPr marL="91440" marR="91440" marT="45720" marB="45720">
-                    <a:lnL w="12700" cap="flat" cmpd="sng" algn="ctr">
-                      <a:solidFill>
-                        <a:srgbClr val="CBD5E1"/>
-                      </a:solidFill>
-                      <a:prstDash val="solid"/>
-                      <a:round/>
-                      <a:headEnd type="none" w="med" len="med"/>
-                      <a:tailEnd type="none" w="med" len="med"/>
-                    </a:lnL>
-                    <a:lnR w="12700" cap="flat" cmpd="sng" algn="ctr">
-                      <a:solidFill>
-                        <a:srgbClr val="CBD5E1"/>
-                      </a:solidFill>
-                      <a:prstDash val="solid"/>
-                      <a:round/>
-                      <a:headEnd type="none" w="med" len="med"/>
-                      <a:tailEnd type="none" w="med" len="med"/>
-                    </a:lnR>
-                    <a:lnT w="12700" cap="flat" cmpd="sng" algn="ctr">
-                      <a:solidFill>
-                        <a:srgbClr val="CBD5E1"/>
-                      </a:solidFill>
-                      <a:prstDash val="solid"/>
-                      <a:round/>
-                      <a:headEnd type="none" w="med" len="med"/>
-                      <a:tailEnd type="none" w="med" len="med"/>
-                    </a:lnT>
-                    <a:lnB w="12700" cap="flat" cmpd="sng" algn="ctr">
-                      <a:solidFill>
-                        <a:srgbClr val="CBD5E1"/>
-                      </a:solidFill>
-                      <a:prstDash val="solid"/>
-                      <a:round/>
-                      <a:headEnd type="none" w="med" len="med"/>
-                      <a:tailEnd type="none" w="med" len="med"/>
-                    </a:lnB>
-                  </a:tcPr>
-                </a:tc>
-                <a:tc>
-                  <a:txBody>
-                    <a:bodyPr/>
-                    <a:lstStyle/>
-                    <a:p>
-                      <a:pPr indent="0" marL="0">
-                        <a:buNone/>
-                      </a:pPr>
-                      <a:r>
-                        <a:rPr lang="en-US" sz="1000" dirty="0">
-                          <a:solidFill>
-                            <a:srgbClr val="000000"/>
-                          </a:solidFill>
-                          <a:latin typeface="Calibri" pitchFamily="34" charset="0"/>
-                          <a:ea typeface="Calibri" pitchFamily="34" charset="-122"/>
-                          <a:cs typeface="Calibri" pitchFamily="34" charset="-120"/>
-                        </a:rPr>
-                        <a:t>Analysis 1 — Correlation</a:t>
-                      </a:r>
-                      <a:endParaRPr lang="en-US" sz="1000" dirty="0">
-                        <a:latin typeface="Calibri" charset="0"/>
-                        <a:ea typeface="Calibri" charset="0"/>
-                        <a:cs typeface="Calibri" charset="0"/>
-                      </a:endParaRPr>
-                    </a:p>
-                  </a:txBody>
-                  <a:tcPr marL="91440" marR="91440" marT="45720" marB="45720">
-                    <a:lnL w="12700" cap="flat" cmpd="sng" algn="ctr">
-                      <a:solidFill>
-                        <a:srgbClr val="CBD5E1"/>
-                      </a:solidFill>
-                      <a:prstDash val="solid"/>
-                      <a:round/>
-                      <a:headEnd type="none" w="med" len="med"/>
-                      <a:tailEnd type="none" w="med" len="med"/>
-                    </a:lnL>
-                    <a:lnR w="12700" cap="flat" cmpd="sng" algn="ctr">
-                      <a:solidFill>
-                        <a:srgbClr val="CBD5E1"/>
-                      </a:solidFill>
-                      <a:prstDash val="solid"/>
-                      <a:round/>
-                      <a:headEnd type="none" w="med" len="med"/>
-                      <a:tailEnd type="none" w="med" len="med"/>
-                    </a:lnR>
-                    <a:lnT w="12700" cap="flat" cmpd="sng" algn="ctr">
-                      <a:solidFill>
-                        <a:srgbClr val="CBD5E1"/>
-                      </a:solidFill>
-                      <a:prstDash val="solid"/>
-                      <a:round/>
-                      <a:headEnd type="none" w="med" len="med"/>
-                      <a:tailEnd type="none" w="med" len="med"/>
-                    </a:lnT>
-                    <a:lnB w="12700" cap="flat" cmpd="sng" algn="ctr">
-                      <a:solidFill>
-                        <a:srgbClr val="CBD5E1"/>
-                      </a:solidFill>
-                      <a:prstDash val="solid"/>
-                      <a:round/>
-                      <a:headEnd type="none" w="med" len="med"/>
-                      <a:tailEnd type="none" w="med" len="med"/>
-                    </a:lnB>
-                  </a:tcPr>
-                </a:tc>
-                <a:tc>
-                  <a:txBody>
-                    <a:bodyPr/>
-                    <a:lstStyle/>
-                    <a:p>
-                      <a:pPr indent="0" marL="0">
-                        <a:buNone/>
-                      </a:pPr>
-                      <a:r>
-                        <a:rPr lang="en-US" sz="1000" dirty="0">
-                          <a:solidFill>
-                            <a:srgbClr val="000000"/>
-                          </a:solidFill>
-                          <a:latin typeface="Calibri" pitchFamily="34" charset="0"/>
-                          <a:ea typeface="Calibri" pitchFamily="34" charset="-122"/>
-                          <a:cs typeface="Calibri" pitchFamily="34" charset="-120"/>
-                        </a:rPr>
-                        <a:t>Computed Pearson correlations; built rolling correlation and annual breakdown charts; wrote RQ1 conclusions</a:t>
-                      </a:r>
-                      <a:endParaRPr lang="en-US" sz="1000" dirty="0">
-                        <a:latin typeface="Calibri" charset="0"/>
-                        <a:ea typeface="Calibri" charset="0"/>
-                        <a:cs typeface="Calibri" charset="0"/>
-                      </a:endParaRPr>
-                    </a:p>
-                  </a:txBody>
-                  <a:tcPr marL="91440" marR="91440" marT="45720" marB="45720">
-                    <a:lnL w="12700" cap="flat" cmpd="sng" algn="ctr">
-                      <a:solidFill>
-                        <a:srgbClr val="CBD5E1"/>
-                      </a:solidFill>
-                      <a:prstDash val="solid"/>
-                      <a:round/>
-                      <a:headEnd type="none" w="med" len="med"/>
-                      <a:tailEnd type="none" w="med" len="med"/>
-                    </a:lnL>
-                    <a:lnR w="12700" cap="flat" cmpd="sng" algn="ctr">
-                      <a:solidFill>
-                        <a:srgbClr val="CBD5E1"/>
-                      </a:solidFill>
-                      <a:prstDash val="solid"/>
-                      <a:round/>
-                      <a:headEnd type="none" w="med" len="med"/>
-                      <a:tailEnd type="none" w="med" len="med"/>
-                    </a:lnR>
-                    <a:lnT w="12700" cap="flat" cmpd="sng" algn="ctr">
-                      <a:solidFill>
-                        <a:srgbClr val="CBD5E1"/>
-                      </a:solidFill>
-                      <a:prstDash val="solid"/>
-                      <a:round/>
-                      <a:headEnd type="none" w="med" len="med"/>
-                      <a:tailEnd type="none" w="med" len="med"/>
-                    </a:lnT>
-                    <a:lnB w="12700" cap="flat" cmpd="sng" algn="ctr">
-                      <a:solidFill>
-                        <a:srgbClr val="CBD5E1"/>
-                      </a:solidFill>
-                      <a:prstDash val="solid"/>
-                      <a:round/>
-                      <a:headEnd type="none" w="med" len="med"/>
-                      <a:tailEnd type="none" w="med" len="med"/>
-                    </a:lnB>
-                  </a:tcPr>
-                </a:tc>
-              </a:tr>
-              <a:tr h="685800">
-                <a:tc>
-                  <a:txBody>
-                    <a:bodyPr/>
-                    <a:lstStyle/>
-                    <a:p>
-                      <a:pPr indent="0" marL="0">
-                        <a:buNone/>
-                      </a:pPr>
-                      <a:r>
-                        <a:rPr lang="en-US" sz="1000" dirty="0">
-                          <a:solidFill>
-                            <a:srgbClr val="000000"/>
-                          </a:solidFill>
-                          <a:latin typeface="Calibri" pitchFamily="34" charset="0"/>
-                          <a:ea typeface="Calibri" pitchFamily="34" charset="-122"/>
-                          <a:cs typeface="Calibri" pitchFamily="34" charset="-120"/>
-                        </a:rPr>
-                        <a:t>Member 4</a:t>
-                      </a:r>
-                      <a:endParaRPr lang="en-US" sz="1000" dirty="0">
-                        <a:latin typeface="Calibri" charset="0"/>
-                        <a:ea typeface="Calibri" charset="0"/>
-                        <a:cs typeface="Calibri" charset="0"/>
-                      </a:endParaRPr>
-                    </a:p>
-                  </a:txBody>
-                  <a:tcPr marL="91440" marR="91440" marT="45720" marB="45720">
-                    <a:lnL w="12700" cap="flat" cmpd="sng" algn="ctr">
-                      <a:solidFill>
-                        <a:srgbClr val="CBD5E1"/>
-                      </a:solidFill>
-                      <a:prstDash val="solid"/>
-                      <a:round/>
-                      <a:headEnd type="none" w="med" len="med"/>
-                      <a:tailEnd type="none" w="med" len="med"/>
-                    </a:lnL>
-                    <a:lnR w="12700" cap="flat" cmpd="sng" algn="ctr">
-                      <a:solidFill>
-                        <a:srgbClr val="CBD5E1"/>
-                      </a:solidFill>
-                      <a:prstDash val="solid"/>
-                      <a:round/>
-                      <a:headEnd type="none" w="med" len="med"/>
-                      <a:tailEnd type="none" w="med" len="med"/>
-                    </a:lnR>
-                    <a:lnT w="12700" cap="flat" cmpd="sng" algn="ctr">
-                      <a:solidFill>
-                        <a:srgbClr val="CBD5E1"/>
-                      </a:solidFill>
-                      <a:prstDash val="solid"/>
-                      <a:round/>
-                      <a:headEnd type="none" w="med" len="med"/>
-                      <a:tailEnd type="none" w="med" len="med"/>
-                    </a:lnT>
-                    <a:lnB w="12700" cap="flat" cmpd="sng" algn="ctr">
-                      <a:solidFill>
-                        <a:srgbClr val="CBD5E1"/>
-                      </a:solidFill>
-                      <a:prstDash val="solid"/>
-                      <a:round/>
-                      <a:headEnd type="none" w="med" len="med"/>
-                      <a:tailEnd type="none" w="med" len="med"/>
-                    </a:lnB>
-                  </a:tcPr>
-                </a:tc>
-                <a:tc>
-                  <a:txBody>
-                    <a:bodyPr/>
-                    <a:lstStyle/>
-                    <a:p>
-                      <a:pPr indent="0" marL="0">
-                        <a:buNone/>
-                      </a:pPr>
-                      <a:r>
-                        <a:rPr lang="en-US" sz="1000" dirty="0">
-                          <a:solidFill>
-                            <a:srgbClr val="000000"/>
-                          </a:solidFill>
-                          <a:latin typeface="Calibri" pitchFamily="34" charset="0"/>
-                          <a:ea typeface="Calibri" pitchFamily="34" charset="-122"/>
-                          <a:cs typeface="Calibri" pitchFamily="34" charset="-120"/>
-                        </a:rPr>
-                        <a:t>Analysis 2 — Financials</a:t>
-                      </a:r>
-                      <a:endParaRPr lang="en-US" sz="1000" dirty="0">
-                        <a:latin typeface="Calibri" charset="0"/>
-                        <a:ea typeface="Calibri" charset="0"/>
-                        <a:cs typeface="Calibri" charset="0"/>
-                      </a:endParaRPr>
-                    </a:p>
-                  </a:txBody>
-                  <a:tcPr marL="91440" marR="91440" marT="45720" marB="45720">
-                    <a:lnL w="12700" cap="flat" cmpd="sng" algn="ctr">
-                      <a:solidFill>
-                        <a:srgbClr val="CBD5E1"/>
-                      </a:solidFill>
-                      <a:prstDash val="solid"/>
-                      <a:round/>
-                      <a:headEnd type="none" w="med" len="med"/>
-                      <a:tailEnd type="none" w="med" len="med"/>
-                    </a:lnL>
-                    <a:lnR w="12700" cap="flat" cmpd="sng" algn="ctr">
-                      <a:solidFill>
-                        <a:srgbClr val="CBD5E1"/>
-                      </a:solidFill>
-                      <a:prstDash val="solid"/>
-                      <a:round/>
-                      <a:headEnd type="none" w="med" len="med"/>
-                      <a:tailEnd type="none" w="med" len="med"/>
-                    </a:lnR>
-                    <a:lnT w="12700" cap="flat" cmpd="sng" algn="ctr">
-                      <a:solidFill>
-                        <a:srgbClr val="CBD5E1"/>
-                      </a:solidFill>
-                      <a:prstDash val="solid"/>
-                      <a:round/>
-                      <a:headEnd type="none" w="med" len="med"/>
-                      <a:tailEnd type="none" w="med" len="med"/>
-                    </a:lnT>
-                    <a:lnB w="12700" cap="flat" cmpd="sng" algn="ctr">
-                      <a:solidFill>
-                        <a:srgbClr val="CBD5E1"/>
-                      </a:solidFill>
-                      <a:prstDash val="solid"/>
-                      <a:round/>
-                      <a:headEnd type="none" w="med" len="med"/>
-                      <a:tailEnd type="none" w="med" len="med"/>
-                    </a:lnB>
-                  </a:tcPr>
-                </a:tc>
-                <a:tc>
-                  <a:txBody>
-                    <a:bodyPr/>
-                    <a:lstStyle/>
-                    <a:p>
-                      <a:pPr indent="0" marL="0">
-                        <a:buNone/>
-                      </a:pPr>
-                      <a:r>
-                        <a:rPr lang="en-US" sz="1000" dirty="0">
-                          <a:solidFill>
-                            <a:srgbClr val="000000"/>
-                          </a:solidFill>
-                          <a:latin typeface="Calibri" pitchFamily="34" charset="0"/>
-                          <a:ea typeface="Calibri" pitchFamily="34" charset="-122"/>
-                          <a:cs typeface="Calibri" pitchFamily="34" charset="-120"/>
-                        </a:rPr>
-                        <a:t>Extracted financial statements; computed margins and FCF; designed financial comparison charts; wrote RQ2 conclusions</a:t>
-                      </a:r>
-                      <a:endParaRPr lang="en-US" sz="1000" dirty="0">
-                        <a:latin typeface="Calibri" charset="0"/>
-                        <a:ea typeface="Calibri" charset="0"/>
-                        <a:cs typeface="Calibri" charset="0"/>
-                      </a:endParaRPr>
-                    </a:p>
-                  </a:txBody>
-                  <a:tcPr marL="91440" marR="91440" marT="45720" marB="45720">
-                    <a:lnL w="12700" cap="flat" cmpd="sng" algn="ctr">
-                      <a:solidFill>
-                        <a:srgbClr val="CBD5E1"/>
-                      </a:solidFill>
-                      <a:prstDash val="solid"/>
-                      <a:round/>
-                      <a:headEnd type="none" w="med" len="med"/>
-                      <a:tailEnd type="none" w="med" len="med"/>
-                    </a:lnL>
-                    <a:lnR w="12700" cap="flat" cmpd="sng" algn="ctr">
-                      <a:solidFill>
-                        <a:srgbClr val="CBD5E1"/>
-                      </a:solidFill>
-                      <a:prstDash val="solid"/>
-                      <a:round/>
-                      <a:headEnd type="none" w="med" len="med"/>
-                      <a:tailEnd type="none" w="med" len="med"/>
-                    </a:lnR>
-                    <a:lnT w="12700" cap="flat" cmpd="sng" algn="ctr">
-                      <a:solidFill>
-                        <a:srgbClr val="CBD5E1"/>
-                      </a:solidFill>
-                      <a:prstDash val="solid"/>
-                      <a:round/>
-                      <a:headEnd type="none" w="med" len="med"/>
-                      <a:tailEnd type="none" w="med" len="med"/>
-                    </a:lnT>
-                    <a:lnB w="12700" cap="flat" cmpd="sng" algn="ctr">
-                      <a:solidFill>
-                        <a:srgbClr val="CBD5E1"/>
-                      </a:solidFill>
-                      <a:prstDash val="solid"/>
-                      <a:round/>
-                      <a:headEnd type="none" w="med" len="med"/>
-                      <a:tailEnd type="none" w="med" len="med"/>
-                    </a:lnB>
-                  </a:tcPr>
-                </a:tc>
-              </a:tr>
-              <a:tr h="685800">
-                <a:tc>
-                  <a:txBody>
-                    <a:bodyPr/>
-                    <a:lstStyle/>
-                    <a:p>
-                      <a:pPr indent="0" marL="0">
-                        <a:buNone/>
-                      </a:pPr>
-                      <a:r>
-                        <a:rPr lang="en-US" sz="1000" dirty="0">
-                          <a:solidFill>
-                            <a:srgbClr val="000000"/>
-                          </a:solidFill>
-                          <a:latin typeface="Calibri" pitchFamily="34" charset="0"/>
-                          <a:ea typeface="Calibri" pitchFamily="34" charset="-122"/>
-                          <a:cs typeface="Calibri" pitchFamily="34" charset="-120"/>
-                        </a:rPr>
-                        <a:t>Member 5</a:t>
-                      </a:r>
-                      <a:endParaRPr lang="en-US" sz="1000" dirty="0">
-                        <a:latin typeface="Calibri" charset="0"/>
-                        <a:ea typeface="Calibri" charset="0"/>
-                        <a:cs typeface="Calibri" charset="0"/>
-                      </a:endParaRPr>
-                    </a:p>
-                  </a:txBody>
-                  <a:tcPr marL="91440" marR="91440" marT="45720" marB="45720">
-                    <a:lnL w="12700" cap="flat" cmpd="sng" algn="ctr">
-                      <a:solidFill>
-                        <a:srgbClr val="CBD5E1"/>
-                      </a:solidFill>
-                      <a:prstDash val="solid"/>
-                      <a:round/>
-                      <a:headEnd type="none" w="med" len="med"/>
-                      <a:tailEnd type="none" w="med" len="med"/>
-                    </a:lnL>
-                    <a:lnR w="12700" cap="flat" cmpd="sng" algn="ctr">
-                      <a:solidFill>
-                        <a:srgbClr val="CBD5E1"/>
-                      </a:solidFill>
-                      <a:prstDash val="solid"/>
-                      <a:round/>
-                      <a:headEnd type="none" w="med" len="med"/>
-                      <a:tailEnd type="none" w="med" len="med"/>
-                    </a:lnR>
-                    <a:lnT w="12700" cap="flat" cmpd="sng" algn="ctr">
-                      <a:solidFill>
-                        <a:srgbClr val="CBD5E1"/>
-                      </a:solidFill>
-                      <a:prstDash val="solid"/>
-                      <a:round/>
-                      <a:headEnd type="none" w="med" len="med"/>
-                      <a:tailEnd type="none" w="med" len="med"/>
-                    </a:lnT>
-                    <a:lnB w="12700" cap="flat" cmpd="sng" algn="ctr">
-                      <a:solidFill>
-                        <a:srgbClr val="CBD5E1"/>
-                      </a:solidFill>
-                      <a:prstDash val="solid"/>
-                      <a:round/>
-                      <a:headEnd type="none" w="med" len="med"/>
-                      <a:tailEnd type="none" w="med" len="med"/>
-                    </a:lnB>
-                  </a:tcPr>
-                </a:tc>
-                <a:tc>
-                  <a:txBody>
-                    <a:bodyPr/>
-                    <a:lstStyle/>
-                    <a:p>
-                      <a:pPr indent="0" marL="0">
-                        <a:buNone/>
-                      </a:pPr>
-                      <a:r>
-                        <a:rPr lang="en-US" sz="1000" dirty="0">
-                          <a:solidFill>
-                            <a:srgbClr val="000000"/>
-                          </a:solidFill>
-                          <a:latin typeface="Calibri" pitchFamily="34" charset="0"/>
-                          <a:ea typeface="Calibri" pitchFamily="34" charset="-122"/>
-                          <a:cs typeface="Calibri" pitchFamily="34" charset="-120"/>
-                        </a:rPr>
-                        <a:t>Analysis 3 &amp; Presentation</a:t>
-                      </a:r>
-                      <a:endParaRPr lang="en-US" sz="1000" dirty="0">
-                        <a:latin typeface="Calibri" charset="0"/>
-                        <a:ea typeface="Calibri" charset="0"/>
-                        <a:cs typeface="Calibri" charset="0"/>
-                      </a:endParaRPr>
-                    </a:p>
-                  </a:txBody>
-                  <a:tcPr marL="91440" marR="91440" marT="45720" marB="45720">
-                    <a:lnL w="12700" cap="flat" cmpd="sng" algn="ctr">
-                      <a:solidFill>
-                        <a:srgbClr val="CBD5E1"/>
-                      </a:solidFill>
-                      <a:prstDash val="solid"/>
-                      <a:round/>
-                      <a:headEnd type="none" w="med" len="med"/>
-                      <a:tailEnd type="none" w="med" len="med"/>
-                    </a:lnL>
-                    <a:lnR w="12700" cap="flat" cmpd="sng" algn="ctr">
-                      <a:solidFill>
-                        <a:srgbClr val="CBD5E1"/>
-                      </a:solidFill>
-                      <a:prstDash val="solid"/>
-                      <a:round/>
-                      <a:headEnd type="none" w="med" len="med"/>
-                      <a:tailEnd type="none" w="med" len="med"/>
-                    </a:lnR>
-                    <a:lnT w="12700" cap="flat" cmpd="sng" algn="ctr">
-                      <a:solidFill>
-                        <a:srgbClr val="CBD5E1"/>
-                      </a:solidFill>
-                      <a:prstDash val="solid"/>
-                      <a:round/>
-                      <a:headEnd type="none" w="med" len="med"/>
-                      <a:tailEnd type="none" w="med" len="med"/>
-                    </a:lnT>
-                    <a:lnB w="12700" cap="flat" cmpd="sng" algn="ctr">
-                      <a:solidFill>
-                        <a:srgbClr val="CBD5E1"/>
-                      </a:solidFill>
-                      <a:prstDash val="solid"/>
-                      <a:round/>
-                      <a:headEnd type="none" w="med" len="med"/>
-                      <a:tailEnd type="none" w="med" len="med"/>
-                    </a:lnB>
-                  </a:tcPr>
-                </a:tc>
-                <a:tc>
-                  <a:txBody>
-                    <a:bodyPr/>
-                    <a:lstStyle/>
-                    <a:p>
-                      <a:pPr indent="0" marL="0">
-                        <a:buNone/>
-                      </a:pPr>
-                      <a:r>
-                        <a:rPr lang="en-US" sz="1000" dirty="0">
-                          <a:solidFill>
-                            <a:srgbClr val="000000"/>
-                          </a:solidFill>
-                          <a:latin typeface="Calibri" pitchFamily="34" charset="0"/>
-                          <a:ea typeface="Calibri" pitchFamily="34" charset="-122"/>
-                          <a:cs typeface="Calibri" pitchFamily="34" charset="-120"/>
-                        </a:rPr>
-                        <a:t>Built macro regression models; downloaded FRED data; created regression charts; assembled presentation slides</a:t>
-                      </a:r>
-                      <a:endParaRPr lang="en-US" sz="1000" dirty="0">
-                        <a:latin typeface="Calibri" charset="0"/>
-                        <a:ea typeface="Calibri" charset="0"/>
-                        <a:cs typeface="Calibri" charset="0"/>
-                      </a:endParaRPr>
-                    </a:p>
-                  </a:txBody>
-                  <a:tcPr marL="91440" marR="91440" marT="45720" marB="45720">
-                    <a:lnL w="12700" cap="flat" cmpd="sng" algn="ctr">
-                      <a:solidFill>
-                        <a:srgbClr val="CBD5E1"/>
-                      </a:solidFill>
-                      <a:prstDash val="solid"/>
-                      <a:round/>
-                      <a:headEnd type="none" w="med" len="med"/>
-                      <a:tailEnd type="none" w="med" len="med"/>
-                    </a:lnL>
-                    <a:lnR w="12700" cap="flat" cmpd="sng" algn="ctr">
-                      <a:solidFill>
-                        <a:srgbClr val="CBD5E1"/>
-                      </a:solidFill>
-                      <a:prstDash val="solid"/>
-                      <a:round/>
-                      <a:headEnd type="none" w="med" len="med"/>
-                      <a:tailEnd type="none" w="med" len="med"/>
-                    </a:lnR>
-                    <a:lnT w="12700" cap="flat" cmpd="sng" algn="ctr">
-                      <a:solidFill>
-                        <a:srgbClr val="CBD5E1"/>
-                      </a:solidFill>
-                      <a:prstDash val="solid"/>
-                      <a:round/>
-                      <a:headEnd type="none" w="med" len="med"/>
-                      <a:tailEnd type="none" w="med" len="med"/>
-                    </a:lnT>
-                    <a:lnB w="12700" cap="flat" cmpd="sng" algn="ctr">
-                      <a:solidFill>
-                        <a:srgbClr val="CBD5E1"/>
-                      </a:solidFill>
-                      <a:prstDash val="solid"/>
-                      <a:round/>
-                      <a:headEnd type="none" w="med" len="med"/>
-                      <a:tailEnd type="none" w="med" len="med"/>
-                    </a:lnB>
-                  </a:tcPr>
-                </a:tc>
-              </a:tr>
-            </a:tbl>
-          </a:graphicData>
-        </a:graphic>
-      </p:graphicFrame>
     </p:spTree>
   </p:cSld>
   <p:clrMapOvr>
@@ -13934,6 +12843,10 @@
           </a:solidFill>
           <a:ln/>
         </p:spPr>
+        <p:txBody>
+          <a:bodyPr/>
+          <a:p/>
+        </p:txBody>
       </p:sp>
       <p:sp>
         <p:nvSpPr>
@@ -13954,6 +12867,10 @@
           </a:solidFill>
           <a:ln/>
         </p:spPr>
+        <p:txBody>
+          <a:bodyPr/>
+          <a:p/>
+        </p:txBody>
       </p:sp>
       <p:sp>
         <p:nvSpPr>
@@ -14055,6 +12972,10 @@
             <a:prstDash val="solid"/>
           </a:ln>
         </p:spPr>
+        <p:txBody>
+          <a:bodyPr/>
+          <a:p/>
+        </p:txBody>
       </p:sp>
       <p:sp>
         <p:nvSpPr>
@@ -14089,7 +13010,7 @@
                 <a:ea typeface="Calibri" pitchFamily="34" charset="-122"/>
                 <a:cs typeface="Calibri" pitchFamily="34" charset="-120"/>
               </a:rPr>
-              <a:t>Apple vs Samsung — Competitive Financial &amp; Market Analysis  |  MTH 209  |  Spring 2026</a:t>
+              <a:t>Apple vs Samsung — Competitive Financial &amp; Market Analysis  |    |  Spring 2026</a:t>
             </a:r>
             <a:endParaRPr lang="en-US" sz="1100" dirty="0"/>
           </a:p>
@@ -14377,6 +13298,879 @@
               <a:t>Apple vs Samsung</a:t>
             </a:r>
             <a:endParaRPr lang="en-US" sz="900" dirty="0"/>
+          </a:p>
+        </p:txBody>
+      </p:sp>
+    </p:spTree>
+  </p:cSld>
+  <p:clrMapOvr>
+    <a:masterClrMapping/>
+  </p:clrMapOvr>
+</p:sld>
+</file>
+
+<file path=ppt/slides/slide24.xml><?xml version="1.0" encoding="utf-8"?>
+<p:sld xmlns:a="http://schemas.openxmlformats.org/drawingml/2006/main" xmlns:p="http://schemas.openxmlformats.org/presentationml/2006/main" xmlns:r="http://schemas.openxmlformats.org/officeDocument/2006/relationships">
+  <p:cSld>
+    <p:bg>
+      <p:bgPr>
+        <a:solidFill>
+          <a:srgbClr val="0A1F44"/>
+        </a:solidFill>
+        <a:effectLst/>
+      </p:bgPr>
+    </p:bg>
+    <p:spTree>
+      <p:nvGrpSpPr>
+        <p:cNvPr id="1" name=""/>
+        <p:cNvGrpSpPr/>
+        <p:nvPr/>
+      </p:nvGrpSpPr>
+      <p:grpSpPr/>
+      <p:sp>
+        <p:nvSpPr>
+          <p:cNvPr id="2" name="Rectangle 1"/>
+          <p:cNvSpPr/>
+          <p:nvPr/>
+        </p:nvSpPr>
+        <p:spPr>
+          <a:xfrm>
+            <a:off x="0" y="0"/>
+            <a:ext cx="12191695" cy="1051560"/>
+          </a:xfrm>
+          <a:prstGeom prst="rect">
+            <a:avLst/>
+          </a:prstGeom>
+          <a:solidFill>
+            <a:srgbClr val="1A6BC8"/>
+          </a:solidFill>
+          <a:ln>
+            <a:noFill/>
+          </a:ln>
+        </p:spPr>
+        <p:style>
+          <a:lnRef idx="1">
+            <a:schemeClr val="accent1"/>
+          </a:lnRef>
+          <a:fillRef idx="3">
+            <a:schemeClr val="accent1"/>
+          </a:fillRef>
+          <a:effectRef idx="2">
+            <a:schemeClr val="accent1"/>
+          </a:effectRef>
+          <a:fontRef idx="minor">
+            <a:schemeClr val="lt1"/>
+          </a:fontRef>
+        </p:style>
+        <p:txBody>
+          <a:bodyPr rtlCol="0" anchor="ctr"/>
+          <a:lstStyle/>
+          <a:p>
+            <a:pPr algn="ctr"/>
+            <a:r>
+              <a:rPr b="1" sz="3200">
+                <a:solidFill>
+                  <a:srgbClr val="FFFFFF"/>
+                </a:solidFill>
+              </a:rPr>
+              <a:t>Theoretical Framework</a:t>
+            </a:r>
+          </a:p>
+        </p:txBody>
+      </p:sp>
+      <p:sp>
+        <p:nvSpPr>
+          <p:cNvPr id="3" name="Rectangle 2"/>
+          <p:cNvSpPr/>
+          <p:nvPr/>
+        </p:nvSpPr>
+        <p:spPr>
+          <a:xfrm>
+            <a:off x="540867" y="1234440"/>
+            <a:ext cx="2606040" cy="4572000"/>
+          </a:xfrm>
+          <a:prstGeom prst="rect">
+            <a:avLst/>
+          </a:prstGeom>
+          <a:solidFill>
+            <a:srgbClr val="F0F4FA"/>
+          </a:solidFill>
+          <a:ln w="19050">
+            <a:solidFill>
+              <a:srgbClr val="1A6BC8"/>
+            </a:solidFill>
+          </a:ln>
+        </p:spPr>
+        <p:style>
+          <a:lnRef idx="1">
+            <a:schemeClr val="accent1"/>
+          </a:lnRef>
+          <a:fillRef idx="3">
+            <a:schemeClr val="accent1"/>
+          </a:fillRef>
+          <a:effectRef idx="2">
+            <a:schemeClr val="accent1"/>
+          </a:effectRef>
+          <a:fontRef idx="minor">
+            <a:schemeClr val="lt1"/>
+          </a:fontRef>
+        </p:style>
+        <p:txBody>
+          <a:bodyPr rtlCol="0" anchor="ctr"/>
+          <a:lstStyle/>
+          <a:p>
+            <a:pPr algn="ctr"/>
+          </a:p>
+        </p:txBody>
+      </p:sp>
+      <p:sp>
+        <p:nvSpPr>
+          <p:cNvPr id="4" name="Oval 3"/>
+          <p:cNvSpPr/>
+          <p:nvPr/>
+        </p:nvSpPr>
+        <p:spPr>
+          <a:xfrm>
+            <a:off x="1432407" y="1417320"/>
+            <a:ext cx="822960" cy="822960"/>
+          </a:xfrm>
+          <a:prstGeom prst="ellipse">
+            <a:avLst/>
+          </a:prstGeom>
+          <a:solidFill>
+            <a:srgbClr val="1A6BC8"/>
+          </a:solidFill>
+          <a:ln>
+            <a:noFill/>
+          </a:ln>
+        </p:spPr>
+        <p:style>
+          <a:lnRef idx="1">
+            <a:schemeClr val="accent1"/>
+          </a:lnRef>
+          <a:fillRef idx="3">
+            <a:schemeClr val="accent1"/>
+          </a:fillRef>
+          <a:effectRef idx="2">
+            <a:schemeClr val="accent1"/>
+          </a:effectRef>
+          <a:fontRef idx="minor">
+            <a:schemeClr val="lt1"/>
+          </a:fontRef>
+        </p:style>
+        <p:txBody>
+          <a:bodyPr rtlCol="0" anchor="ctr"/>
+          <a:lstStyle/>
+          <a:p>
+            <a:pPr algn="ctr"/>
+            <a:r>
+              <a:rPr b="1" sz="1500">
+                <a:solidFill>
+                  <a:srgbClr val="FFFFFF"/>
+                </a:solidFill>
+              </a:rPr>
+              <a:t>EMH</a:t>
+            </a:r>
+          </a:p>
+        </p:txBody>
+      </p:sp>
+      <p:sp>
+        <p:nvSpPr>
+          <p:cNvPr id="5" name="TextBox 4"/>
+          <p:cNvSpPr txBox="1"/>
+          <p:nvPr/>
+        </p:nvSpPr>
+        <p:spPr>
+          <a:xfrm>
+            <a:off x="632307" y="2331720"/>
+            <a:ext cx="2423160" cy="822960"/>
+          </a:xfrm>
+          <a:prstGeom prst="rect">
+            <a:avLst/>
+          </a:prstGeom>
+          <a:noFill/>
+        </p:spPr>
+        <p:txBody>
+          <a:bodyPr wrap="square">
+            <a:spAutoFit/>
+          </a:bodyPr>
+          <a:lstStyle/>
+          <a:p>
+            <a:pPr algn="ctr"/>
+            <a:r>
+              <a:rPr b="1" sz="1200">
+                <a:solidFill>
+                  <a:srgbClr val="0A1F44"/>
+                </a:solidFill>
+              </a:rPr>
+              <a:t>Efficient Market
+Hypothesis</a:t>
+            </a:r>
+          </a:p>
+        </p:txBody>
+      </p:sp>
+      <p:sp>
+        <p:nvSpPr>
+          <p:cNvPr id="6" name="TextBox 5"/>
+          <p:cNvSpPr txBox="1"/>
+          <p:nvPr/>
+        </p:nvSpPr>
+        <p:spPr>
+          <a:xfrm>
+            <a:off x="632307" y="3200400"/>
+            <a:ext cx="2423160" cy="320040"/>
+          </a:xfrm>
+          <a:prstGeom prst="rect">
+            <a:avLst/>
+          </a:prstGeom>
+          <a:noFill/>
+        </p:spPr>
+        <p:txBody>
+          <a:bodyPr wrap="square">
+            <a:spAutoFit/>
+          </a:bodyPr>
+          <a:lstStyle/>
+          <a:p>
+            <a:pPr algn="ctr"/>
+            <a:r>
+              <a:rPr i="1" sz="1000">
+                <a:solidFill>
+                  <a:srgbClr val="1A6BC8"/>
+                </a:solidFill>
+              </a:rPr>
+              <a:t>Fama (1970)</a:t>
+            </a:r>
+          </a:p>
+        </p:txBody>
+      </p:sp>
+      <p:sp>
+        <p:nvSpPr>
+          <p:cNvPr id="7" name="TextBox 6"/>
+          <p:cNvSpPr txBox="1"/>
+          <p:nvPr/>
+        </p:nvSpPr>
+        <p:spPr>
+          <a:xfrm>
+            <a:off x="678027" y="3611880"/>
+            <a:ext cx="2331720" cy="2011680"/>
+          </a:xfrm>
+          <a:prstGeom prst="rect">
+            <a:avLst/>
+          </a:prstGeom>
+          <a:noFill/>
+        </p:spPr>
+        <p:txBody>
+          <a:bodyPr wrap="square">
+            <a:spAutoFit/>
+          </a:bodyPr>
+          <a:lstStyle/>
+          <a:p>
+            <a:pPr algn="ctr"/>
+            <a:r>
+              <a:rPr sz="950">
+                <a:solidFill>
+                  <a:srgbClr val="0A1F44"/>
+                </a:solidFill>
+              </a:rPr>
+              <a:t>Asset prices reflect all available information — abnormal returns arise only from risk differences.</a:t>
+            </a:r>
+          </a:p>
+        </p:txBody>
+      </p:sp>
+      <p:sp>
+        <p:nvSpPr>
+          <p:cNvPr id="8" name="Rectangle 7"/>
+          <p:cNvSpPr/>
+          <p:nvPr/>
+        </p:nvSpPr>
+        <p:spPr>
+          <a:xfrm>
+            <a:off x="3375507" y="1234440"/>
+            <a:ext cx="2606040" cy="4572000"/>
+          </a:xfrm>
+          <a:prstGeom prst="rect">
+            <a:avLst/>
+          </a:prstGeom>
+          <a:solidFill>
+            <a:srgbClr val="F0F4FA"/>
+          </a:solidFill>
+          <a:ln w="19050">
+            <a:solidFill>
+              <a:srgbClr val="1A6BC8"/>
+            </a:solidFill>
+          </a:ln>
+        </p:spPr>
+        <p:style>
+          <a:lnRef idx="1">
+            <a:schemeClr val="accent1"/>
+          </a:lnRef>
+          <a:fillRef idx="3">
+            <a:schemeClr val="accent1"/>
+          </a:fillRef>
+          <a:effectRef idx="2">
+            <a:schemeClr val="accent1"/>
+          </a:effectRef>
+          <a:fontRef idx="minor">
+            <a:schemeClr val="lt1"/>
+          </a:fontRef>
+        </p:style>
+        <p:txBody>
+          <a:bodyPr rtlCol="0" anchor="ctr"/>
+          <a:lstStyle/>
+          <a:p>
+            <a:pPr algn="ctr"/>
+          </a:p>
+        </p:txBody>
+      </p:sp>
+      <p:sp>
+        <p:nvSpPr>
+          <p:cNvPr id="9" name="Oval 8"/>
+          <p:cNvSpPr/>
+          <p:nvPr/>
+        </p:nvSpPr>
+        <p:spPr>
+          <a:xfrm>
+            <a:off x="4267047" y="1417320"/>
+            <a:ext cx="822960" cy="822960"/>
+          </a:xfrm>
+          <a:prstGeom prst="ellipse">
+            <a:avLst/>
+          </a:prstGeom>
+          <a:solidFill>
+            <a:srgbClr val="1A6BC8"/>
+          </a:solidFill>
+          <a:ln>
+            <a:noFill/>
+          </a:ln>
+        </p:spPr>
+        <p:style>
+          <a:lnRef idx="1">
+            <a:schemeClr val="accent1"/>
+          </a:lnRef>
+          <a:fillRef idx="3">
+            <a:schemeClr val="accent1"/>
+          </a:fillRef>
+          <a:effectRef idx="2">
+            <a:schemeClr val="accent1"/>
+          </a:effectRef>
+          <a:fontRef idx="minor">
+            <a:schemeClr val="lt1"/>
+          </a:fontRef>
+        </p:style>
+        <p:txBody>
+          <a:bodyPr rtlCol="0" anchor="ctr"/>
+          <a:lstStyle/>
+          <a:p>
+            <a:pPr algn="ctr"/>
+            <a:r>
+              <a:rPr b="1" sz="1500">
+                <a:solidFill>
+                  <a:srgbClr val="FFFFFF"/>
+                </a:solidFill>
+              </a:rPr>
+              <a:t>MPT</a:t>
+            </a:r>
+          </a:p>
+        </p:txBody>
+      </p:sp>
+      <p:sp>
+        <p:nvSpPr>
+          <p:cNvPr id="10" name="TextBox 9"/>
+          <p:cNvSpPr txBox="1"/>
+          <p:nvPr/>
+        </p:nvSpPr>
+        <p:spPr>
+          <a:xfrm>
+            <a:off x="3466947" y="2331720"/>
+            <a:ext cx="2423160" cy="822960"/>
+          </a:xfrm>
+          <a:prstGeom prst="rect">
+            <a:avLst/>
+          </a:prstGeom>
+          <a:noFill/>
+        </p:spPr>
+        <p:txBody>
+          <a:bodyPr wrap="square">
+            <a:spAutoFit/>
+          </a:bodyPr>
+          <a:lstStyle/>
+          <a:p>
+            <a:pPr algn="ctr"/>
+            <a:r>
+              <a:rPr b="1" sz="1200">
+                <a:solidFill>
+                  <a:srgbClr val="0A1F44"/>
+                </a:solidFill>
+              </a:rPr>
+              <a:t>Modern Portfolio
+Theory</a:t>
+            </a:r>
+          </a:p>
+        </p:txBody>
+      </p:sp>
+      <p:sp>
+        <p:nvSpPr>
+          <p:cNvPr id="11" name="TextBox 10"/>
+          <p:cNvSpPr txBox="1"/>
+          <p:nvPr/>
+        </p:nvSpPr>
+        <p:spPr>
+          <a:xfrm>
+            <a:off x="3466947" y="3200400"/>
+            <a:ext cx="2423160" cy="320040"/>
+          </a:xfrm>
+          <a:prstGeom prst="rect">
+            <a:avLst/>
+          </a:prstGeom>
+          <a:noFill/>
+        </p:spPr>
+        <p:txBody>
+          <a:bodyPr wrap="square">
+            <a:spAutoFit/>
+          </a:bodyPr>
+          <a:lstStyle/>
+          <a:p>
+            <a:pPr algn="ctr"/>
+            <a:r>
+              <a:rPr i="1" sz="1000">
+                <a:solidFill>
+                  <a:srgbClr val="1A6BC8"/>
+                </a:solidFill>
+              </a:rPr>
+              <a:t>Markowitz (1952)</a:t>
+            </a:r>
+          </a:p>
+        </p:txBody>
+      </p:sp>
+      <p:sp>
+        <p:nvSpPr>
+          <p:cNvPr id="12" name="TextBox 11"/>
+          <p:cNvSpPr txBox="1"/>
+          <p:nvPr/>
+        </p:nvSpPr>
+        <p:spPr>
+          <a:xfrm>
+            <a:off x="3512667" y="3611880"/>
+            <a:ext cx="2331720" cy="2011680"/>
+          </a:xfrm>
+          <a:prstGeom prst="rect">
+            <a:avLst/>
+          </a:prstGeom>
+          <a:noFill/>
+        </p:spPr>
+        <p:txBody>
+          <a:bodyPr wrap="square">
+            <a:spAutoFit/>
+          </a:bodyPr>
+          <a:lstStyle/>
+          <a:p>
+            <a:pPr algn="ctr"/>
+            <a:r>
+              <a:rPr sz="950">
+                <a:solidFill>
+                  <a:srgbClr val="0A1F44"/>
+                </a:solidFill>
+              </a:rPr>
+              <a:t>Diversification reduces unsystematic risk; the efficient frontier maximizes return for a given risk level.</a:t>
+            </a:r>
+          </a:p>
+        </p:txBody>
+      </p:sp>
+      <p:sp>
+        <p:nvSpPr>
+          <p:cNvPr id="13" name="Rectangle 12"/>
+          <p:cNvSpPr/>
+          <p:nvPr/>
+        </p:nvSpPr>
+        <p:spPr>
+          <a:xfrm>
+            <a:off x="6210147" y="1234440"/>
+            <a:ext cx="2606040" cy="4572000"/>
+          </a:xfrm>
+          <a:prstGeom prst="rect">
+            <a:avLst/>
+          </a:prstGeom>
+          <a:solidFill>
+            <a:srgbClr val="F0F4FA"/>
+          </a:solidFill>
+          <a:ln w="19050">
+            <a:solidFill>
+              <a:srgbClr val="1A6BC8"/>
+            </a:solidFill>
+          </a:ln>
+        </p:spPr>
+        <p:style>
+          <a:lnRef idx="1">
+            <a:schemeClr val="accent1"/>
+          </a:lnRef>
+          <a:fillRef idx="3">
+            <a:schemeClr val="accent1"/>
+          </a:fillRef>
+          <a:effectRef idx="2">
+            <a:schemeClr val="accent1"/>
+          </a:effectRef>
+          <a:fontRef idx="minor">
+            <a:schemeClr val="lt1"/>
+          </a:fontRef>
+        </p:style>
+        <p:txBody>
+          <a:bodyPr rtlCol="0" anchor="ctr"/>
+          <a:lstStyle/>
+          <a:p>
+            <a:pPr algn="ctr"/>
+          </a:p>
+        </p:txBody>
+      </p:sp>
+      <p:sp>
+        <p:nvSpPr>
+          <p:cNvPr id="14" name="Oval 13"/>
+          <p:cNvSpPr/>
+          <p:nvPr/>
+        </p:nvSpPr>
+        <p:spPr>
+          <a:xfrm>
+            <a:off x="7101687" y="1417320"/>
+            <a:ext cx="822960" cy="822960"/>
+          </a:xfrm>
+          <a:prstGeom prst="ellipse">
+            <a:avLst/>
+          </a:prstGeom>
+          <a:solidFill>
+            <a:srgbClr val="1A6BC8"/>
+          </a:solidFill>
+          <a:ln>
+            <a:noFill/>
+          </a:ln>
+        </p:spPr>
+        <p:style>
+          <a:lnRef idx="1">
+            <a:schemeClr val="accent1"/>
+          </a:lnRef>
+          <a:fillRef idx="3">
+            <a:schemeClr val="accent1"/>
+          </a:fillRef>
+          <a:effectRef idx="2">
+            <a:schemeClr val="accent1"/>
+          </a:effectRef>
+          <a:fontRef idx="minor">
+            <a:schemeClr val="lt1"/>
+          </a:fontRef>
+        </p:style>
+        <p:txBody>
+          <a:bodyPr rtlCol="0" anchor="ctr"/>
+          <a:lstStyle/>
+          <a:p>
+            <a:pPr algn="ctr"/>
+            <a:r>
+              <a:rPr b="1" sz="1500">
+                <a:solidFill>
+                  <a:srgbClr val="FFFFFF"/>
+                </a:solidFill>
+              </a:rPr>
+              <a:t>CAPM</a:t>
+            </a:r>
+          </a:p>
+        </p:txBody>
+      </p:sp>
+      <p:sp>
+        <p:nvSpPr>
+          <p:cNvPr id="15" name="TextBox 14"/>
+          <p:cNvSpPr txBox="1"/>
+          <p:nvPr/>
+        </p:nvSpPr>
+        <p:spPr>
+          <a:xfrm>
+            <a:off x="6301587" y="2331720"/>
+            <a:ext cx="2423160" cy="822960"/>
+          </a:xfrm>
+          <a:prstGeom prst="rect">
+            <a:avLst/>
+          </a:prstGeom>
+          <a:noFill/>
+        </p:spPr>
+        <p:txBody>
+          <a:bodyPr wrap="square">
+            <a:spAutoFit/>
+          </a:bodyPr>
+          <a:lstStyle/>
+          <a:p>
+            <a:pPr algn="ctr"/>
+            <a:r>
+              <a:rPr b="1" sz="1200">
+                <a:solidFill>
+                  <a:srgbClr val="0A1F44"/>
+                </a:solidFill>
+              </a:rPr>
+              <a:t>Capital Asset
+Pricing Model</a:t>
+            </a:r>
+          </a:p>
+        </p:txBody>
+      </p:sp>
+      <p:sp>
+        <p:nvSpPr>
+          <p:cNvPr id="16" name="TextBox 15"/>
+          <p:cNvSpPr txBox="1"/>
+          <p:nvPr/>
+        </p:nvSpPr>
+        <p:spPr>
+          <a:xfrm>
+            <a:off x="6301587" y="3200400"/>
+            <a:ext cx="2423160" cy="320040"/>
+          </a:xfrm>
+          <a:prstGeom prst="rect">
+            <a:avLst/>
+          </a:prstGeom>
+          <a:noFill/>
+        </p:spPr>
+        <p:txBody>
+          <a:bodyPr wrap="square">
+            <a:spAutoFit/>
+          </a:bodyPr>
+          <a:lstStyle/>
+          <a:p>
+            <a:pPr algn="ctr"/>
+            <a:r>
+              <a:rPr i="1" sz="1000">
+                <a:solidFill>
+                  <a:srgbClr val="1A6BC8"/>
+                </a:solidFill>
+              </a:rPr>
+              <a:t>Sharpe (1964)</a:t>
+            </a:r>
+          </a:p>
+        </p:txBody>
+      </p:sp>
+      <p:sp>
+        <p:nvSpPr>
+          <p:cNvPr id="17" name="TextBox 16"/>
+          <p:cNvSpPr txBox="1"/>
+          <p:nvPr/>
+        </p:nvSpPr>
+        <p:spPr>
+          <a:xfrm>
+            <a:off x="6347307" y="3611880"/>
+            <a:ext cx="2331720" cy="2011680"/>
+          </a:xfrm>
+          <a:prstGeom prst="rect">
+            <a:avLst/>
+          </a:prstGeom>
+          <a:noFill/>
+        </p:spPr>
+        <p:txBody>
+          <a:bodyPr wrap="square">
+            <a:spAutoFit/>
+          </a:bodyPr>
+          <a:lstStyle/>
+          <a:p>
+            <a:pPr algn="ctr"/>
+            <a:r>
+              <a:rPr sz="950">
+                <a:solidFill>
+                  <a:srgbClr val="0A1F44"/>
+                </a:solidFill>
+              </a:rPr>
+              <a:t>Expected return = Rf + β(Rm − Rf). Beta measures systematic market risk that cannot be diversified away.</a:t>
+            </a:r>
+          </a:p>
+        </p:txBody>
+      </p:sp>
+      <p:sp>
+        <p:nvSpPr>
+          <p:cNvPr id="18" name="Rectangle 17"/>
+          <p:cNvSpPr/>
+          <p:nvPr/>
+        </p:nvSpPr>
+        <p:spPr>
+          <a:xfrm>
+            <a:off x="9044787" y="1234440"/>
+            <a:ext cx="2606040" cy="4572000"/>
+          </a:xfrm>
+          <a:prstGeom prst="rect">
+            <a:avLst/>
+          </a:prstGeom>
+          <a:solidFill>
+            <a:srgbClr val="F0F4FA"/>
+          </a:solidFill>
+          <a:ln w="19050">
+            <a:solidFill>
+              <a:srgbClr val="1A6BC8"/>
+            </a:solidFill>
+          </a:ln>
+        </p:spPr>
+        <p:style>
+          <a:lnRef idx="1">
+            <a:schemeClr val="accent1"/>
+          </a:lnRef>
+          <a:fillRef idx="3">
+            <a:schemeClr val="accent1"/>
+          </a:fillRef>
+          <a:effectRef idx="2">
+            <a:schemeClr val="accent1"/>
+          </a:effectRef>
+          <a:fontRef idx="minor">
+            <a:schemeClr val="lt1"/>
+          </a:fontRef>
+        </p:style>
+        <p:txBody>
+          <a:bodyPr rtlCol="0" anchor="ctr"/>
+          <a:lstStyle/>
+          <a:p>
+            <a:pPr algn="ctr"/>
+          </a:p>
+        </p:txBody>
+      </p:sp>
+      <p:sp>
+        <p:nvSpPr>
+          <p:cNvPr id="19" name="Oval 18"/>
+          <p:cNvSpPr/>
+          <p:nvPr/>
+        </p:nvSpPr>
+        <p:spPr>
+          <a:xfrm>
+            <a:off x="9936327" y="1417320"/>
+            <a:ext cx="822960" cy="822960"/>
+          </a:xfrm>
+          <a:prstGeom prst="ellipse">
+            <a:avLst/>
+          </a:prstGeom>
+          <a:solidFill>
+            <a:srgbClr val="1A6BC8"/>
+          </a:solidFill>
+          <a:ln>
+            <a:noFill/>
+          </a:ln>
+        </p:spPr>
+        <p:style>
+          <a:lnRef idx="1">
+            <a:schemeClr val="accent1"/>
+          </a:lnRef>
+          <a:fillRef idx="3">
+            <a:schemeClr val="accent1"/>
+          </a:fillRef>
+          <a:effectRef idx="2">
+            <a:schemeClr val="accent1"/>
+          </a:effectRef>
+          <a:fontRef idx="minor">
+            <a:schemeClr val="lt1"/>
+          </a:fontRef>
+        </p:style>
+        <p:txBody>
+          <a:bodyPr rtlCol="0" anchor="ctr"/>
+          <a:lstStyle/>
+          <a:p>
+            <a:pPr algn="ctr"/>
+            <a:r>
+              <a:rPr b="1" sz="1500">
+                <a:solidFill>
+                  <a:srgbClr val="FFFFFF"/>
+                </a:solidFill>
+              </a:rPr>
+              <a:t>APT</a:t>
+            </a:r>
+          </a:p>
+        </p:txBody>
+      </p:sp>
+      <p:sp>
+        <p:nvSpPr>
+          <p:cNvPr id="20" name="TextBox 19"/>
+          <p:cNvSpPr txBox="1"/>
+          <p:nvPr/>
+        </p:nvSpPr>
+        <p:spPr>
+          <a:xfrm>
+            <a:off x="9136227" y="2331720"/>
+            <a:ext cx="2423160" cy="822960"/>
+          </a:xfrm>
+          <a:prstGeom prst="rect">
+            <a:avLst/>
+          </a:prstGeom>
+          <a:noFill/>
+        </p:spPr>
+        <p:txBody>
+          <a:bodyPr wrap="square">
+            <a:spAutoFit/>
+          </a:bodyPr>
+          <a:lstStyle/>
+          <a:p>
+            <a:pPr algn="ctr"/>
+            <a:r>
+              <a:rPr b="1" sz="1200">
+                <a:solidFill>
+                  <a:srgbClr val="0A1F44"/>
+                </a:solidFill>
+              </a:rPr>
+              <a:t>Arbitrage Pricing
+Theory / OLS</a:t>
+            </a:r>
+          </a:p>
+        </p:txBody>
+      </p:sp>
+      <p:sp>
+        <p:nvSpPr>
+          <p:cNvPr id="21" name="TextBox 20"/>
+          <p:cNvSpPr txBox="1"/>
+          <p:nvPr/>
+        </p:nvSpPr>
+        <p:spPr>
+          <a:xfrm>
+            <a:off x="9136227" y="3200400"/>
+            <a:ext cx="2423160" cy="320040"/>
+          </a:xfrm>
+          <a:prstGeom prst="rect">
+            <a:avLst/>
+          </a:prstGeom>
+          <a:noFill/>
+        </p:spPr>
+        <p:txBody>
+          <a:bodyPr wrap="square">
+            <a:spAutoFit/>
+          </a:bodyPr>
+          <a:lstStyle/>
+          <a:p>
+            <a:pPr algn="ctr"/>
+            <a:r>
+              <a:rPr i="1" sz="1000">
+                <a:solidFill>
+                  <a:srgbClr val="1A6BC8"/>
+                </a:solidFill>
+              </a:rPr>
+              <a:t>Ross (1976)</a:t>
+            </a:r>
+          </a:p>
+        </p:txBody>
+      </p:sp>
+      <p:sp>
+        <p:nvSpPr>
+          <p:cNvPr id="22" name="TextBox 21"/>
+          <p:cNvSpPr txBox="1"/>
+          <p:nvPr/>
+        </p:nvSpPr>
+        <p:spPr>
+          <a:xfrm>
+            <a:off x="9181947" y="3611880"/>
+            <a:ext cx="2331720" cy="2011680"/>
+          </a:xfrm>
+          <a:prstGeom prst="rect">
+            <a:avLst/>
+          </a:prstGeom>
+          <a:noFill/>
+        </p:spPr>
+        <p:txBody>
+          <a:bodyPr wrap="square">
+            <a:spAutoFit/>
+          </a:bodyPr>
+          <a:lstStyle/>
+          <a:p>
+            <a:pPr algn="ctr"/>
+            <a:r>
+              <a:rPr sz="950">
+                <a:solidFill>
+                  <a:srgbClr val="0A1F44"/>
+                </a:solidFill>
+              </a:rPr>
+              <a:t>Multi-factor regression (macro variables: CPI, rates, GDP) explains cross-sectional return variation.</a:t>
+            </a:r>
           </a:p>
         </p:txBody>
       </p:sp>
@@ -14389,6 +14183,1449 @@
 </file>
 
 <file path=ppt/slides/slide3.xml><?xml version="1.0" encoding="utf-8"?>
+<p:sld xmlns:a="http://schemas.openxmlformats.org/drawingml/2006/main" xmlns:r="http://schemas.openxmlformats.org/officeDocument/2006/relationships" xmlns:p="http://schemas.openxmlformats.org/presentationml/2006/main">
+  <p:cSld name="Slide 2">
+    <p:bg>
+      <p:bgPr>
+        <a:solidFill>
+          <a:srgbClr val="F4F7FC"/>
+        </a:solidFill>
+      </p:bgPr>
+    </p:bg>
+    <p:spTree>
+      <p:nvGrpSpPr>
+        <p:cNvPr id="1" name=""/>
+        <p:cNvGrpSpPr/>
+        <p:nvPr/>
+      </p:nvGrpSpPr>
+      <p:grpSpPr>
+        <a:xfrm>
+          <a:off x="0" y="0"/>
+          <a:ext cx="0" cy="0"/>
+          <a:chOff x="0" y="0"/>
+          <a:chExt cx="0" cy="0"/>
+        </a:xfrm>
+      </p:grpSpPr>
+      <p:sp>
+        <p:nvSpPr>
+          <p:cNvPr id="2" name="Shape 0"/>
+          <p:cNvSpPr/>
+          <p:nvPr/>
+        </p:nvSpPr>
+        <p:spPr>
+          <a:xfrm>
+            <a:off x="0" y="0"/>
+            <a:ext cx="9144000" cy="749808"/>
+          </a:xfrm>
+          <a:prstGeom prst="rect">
+            <a:avLst/>
+          </a:prstGeom>
+          <a:solidFill>
+            <a:srgbClr val="1B2A4A"/>
+          </a:solidFill>
+          <a:ln/>
+        </p:spPr>
+      </p:sp>
+      <p:sp>
+        <p:nvSpPr>
+          <p:cNvPr id="3" name="Shape 1"/>
+          <p:cNvSpPr/>
+          <p:nvPr/>
+        </p:nvSpPr>
+        <p:spPr>
+          <a:xfrm>
+            <a:off x="8595360" y="146304"/>
+            <a:ext cx="228600" cy="228600"/>
+          </a:xfrm>
+          <a:prstGeom prst="ellipse">
+            <a:avLst/>
+          </a:prstGeom>
+          <a:solidFill>
+            <a:srgbClr val="1F77B4"/>
+          </a:solidFill>
+          <a:ln/>
+        </p:spPr>
+      </p:sp>
+      <p:sp>
+        <p:nvSpPr>
+          <p:cNvPr id="4" name="Shape 2"/>
+          <p:cNvSpPr/>
+          <p:nvPr/>
+        </p:nvSpPr>
+        <p:spPr>
+          <a:xfrm>
+            <a:off x="8823960" y="146304"/>
+            <a:ext cx="228600" cy="228600"/>
+          </a:xfrm>
+          <a:prstGeom prst="ellipse">
+            <a:avLst/>
+          </a:prstGeom>
+          <a:solidFill>
+            <a:srgbClr val="FF7F0E"/>
+          </a:solidFill>
+          <a:ln/>
+        </p:spPr>
+      </p:sp>
+      <p:sp>
+        <p:nvSpPr>
+          <p:cNvPr id="5" name="Text 3"/>
+          <p:cNvSpPr/>
+          <p:nvPr/>
+        </p:nvSpPr>
+        <p:spPr>
+          <a:xfrm>
+            <a:off x="365760" y="73152"/>
+            <a:ext cx="8046720" cy="594360"/>
+          </a:xfrm>
+          <a:prstGeom prst="rect">
+            <a:avLst/>
+          </a:prstGeom>
+          <a:noFill/>
+          <a:ln/>
+        </p:spPr>
+        <p:txBody>
+          <a:bodyPr wrap="square" lIns="0" tIns="0" rIns="0" bIns="0" rtlCol="0" anchor="ctr"/>
+          <a:lstStyle/>
+          <a:p>
+            <a:pPr indent="0" marL="0">
+              <a:buNone/>
+            </a:pPr>
+            <a:r>
+              <a:rPr lang="en-US" sz="2200" b="1" dirty="0">
+                <a:solidFill>
+                  <a:srgbClr val="FFFFFF"/>
+                </a:solidFill>
+                <a:latin typeface="Calibri" pitchFamily="34" charset="0"/>
+                <a:ea typeface="Calibri" pitchFamily="34" charset="-122"/>
+                <a:cs typeface="Calibri" pitchFamily="34" charset="-120"/>
+              </a:rPr>
+              <a:t>Agenda</a:t>
+            </a:r>
+            <a:endParaRPr lang="en-US" sz="2200" dirty="0"/>
+          </a:p>
+        </p:txBody>
+      </p:sp>
+      <p:sp>
+        <p:nvSpPr>
+          <p:cNvPr id="6" name="Shape 4"/>
+          <p:cNvSpPr/>
+          <p:nvPr/>
+        </p:nvSpPr>
+        <p:spPr>
+          <a:xfrm>
+            <a:off x="320040" y="960120"/>
+            <a:ext cx="4297680" cy="841248"/>
+          </a:xfrm>
+          <a:prstGeom prst="rect">
+            <a:avLst/>
+          </a:prstGeom>
+          <a:solidFill>
+            <a:srgbClr val="FFFFFF"/>
+          </a:solidFill>
+          <a:ln/>
+          <a:effectLst>
+            <a:outerShdw sx="100000" sy="100000" kx="0" ky="0" algn="bl" rotWithShape="0" blurRad="101600" dist="38100" dir="8100000">
+              <a:srgbClr val="000000">
+                <a:alpha val="12000"/>
+              </a:srgbClr>
+            </a:outerShdw>
+          </a:effectLst>
+        </p:spPr>
+      </p:sp>
+      <p:sp>
+        <p:nvSpPr>
+          <p:cNvPr id="7" name="Shape 5"/>
+          <p:cNvSpPr/>
+          <p:nvPr/>
+        </p:nvSpPr>
+        <p:spPr>
+          <a:xfrm>
+            <a:off x="320040" y="960120"/>
+            <a:ext cx="91440" cy="841248"/>
+          </a:xfrm>
+          <a:prstGeom prst="rect">
+            <a:avLst/>
+          </a:prstGeom>
+          <a:solidFill>
+            <a:srgbClr val="1F77B4"/>
+          </a:solidFill>
+          <a:ln/>
+        </p:spPr>
+      </p:sp>
+      <p:sp>
+        <p:nvSpPr>
+          <p:cNvPr id="8" name="Text 6"/>
+          <p:cNvSpPr/>
+          <p:nvPr/>
+        </p:nvSpPr>
+        <p:spPr>
+          <a:xfrm>
+            <a:off x="484632" y="1033272"/>
+            <a:ext cx="457200" cy="320040"/>
+          </a:xfrm>
+          <a:prstGeom prst="rect">
+            <a:avLst/>
+          </a:prstGeom>
+          <a:noFill/>
+          <a:ln/>
+        </p:spPr>
+        <p:txBody>
+          <a:bodyPr wrap="square" lIns="0" tIns="0" rIns="0" bIns="0" rtlCol="0" anchor="ctr"/>
+          <a:lstStyle/>
+          <a:p>
+            <a:pPr indent="0" marL="0">
+              <a:buNone/>
+            </a:pPr>
+            <a:r>
+              <a:rPr lang="en-US" sz="1600" b="1" dirty="0">
+                <a:solidFill>
+                  <a:srgbClr val="1B2A4A"/>
+                </a:solidFill>
+                <a:latin typeface="Calibri" pitchFamily="34" charset="0"/>
+                <a:ea typeface="Calibri" pitchFamily="34" charset="-122"/>
+                <a:cs typeface="Calibri" pitchFamily="34" charset="-120"/>
+              </a:rPr>
+              <a:t>01</a:t>
+            </a:r>
+            <a:endParaRPr lang="en-US" sz="1600" dirty="0"/>
+          </a:p>
+        </p:txBody>
+      </p:sp>
+      <p:sp>
+        <p:nvSpPr>
+          <p:cNvPr id="9" name="Text 7"/>
+          <p:cNvSpPr/>
+          <p:nvPr/>
+        </p:nvSpPr>
+        <p:spPr>
+          <a:xfrm>
+            <a:off x="484632" y="1234440"/>
+            <a:ext cx="4069080" cy="274320"/>
+          </a:xfrm>
+          <a:prstGeom prst="rect">
+            <a:avLst/>
+          </a:prstGeom>
+          <a:noFill/>
+          <a:ln/>
+        </p:spPr>
+        <p:txBody>
+          <a:bodyPr wrap="square" lIns="0" tIns="0" rIns="0" bIns="0" rtlCol="0" anchor="ctr"/>
+          <a:lstStyle/>
+          <a:p>
+            <a:pPr indent="0" marL="0">
+              <a:buNone/>
+            </a:pPr>
+            <a:r>
+              <a:rPr lang="en-US" sz="1100" b="1" dirty="0">
+                <a:solidFill>
+                  <a:srgbClr val="1E293B"/>
+                </a:solidFill>
+                <a:latin typeface="Calibri" pitchFamily="34" charset="0"/>
+                <a:ea typeface="Calibri" pitchFamily="34" charset="-122"/>
+                <a:cs typeface="Calibri" pitchFamily="34" charset="-120"/>
+              </a:rPr>
+              <a:t>Research Background &amp; Questions</a:t>
+            </a:r>
+            <a:endParaRPr lang="en-US" sz="1100" dirty="0"/>
+          </a:p>
+        </p:txBody>
+      </p:sp>
+      <p:sp>
+        <p:nvSpPr>
+          <p:cNvPr id="10" name="Text 8"/>
+          <p:cNvSpPr/>
+          <p:nvPr/>
+        </p:nvSpPr>
+        <p:spPr>
+          <a:xfrm>
+            <a:off x="484632" y="1490472"/>
+            <a:ext cx="4069080" cy="274320"/>
+          </a:xfrm>
+          <a:prstGeom prst="rect">
+            <a:avLst/>
+          </a:prstGeom>
+          <a:noFill/>
+          <a:ln/>
+        </p:spPr>
+        <p:txBody>
+          <a:bodyPr wrap="square" lIns="0" tIns="0" rIns="0" bIns="0" rtlCol="0" anchor="ctr"/>
+          <a:lstStyle/>
+          <a:p>
+            <a:pPr indent="0" marL="0">
+              <a:buNone/>
+            </a:pPr>
+            <a:r>
+              <a:rPr lang="en-US" sz="900" dirty="0">
+                <a:solidFill>
+                  <a:srgbClr val="64748B"/>
+                </a:solidFill>
+                <a:latin typeface="Calibri" pitchFamily="34" charset="0"/>
+                <a:ea typeface="Calibri" pitchFamily="34" charset="-122"/>
+                <a:cs typeface="Calibri" pitchFamily="34" charset="-120"/>
+              </a:rPr>
+              <a:t>Why Apple vs Samsung, and what we aim to discover</a:t>
+            </a:r>
+            <a:endParaRPr lang="en-US" sz="900" dirty="0"/>
+          </a:p>
+        </p:txBody>
+      </p:sp>
+      <p:sp>
+        <p:nvSpPr>
+          <p:cNvPr id="11" name="Shape 9"/>
+          <p:cNvSpPr/>
+          <p:nvPr/>
+        </p:nvSpPr>
+        <p:spPr>
+          <a:xfrm>
+            <a:off x="4800600" y="960120"/>
+            <a:ext cx="4297680" cy="841248"/>
+          </a:xfrm>
+          <a:prstGeom prst="rect">
+            <a:avLst/>
+          </a:prstGeom>
+          <a:solidFill>
+            <a:srgbClr val="FFFFFF"/>
+          </a:solidFill>
+          <a:ln/>
+          <a:effectLst>
+            <a:outerShdw sx="100000" sy="100000" kx="0" ky="0" algn="bl" rotWithShape="0" blurRad="101600" dist="38100" dir="8100000">
+              <a:srgbClr val="000000">
+                <a:alpha val="12000"/>
+              </a:srgbClr>
+            </a:outerShdw>
+          </a:effectLst>
+        </p:spPr>
+      </p:sp>
+      <p:sp>
+        <p:nvSpPr>
+          <p:cNvPr id="12" name="Shape 10"/>
+          <p:cNvSpPr/>
+          <p:nvPr/>
+        </p:nvSpPr>
+        <p:spPr>
+          <a:xfrm>
+            <a:off x="4800600" y="960120"/>
+            <a:ext cx="91440" cy="841248"/>
+          </a:xfrm>
+          <a:prstGeom prst="rect">
+            <a:avLst/>
+          </a:prstGeom>
+          <a:solidFill>
+            <a:srgbClr val="FF7F0E"/>
+          </a:solidFill>
+          <a:ln/>
+        </p:spPr>
+      </p:sp>
+      <p:sp>
+        <p:nvSpPr>
+          <p:cNvPr id="13" name="Text 11"/>
+          <p:cNvSpPr/>
+          <p:nvPr/>
+        </p:nvSpPr>
+        <p:spPr>
+          <a:xfrm>
+            <a:off x="4965192" y="1033272"/>
+            <a:ext cx="457200" cy="320040"/>
+          </a:xfrm>
+          <a:prstGeom prst="rect">
+            <a:avLst/>
+          </a:prstGeom>
+          <a:noFill/>
+          <a:ln/>
+        </p:spPr>
+        <p:txBody>
+          <a:bodyPr wrap="square" lIns="0" tIns="0" rIns="0" bIns="0" rtlCol="0" anchor="ctr"/>
+          <a:lstStyle/>
+          <a:p>
+            <a:pPr indent="0" marL="0">
+              <a:buNone/>
+            </a:pPr>
+            <a:r>
+              <a:rPr lang="en-US" sz="1600" b="1" dirty="0">
+                <a:solidFill>
+                  <a:srgbClr val="1B2A4A"/>
+                </a:solidFill>
+                <a:latin typeface="Calibri" pitchFamily="34" charset="0"/>
+                <a:ea typeface="Calibri" pitchFamily="34" charset="-122"/>
+                <a:cs typeface="Calibri" pitchFamily="34" charset="-120"/>
+              </a:rPr>
+              <a:t>02</a:t>
+            </a:r>
+            <a:endParaRPr lang="en-US" sz="1600" dirty="0"/>
+          </a:p>
+        </p:txBody>
+      </p:sp>
+      <p:sp>
+        <p:nvSpPr>
+          <p:cNvPr id="14" name="Text 12"/>
+          <p:cNvSpPr/>
+          <p:nvPr/>
+        </p:nvSpPr>
+        <p:spPr>
+          <a:xfrm>
+            <a:off x="4965192" y="1234440"/>
+            <a:ext cx="4069080" cy="274320"/>
+          </a:xfrm>
+          <a:prstGeom prst="rect">
+            <a:avLst/>
+          </a:prstGeom>
+          <a:noFill/>
+          <a:ln/>
+        </p:spPr>
+        <p:txBody>
+          <a:bodyPr wrap="square" lIns="0" tIns="0" rIns="0" bIns="0" rtlCol="0" anchor="ctr"/>
+          <a:lstStyle/>
+          <a:p>
+            <a:pPr indent="0" marL="0">
+              <a:buNone/>
+            </a:pPr>
+            <a:r>
+              <a:rPr lang="en-US" sz="1100" b="1" dirty="0">
+                <a:solidFill>
+                  <a:srgbClr val="1E293B"/>
+                </a:solidFill>
+                <a:latin typeface="Calibri" pitchFamily="34" charset="0"/>
+                <a:ea typeface="Calibri" pitchFamily="34" charset="-122"/>
+                <a:cs typeface="Calibri" pitchFamily="34" charset="-120"/>
+              </a:rPr>
+              <a:t>Data Collection</a:t>
+            </a:r>
+            <a:endParaRPr lang="en-US" sz="1100" dirty="0"/>
+          </a:p>
+        </p:txBody>
+      </p:sp>
+      <p:sp>
+        <p:nvSpPr>
+          <p:cNvPr id="15" name="Text 13"/>
+          <p:cNvSpPr/>
+          <p:nvPr/>
+        </p:nvSpPr>
+        <p:spPr>
+          <a:xfrm>
+            <a:off x="4965192" y="1490472"/>
+            <a:ext cx="4069080" cy="274320"/>
+          </a:xfrm>
+          <a:prstGeom prst="rect">
+            <a:avLst/>
+          </a:prstGeom>
+          <a:noFill/>
+          <a:ln/>
+        </p:spPr>
+        <p:txBody>
+          <a:bodyPr wrap="square" lIns="0" tIns="0" rIns="0" bIns="0" rtlCol="0" anchor="ctr"/>
+          <a:lstStyle/>
+          <a:p>
+            <a:pPr indent="0" marL="0">
+              <a:buNone/>
+            </a:pPr>
+            <a:r>
+              <a:rPr lang="en-US" sz="900" dirty="0">
+                <a:solidFill>
+                  <a:srgbClr val="64748B"/>
+                </a:solidFill>
+                <a:latin typeface="Calibri" pitchFamily="34" charset="0"/>
+                <a:ea typeface="Calibri" pitchFamily="34" charset="-122"/>
+                <a:cs typeface="Calibri" pitchFamily="34" charset="-120"/>
+              </a:rPr>
+              <a:t>Sources, coverage, and variable definitions</a:t>
+            </a:r>
+            <a:endParaRPr lang="en-US" sz="900" dirty="0"/>
+          </a:p>
+        </p:txBody>
+      </p:sp>
+      <p:sp>
+        <p:nvSpPr>
+          <p:cNvPr id="16" name="Shape 14"/>
+          <p:cNvSpPr/>
+          <p:nvPr/>
+        </p:nvSpPr>
+        <p:spPr>
+          <a:xfrm>
+            <a:off x="320040" y="1920240"/>
+            <a:ext cx="4297680" cy="841248"/>
+          </a:xfrm>
+          <a:prstGeom prst="rect">
+            <a:avLst/>
+          </a:prstGeom>
+          <a:solidFill>
+            <a:srgbClr val="FFFFFF"/>
+          </a:solidFill>
+          <a:ln/>
+          <a:effectLst>
+            <a:outerShdw sx="100000" sy="100000" kx="0" ky="0" algn="bl" rotWithShape="0" blurRad="101600" dist="38100" dir="8100000">
+              <a:srgbClr val="000000">
+                <a:alpha val="12000"/>
+              </a:srgbClr>
+            </a:outerShdw>
+          </a:effectLst>
+        </p:spPr>
+      </p:sp>
+      <p:sp>
+        <p:nvSpPr>
+          <p:cNvPr id="17" name="Shape 15"/>
+          <p:cNvSpPr/>
+          <p:nvPr/>
+        </p:nvSpPr>
+        <p:spPr>
+          <a:xfrm>
+            <a:off x="320040" y="1920240"/>
+            <a:ext cx="91440" cy="841248"/>
+          </a:xfrm>
+          <a:prstGeom prst="rect">
+            <a:avLst/>
+          </a:prstGeom>
+          <a:solidFill>
+            <a:srgbClr val="1F77B4"/>
+          </a:solidFill>
+          <a:ln/>
+        </p:spPr>
+      </p:sp>
+      <p:sp>
+        <p:nvSpPr>
+          <p:cNvPr id="18" name="Text 16"/>
+          <p:cNvSpPr/>
+          <p:nvPr/>
+        </p:nvSpPr>
+        <p:spPr>
+          <a:xfrm>
+            <a:off x="484632" y="1993392"/>
+            <a:ext cx="457200" cy="320040"/>
+          </a:xfrm>
+          <a:prstGeom prst="rect">
+            <a:avLst/>
+          </a:prstGeom>
+          <a:noFill/>
+          <a:ln/>
+        </p:spPr>
+        <p:txBody>
+          <a:bodyPr wrap="square" lIns="0" tIns="0" rIns="0" bIns="0" rtlCol="0" anchor="ctr"/>
+          <a:lstStyle/>
+          <a:p>
+            <a:pPr indent="0" marL="0">
+              <a:buNone/>
+            </a:pPr>
+            <a:r>
+              <a:rPr lang="en-US" sz="1600" b="1" dirty="0">
+                <a:solidFill>
+                  <a:srgbClr val="1B2A4A"/>
+                </a:solidFill>
+                <a:latin typeface="Calibri" pitchFamily="34" charset="0"/>
+                <a:ea typeface="Calibri" pitchFamily="34" charset="-122"/>
+                <a:cs typeface="Calibri" pitchFamily="34" charset="-120"/>
+              </a:rPr>
+              <a:t>03</a:t>
+            </a:r>
+            <a:endParaRPr lang="en-US" sz="1600" dirty="0"/>
+          </a:p>
+        </p:txBody>
+      </p:sp>
+      <p:sp>
+        <p:nvSpPr>
+          <p:cNvPr id="19" name="Text 17"/>
+          <p:cNvSpPr/>
+          <p:nvPr/>
+        </p:nvSpPr>
+        <p:spPr>
+          <a:xfrm>
+            <a:off x="484632" y="2194560"/>
+            <a:ext cx="4069080" cy="274320"/>
+          </a:xfrm>
+          <a:prstGeom prst="rect">
+            <a:avLst/>
+          </a:prstGeom>
+          <a:noFill/>
+          <a:ln/>
+        </p:spPr>
+        <p:txBody>
+          <a:bodyPr wrap="square" lIns="0" tIns="0" rIns="0" bIns="0" rtlCol="0" anchor="ctr"/>
+          <a:lstStyle/>
+          <a:p>
+            <a:pPr indent="0" marL="0">
+              <a:buNone/>
+            </a:pPr>
+            <a:r>
+              <a:rPr lang="en-US" sz="1100" b="1" dirty="0">
+                <a:solidFill>
+                  <a:srgbClr val="1E293B"/>
+                </a:solidFill>
+                <a:latin typeface="Calibri" pitchFamily="34" charset="0"/>
+                <a:ea typeface="Calibri" pitchFamily="34" charset="-122"/>
+                <a:cs typeface="Calibri" pitchFamily="34" charset="-120"/>
+              </a:rPr>
+              <a:t>Data Cleaning &amp; Manipulation</a:t>
+            </a:r>
+            <a:endParaRPr lang="en-US" sz="1100" dirty="0"/>
+          </a:p>
+        </p:txBody>
+      </p:sp>
+      <p:sp>
+        <p:nvSpPr>
+          <p:cNvPr id="20" name="Text 18"/>
+          <p:cNvSpPr/>
+          <p:nvPr/>
+        </p:nvSpPr>
+        <p:spPr>
+          <a:xfrm>
+            <a:off x="484632" y="2450592"/>
+            <a:ext cx="4069080" cy="274320"/>
+          </a:xfrm>
+          <a:prstGeom prst="rect">
+            <a:avLst/>
+          </a:prstGeom>
+          <a:noFill/>
+          <a:ln/>
+        </p:spPr>
+        <p:txBody>
+          <a:bodyPr wrap="square" lIns="0" tIns="0" rIns="0" bIns="0" rtlCol="0" anchor="ctr"/>
+          <a:lstStyle/>
+          <a:p>
+            <a:pPr indent="0" marL="0">
+              <a:buNone/>
+            </a:pPr>
+            <a:r>
+              <a:rPr lang="en-US" sz="900" dirty="0">
+                <a:solidFill>
+                  <a:srgbClr val="64748B"/>
+                </a:solidFill>
+                <a:latin typeface="Calibri" pitchFamily="34" charset="0"/>
+                <a:ea typeface="Calibri" pitchFamily="34" charset="-122"/>
+                <a:cs typeface="Calibri" pitchFamily="34" charset="-120"/>
+              </a:rPr>
+              <a:t>Processing steps applied to prepare data</a:t>
+            </a:r>
+            <a:endParaRPr lang="en-US" sz="900" dirty="0"/>
+          </a:p>
+        </p:txBody>
+      </p:sp>
+      <p:sp>
+        <p:nvSpPr>
+          <p:cNvPr id="21" name="Shape 19"/>
+          <p:cNvSpPr/>
+          <p:nvPr/>
+        </p:nvSpPr>
+        <p:spPr>
+          <a:xfrm>
+            <a:off x="4800600" y="1920240"/>
+            <a:ext cx="4297680" cy="841248"/>
+          </a:xfrm>
+          <a:prstGeom prst="rect">
+            <a:avLst/>
+          </a:prstGeom>
+          <a:solidFill>
+            <a:srgbClr val="FFFFFF"/>
+          </a:solidFill>
+          <a:ln/>
+          <a:effectLst>
+            <a:outerShdw sx="100000" sy="100000" kx="0" ky="0" algn="bl" rotWithShape="0" blurRad="101600" dist="38100" dir="8100000">
+              <a:srgbClr val="000000">
+                <a:alpha val="12000"/>
+              </a:srgbClr>
+            </a:outerShdw>
+          </a:effectLst>
+        </p:spPr>
+      </p:sp>
+      <p:sp>
+        <p:nvSpPr>
+          <p:cNvPr id="22" name="Shape 20"/>
+          <p:cNvSpPr/>
+          <p:nvPr/>
+        </p:nvSpPr>
+        <p:spPr>
+          <a:xfrm>
+            <a:off x="4800600" y="1920240"/>
+            <a:ext cx="91440" cy="841248"/>
+          </a:xfrm>
+          <a:prstGeom prst="rect">
+            <a:avLst/>
+          </a:prstGeom>
+          <a:solidFill>
+            <a:srgbClr val="FF7F0E"/>
+          </a:solidFill>
+          <a:ln/>
+        </p:spPr>
+      </p:sp>
+      <p:sp>
+        <p:nvSpPr>
+          <p:cNvPr id="23" name="Text 21"/>
+          <p:cNvSpPr/>
+          <p:nvPr/>
+        </p:nvSpPr>
+        <p:spPr>
+          <a:xfrm>
+            <a:off x="4965192" y="1993392"/>
+            <a:ext cx="457200" cy="320040"/>
+          </a:xfrm>
+          <a:prstGeom prst="rect">
+            <a:avLst/>
+          </a:prstGeom>
+          <a:noFill/>
+          <a:ln/>
+        </p:spPr>
+        <p:txBody>
+          <a:bodyPr wrap="square" lIns="0" tIns="0" rIns="0" bIns="0" rtlCol="0" anchor="ctr"/>
+          <a:lstStyle/>
+          <a:p>
+            <a:pPr indent="0" marL="0">
+              <a:buNone/>
+            </a:pPr>
+            <a:r>
+              <a:rPr lang="en-US" sz="1600" b="1" dirty="0">
+                <a:solidFill>
+                  <a:srgbClr val="1B2A4A"/>
+                </a:solidFill>
+                <a:latin typeface="Calibri" pitchFamily="34" charset="0"/>
+                <a:ea typeface="Calibri" pitchFamily="34" charset="-122"/>
+                <a:cs typeface="Calibri" pitchFamily="34" charset="-120"/>
+              </a:rPr>
+              <a:t>04</a:t>
+            </a:r>
+            <a:endParaRPr lang="en-US" sz="1600" dirty="0"/>
+          </a:p>
+        </p:txBody>
+      </p:sp>
+      <p:sp>
+        <p:nvSpPr>
+          <p:cNvPr id="24" name="Text 22"/>
+          <p:cNvSpPr/>
+          <p:nvPr/>
+        </p:nvSpPr>
+        <p:spPr>
+          <a:xfrm>
+            <a:off x="4965192" y="2194560"/>
+            <a:ext cx="4069080" cy="274320"/>
+          </a:xfrm>
+          <a:prstGeom prst="rect">
+            <a:avLst/>
+          </a:prstGeom>
+          <a:noFill/>
+          <a:ln/>
+        </p:spPr>
+        <p:txBody>
+          <a:bodyPr wrap="square" lIns="0" tIns="0" rIns="0" bIns="0" rtlCol="0" anchor="ctr"/>
+          <a:lstStyle/>
+          <a:p>
+            <a:pPr indent="0" marL="0">
+              <a:buNone/>
+            </a:pPr>
+            <a:r>
+              <a:rPr lang="en-US" sz="1100" b="1" dirty="0">
+                <a:solidFill>
+                  <a:srgbClr val="1E293B"/>
+                </a:solidFill>
+                <a:latin typeface="Calibri" pitchFamily="34" charset="0"/>
+                <a:ea typeface="Calibri" pitchFamily="34" charset="-122"/>
+                <a:cs typeface="Calibri" pitchFamily="34" charset="-120"/>
+              </a:rPr>
+              <a:t>Analysis 1 — Stock Performance &amp; Correlation</a:t>
+            </a:r>
+            <a:endParaRPr lang="en-US" sz="1100" dirty="0"/>
+          </a:p>
+        </p:txBody>
+      </p:sp>
+      <p:sp>
+        <p:nvSpPr>
+          <p:cNvPr id="25" name="Text 23"/>
+          <p:cNvSpPr/>
+          <p:nvPr/>
+        </p:nvSpPr>
+        <p:spPr>
+          <a:xfrm>
+            <a:off x="4965192" y="2450592"/>
+            <a:ext cx="4069080" cy="274320"/>
+          </a:xfrm>
+          <a:prstGeom prst="rect">
+            <a:avLst/>
+          </a:prstGeom>
+          <a:noFill/>
+          <a:ln/>
+        </p:spPr>
+        <p:txBody>
+          <a:bodyPr wrap="square" lIns="0" tIns="0" rIns="0" bIns="0" rtlCol="0" anchor="ctr"/>
+          <a:lstStyle/>
+          <a:p>
+            <a:pPr indent="0" marL="0">
+              <a:buNone/>
+            </a:pPr>
+            <a:r>
+              <a:rPr lang="en-US" sz="900" dirty="0">
+                <a:solidFill>
+                  <a:srgbClr val="64748B"/>
+                </a:solidFill>
+                <a:latin typeface="Calibri" pitchFamily="34" charset="0"/>
+                <a:ea typeface="Calibri" pitchFamily="34" charset="-122"/>
+                <a:cs typeface="Calibri" pitchFamily="34" charset="-120"/>
+              </a:rPr>
+              <a:t>Price trends, correlation, and volatility (2015–2026)</a:t>
+            </a:r>
+            <a:endParaRPr lang="en-US" sz="900" dirty="0"/>
+          </a:p>
+        </p:txBody>
+      </p:sp>
+      <p:sp>
+        <p:nvSpPr>
+          <p:cNvPr id="26" name="Shape 24"/>
+          <p:cNvSpPr/>
+          <p:nvPr/>
+        </p:nvSpPr>
+        <p:spPr>
+          <a:xfrm>
+            <a:off x="320040" y="2880360"/>
+            <a:ext cx="4297680" cy="841248"/>
+          </a:xfrm>
+          <a:prstGeom prst="rect">
+            <a:avLst/>
+          </a:prstGeom>
+          <a:solidFill>
+            <a:srgbClr val="FFFFFF"/>
+          </a:solidFill>
+          <a:ln/>
+          <a:effectLst>
+            <a:outerShdw sx="100000" sy="100000" kx="0" ky="0" algn="bl" rotWithShape="0" blurRad="101600" dist="38100" dir="8100000">
+              <a:srgbClr val="000000">
+                <a:alpha val="12000"/>
+              </a:srgbClr>
+            </a:outerShdw>
+          </a:effectLst>
+        </p:spPr>
+      </p:sp>
+      <p:sp>
+        <p:nvSpPr>
+          <p:cNvPr id="27" name="Shape 25"/>
+          <p:cNvSpPr/>
+          <p:nvPr/>
+        </p:nvSpPr>
+        <p:spPr>
+          <a:xfrm>
+            <a:off x="320040" y="2880360"/>
+            <a:ext cx="91440" cy="841248"/>
+          </a:xfrm>
+          <a:prstGeom prst="rect">
+            <a:avLst/>
+          </a:prstGeom>
+          <a:solidFill>
+            <a:srgbClr val="1F77B4"/>
+          </a:solidFill>
+          <a:ln/>
+        </p:spPr>
+      </p:sp>
+      <p:sp>
+        <p:nvSpPr>
+          <p:cNvPr id="28" name="Text 26"/>
+          <p:cNvSpPr/>
+          <p:nvPr/>
+        </p:nvSpPr>
+        <p:spPr>
+          <a:xfrm>
+            <a:off x="484632" y="2953512"/>
+            <a:ext cx="457200" cy="320040"/>
+          </a:xfrm>
+          <a:prstGeom prst="rect">
+            <a:avLst/>
+          </a:prstGeom>
+          <a:noFill/>
+          <a:ln/>
+        </p:spPr>
+        <p:txBody>
+          <a:bodyPr wrap="square" lIns="0" tIns="0" rIns="0" bIns="0" rtlCol="0" anchor="ctr"/>
+          <a:lstStyle/>
+          <a:p>
+            <a:pPr indent="0" marL="0">
+              <a:buNone/>
+            </a:pPr>
+            <a:r>
+              <a:rPr lang="en-US" sz="1600" b="1" dirty="0">
+                <a:solidFill>
+                  <a:srgbClr val="1B2A4A"/>
+                </a:solidFill>
+                <a:latin typeface="Calibri" pitchFamily="34" charset="0"/>
+                <a:ea typeface="Calibri" pitchFamily="34" charset="-122"/>
+                <a:cs typeface="Calibri" pitchFamily="34" charset="-120"/>
+              </a:rPr>
+              <a:t>05</a:t>
+            </a:r>
+            <a:endParaRPr lang="en-US" sz="1600" dirty="0"/>
+          </a:p>
+        </p:txBody>
+      </p:sp>
+      <p:sp>
+        <p:nvSpPr>
+          <p:cNvPr id="29" name="Text 27"/>
+          <p:cNvSpPr/>
+          <p:nvPr/>
+        </p:nvSpPr>
+        <p:spPr>
+          <a:xfrm>
+            <a:off x="484632" y="3154680"/>
+            <a:ext cx="4069080" cy="274320"/>
+          </a:xfrm>
+          <a:prstGeom prst="rect">
+            <a:avLst/>
+          </a:prstGeom>
+          <a:noFill/>
+          <a:ln/>
+        </p:spPr>
+        <p:txBody>
+          <a:bodyPr wrap="square" lIns="0" tIns="0" rIns="0" bIns="0" rtlCol="0" anchor="ctr"/>
+          <a:lstStyle/>
+          <a:p>
+            <a:pPr indent="0" marL="0">
+              <a:buNone/>
+            </a:pPr>
+            <a:r>
+              <a:rPr lang="en-US" sz="1100" b="1" dirty="0">
+                <a:solidFill>
+                  <a:srgbClr val="1E293B"/>
+                </a:solidFill>
+                <a:latin typeface="Calibri" pitchFamily="34" charset="0"/>
+                <a:ea typeface="Calibri" pitchFamily="34" charset="-122"/>
+                <a:cs typeface="Calibri" pitchFamily="34" charset="-120"/>
+              </a:rPr>
+              <a:t>Analysis 2 — Financial Fundamentals</a:t>
+            </a:r>
+            <a:endParaRPr lang="en-US" sz="1100" dirty="0"/>
+          </a:p>
+        </p:txBody>
+      </p:sp>
+      <p:sp>
+        <p:nvSpPr>
+          <p:cNvPr id="30" name="Text 28"/>
+          <p:cNvSpPr/>
+          <p:nvPr/>
+        </p:nvSpPr>
+        <p:spPr>
+          <a:xfrm>
+            <a:off x="484632" y="3410712"/>
+            <a:ext cx="4069080" cy="274320"/>
+          </a:xfrm>
+          <a:prstGeom prst="rect">
+            <a:avLst/>
+          </a:prstGeom>
+          <a:noFill/>
+          <a:ln/>
+        </p:spPr>
+        <p:txBody>
+          <a:bodyPr wrap="square" lIns="0" tIns="0" rIns="0" bIns="0" rtlCol="0" anchor="ctr"/>
+          <a:lstStyle/>
+          <a:p>
+            <a:pPr indent="0" marL="0">
+              <a:buNone/>
+            </a:pPr>
+            <a:r>
+              <a:rPr lang="en-US" sz="900" dirty="0">
+                <a:solidFill>
+                  <a:srgbClr val="64748B"/>
+                </a:solidFill>
+                <a:latin typeface="Calibri" pitchFamily="34" charset="0"/>
+                <a:ea typeface="Calibri" pitchFamily="34" charset="-122"/>
+                <a:cs typeface="Calibri" pitchFamily="34" charset="-120"/>
+              </a:rPr>
+              <a:t>Revenue, profitability margins, and cash flow</a:t>
+            </a:r>
+            <a:endParaRPr lang="en-US" sz="900" dirty="0"/>
+          </a:p>
+        </p:txBody>
+      </p:sp>
+      <p:sp>
+        <p:nvSpPr>
+          <p:cNvPr id="31" name="Shape 29"/>
+          <p:cNvSpPr/>
+          <p:nvPr/>
+        </p:nvSpPr>
+        <p:spPr>
+          <a:xfrm>
+            <a:off x="4800600" y="2880360"/>
+            <a:ext cx="4297680" cy="841248"/>
+          </a:xfrm>
+          <a:prstGeom prst="rect">
+            <a:avLst/>
+          </a:prstGeom>
+          <a:solidFill>
+            <a:srgbClr val="FFFFFF"/>
+          </a:solidFill>
+          <a:ln/>
+          <a:effectLst>
+            <a:outerShdw sx="100000" sy="100000" kx="0" ky="0" algn="bl" rotWithShape="0" blurRad="101600" dist="38100" dir="8100000">
+              <a:srgbClr val="000000">
+                <a:alpha val="12000"/>
+              </a:srgbClr>
+            </a:outerShdw>
+          </a:effectLst>
+        </p:spPr>
+      </p:sp>
+      <p:sp>
+        <p:nvSpPr>
+          <p:cNvPr id="32" name="Shape 30"/>
+          <p:cNvSpPr/>
+          <p:nvPr/>
+        </p:nvSpPr>
+        <p:spPr>
+          <a:xfrm>
+            <a:off x="4800600" y="2880360"/>
+            <a:ext cx="91440" cy="841248"/>
+          </a:xfrm>
+          <a:prstGeom prst="rect">
+            <a:avLst/>
+          </a:prstGeom>
+          <a:solidFill>
+            <a:srgbClr val="FF7F0E"/>
+          </a:solidFill>
+          <a:ln/>
+        </p:spPr>
+      </p:sp>
+      <p:sp>
+        <p:nvSpPr>
+          <p:cNvPr id="33" name="Text 31"/>
+          <p:cNvSpPr/>
+          <p:nvPr/>
+        </p:nvSpPr>
+        <p:spPr>
+          <a:xfrm>
+            <a:off x="4965192" y="2953512"/>
+            <a:ext cx="457200" cy="320040"/>
+          </a:xfrm>
+          <a:prstGeom prst="rect">
+            <a:avLst/>
+          </a:prstGeom>
+          <a:noFill/>
+          <a:ln/>
+        </p:spPr>
+        <p:txBody>
+          <a:bodyPr wrap="square" lIns="0" tIns="0" rIns="0" bIns="0" rtlCol="0" anchor="ctr"/>
+          <a:lstStyle/>
+          <a:p>
+            <a:pPr indent="0" marL="0">
+              <a:buNone/>
+            </a:pPr>
+            <a:r>
+              <a:rPr lang="en-US" sz="1600" b="1" dirty="0">
+                <a:solidFill>
+                  <a:srgbClr val="1B2A4A"/>
+                </a:solidFill>
+                <a:latin typeface="Calibri" pitchFamily="34" charset="0"/>
+                <a:ea typeface="Calibri" pitchFamily="34" charset="-122"/>
+                <a:cs typeface="Calibri" pitchFamily="34" charset="-120"/>
+              </a:rPr>
+              <a:t>06</a:t>
+            </a:r>
+            <a:endParaRPr lang="en-US" sz="1600" dirty="0"/>
+          </a:p>
+        </p:txBody>
+      </p:sp>
+      <p:sp>
+        <p:nvSpPr>
+          <p:cNvPr id="34" name="Text 32"/>
+          <p:cNvSpPr/>
+          <p:nvPr/>
+        </p:nvSpPr>
+        <p:spPr>
+          <a:xfrm>
+            <a:off x="4965192" y="3154680"/>
+            <a:ext cx="4069080" cy="274320"/>
+          </a:xfrm>
+          <a:prstGeom prst="rect">
+            <a:avLst/>
+          </a:prstGeom>
+          <a:noFill/>
+          <a:ln/>
+        </p:spPr>
+        <p:txBody>
+          <a:bodyPr wrap="square" lIns="0" tIns="0" rIns="0" bIns="0" rtlCol="0" anchor="ctr"/>
+          <a:lstStyle/>
+          <a:p>
+            <a:pPr indent="0" marL="0">
+              <a:buNone/>
+            </a:pPr>
+            <a:r>
+              <a:rPr lang="en-US" sz="1100" b="1" dirty="0">
+                <a:solidFill>
+                  <a:srgbClr val="1E293B"/>
+                </a:solidFill>
+                <a:latin typeface="Calibri" pitchFamily="34" charset="0"/>
+                <a:ea typeface="Calibri" pitchFamily="34" charset="-122"/>
+                <a:cs typeface="Calibri" pitchFamily="34" charset="-120"/>
+              </a:rPr>
+              <a:t>Analysis 3 — Macro Regression</a:t>
+            </a:r>
+            <a:endParaRPr lang="en-US" sz="1100" dirty="0"/>
+          </a:p>
+        </p:txBody>
+      </p:sp>
+      <p:sp>
+        <p:nvSpPr>
+          <p:cNvPr id="35" name="Text 33"/>
+          <p:cNvSpPr/>
+          <p:nvPr/>
+        </p:nvSpPr>
+        <p:spPr>
+          <a:xfrm>
+            <a:off x="4965192" y="3410712"/>
+            <a:ext cx="4069080" cy="274320"/>
+          </a:xfrm>
+          <a:prstGeom prst="rect">
+            <a:avLst/>
+          </a:prstGeom>
+          <a:noFill/>
+          <a:ln/>
+        </p:spPr>
+        <p:txBody>
+          <a:bodyPr wrap="square" lIns="0" tIns="0" rIns="0" bIns="0" rtlCol="0" anchor="ctr"/>
+          <a:lstStyle/>
+          <a:p>
+            <a:pPr indent="0" marL="0">
+              <a:buNone/>
+            </a:pPr>
+            <a:r>
+              <a:rPr lang="en-US" sz="900" dirty="0">
+                <a:solidFill>
+                  <a:srgbClr val="64748B"/>
+                </a:solidFill>
+                <a:latin typeface="Calibri" pitchFamily="34" charset="0"/>
+                <a:ea typeface="Calibri" pitchFamily="34" charset="-122"/>
+                <a:cs typeface="Calibri" pitchFamily="34" charset="-120"/>
+              </a:rPr>
+              <a:t>Inflation and interest rates as return predictors</a:t>
+            </a:r>
+            <a:endParaRPr lang="en-US" sz="900" dirty="0"/>
+          </a:p>
+        </p:txBody>
+      </p:sp>
+      <p:sp>
+        <p:nvSpPr>
+          <p:cNvPr id="36" name="Shape 34"/>
+          <p:cNvSpPr/>
+          <p:nvPr/>
+        </p:nvSpPr>
+        <p:spPr>
+          <a:xfrm>
+            <a:off x="320040" y="3840480"/>
+            <a:ext cx="4297680" cy="841248"/>
+          </a:xfrm>
+          <a:prstGeom prst="rect">
+            <a:avLst/>
+          </a:prstGeom>
+          <a:solidFill>
+            <a:srgbClr val="FFFFFF"/>
+          </a:solidFill>
+          <a:ln/>
+          <a:effectLst>
+            <a:outerShdw sx="100000" sy="100000" kx="0" ky="0" algn="bl" rotWithShape="0" blurRad="101600" dist="38100" dir="8100000">
+              <a:srgbClr val="000000">
+                <a:alpha val="12000"/>
+              </a:srgbClr>
+            </a:outerShdw>
+          </a:effectLst>
+        </p:spPr>
+      </p:sp>
+      <p:sp>
+        <p:nvSpPr>
+          <p:cNvPr id="37" name="Shape 35"/>
+          <p:cNvSpPr/>
+          <p:nvPr/>
+        </p:nvSpPr>
+        <p:spPr>
+          <a:xfrm>
+            <a:off x="320040" y="3840480"/>
+            <a:ext cx="91440" cy="841248"/>
+          </a:xfrm>
+          <a:prstGeom prst="rect">
+            <a:avLst/>
+          </a:prstGeom>
+          <a:solidFill>
+            <a:srgbClr val="1F77B4"/>
+          </a:solidFill>
+          <a:ln/>
+        </p:spPr>
+      </p:sp>
+      <p:sp>
+        <p:nvSpPr>
+          <p:cNvPr id="38" name="Text 36"/>
+          <p:cNvSpPr/>
+          <p:nvPr/>
+        </p:nvSpPr>
+        <p:spPr>
+          <a:xfrm>
+            <a:off x="484632" y="3913632"/>
+            <a:ext cx="457200" cy="320040"/>
+          </a:xfrm>
+          <a:prstGeom prst="rect">
+            <a:avLst/>
+          </a:prstGeom>
+          <a:noFill/>
+          <a:ln/>
+        </p:spPr>
+        <p:txBody>
+          <a:bodyPr wrap="square" lIns="0" tIns="0" rIns="0" bIns="0" rtlCol="0" anchor="ctr"/>
+          <a:lstStyle/>
+          <a:p>
+            <a:pPr indent="0" marL="0">
+              <a:buNone/>
+            </a:pPr>
+            <a:r>
+              <a:rPr lang="en-US" sz="1600" b="1" dirty="0">
+                <a:solidFill>
+                  <a:srgbClr val="1B2A4A"/>
+                </a:solidFill>
+                <a:latin typeface="Calibri" pitchFamily="34" charset="0"/>
+                <a:ea typeface="Calibri" pitchFamily="34" charset="-122"/>
+                <a:cs typeface="Calibri" pitchFamily="34" charset="-120"/>
+              </a:rPr>
+              <a:t>07</a:t>
+            </a:r>
+            <a:endParaRPr lang="en-US" sz="1600" dirty="0"/>
+          </a:p>
+        </p:txBody>
+      </p:sp>
+      <p:sp>
+        <p:nvSpPr>
+          <p:cNvPr id="39" name="Text 37"/>
+          <p:cNvSpPr/>
+          <p:nvPr/>
+        </p:nvSpPr>
+        <p:spPr>
+          <a:xfrm>
+            <a:off x="484632" y="4114800"/>
+            <a:ext cx="4069080" cy="274320"/>
+          </a:xfrm>
+          <a:prstGeom prst="rect">
+            <a:avLst/>
+          </a:prstGeom>
+          <a:noFill/>
+          <a:ln/>
+        </p:spPr>
+        <p:txBody>
+          <a:bodyPr wrap="square" lIns="0" tIns="0" rIns="0" bIns="0" rtlCol="0" anchor="ctr"/>
+          <a:lstStyle/>
+          <a:p>
+            <a:pPr indent="0" marL="0">
+              <a:buNone/>
+            </a:pPr>
+            <a:r>
+              <a:rPr lang="en-US" sz="1100" b="1" dirty="0">
+                <a:solidFill>
+                  <a:srgbClr val="1E293B"/>
+                </a:solidFill>
+                <a:latin typeface="Calibri" pitchFamily="34" charset="0"/>
+                <a:ea typeface="Calibri" pitchFamily="34" charset="-122"/>
+                <a:cs typeface="Calibri" pitchFamily="34" charset="-120"/>
+              </a:rPr>
+              <a:t>Discussion &amp; Limitations</a:t>
+            </a:r>
+            <a:endParaRPr lang="en-US" sz="1100" dirty="0"/>
+          </a:p>
+        </p:txBody>
+      </p:sp>
+      <p:sp>
+        <p:nvSpPr>
+          <p:cNvPr id="40" name="Text 38"/>
+          <p:cNvSpPr/>
+          <p:nvPr/>
+        </p:nvSpPr>
+        <p:spPr>
+          <a:xfrm>
+            <a:off x="484632" y="4370832"/>
+            <a:ext cx="4069080" cy="274320"/>
+          </a:xfrm>
+          <a:prstGeom prst="rect">
+            <a:avLst/>
+          </a:prstGeom>
+          <a:noFill/>
+          <a:ln/>
+        </p:spPr>
+        <p:txBody>
+          <a:bodyPr wrap="square" lIns="0" tIns="0" rIns="0" bIns="0" rtlCol="0" anchor="ctr"/>
+          <a:lstStyle/>
+          <a:p>
+            <a:pPr indent="0" marL="0">
+              <a:buNone/>
+            </a:pPr>
+            <a:r>
+              <a:rPr lang="en-US" sz="900" dirty="0">
+                <a:solidFill>
+                  <a:srgbClr val="64748B"/>
+                </a:solidFill>
+                <a:latin typeface="Calibri" pitchFamily="34" charset="0"/>
+                <a:ea typeface="Calibri" pitchFamily="34" charset="-122"/>
+                <a:cs typeface="Calibri" pitchFamily="34" charset="-120"/>
+              </a:rPr>
+              <a:t>Key findings, limitations, and future work</a:t>
+            </a:r>
+            <a:endParaRPr lang="en-US" sz="900" dirty="0"/>
+          </a:p>
+        </p:txBody>
+      </p:sp>
+      <p:sp>
+        <p:nvSpPr>
+          <p:cNvPr id="41" name="Shape 39"/>
+          <p:cNvSpPr/>
+          <p:nvPr/>
+        </p:nvSpPr>
+        <p:spPr>
+          <a:xfrm>
+            <a:off x="4800600" y="3840480"/>
+            <a:ext cx="4297680" cy="841248"/>
+          </a:xfrm>
+          <a:prstGeom prst="rect">
+            <a:avLst/>
+          </a:prstGeom>
+          <a:solidFill>
+            <a:srgbClr val="FFFFFF"/>
+          </a:solidFill>
+          <a:ln/>
+          <a:effectLst>
+            <a:outerShdw sx="100000" sy="100000" kx="0" ky="0" algn="bl" rotWithShape="0" blurRad="101600" dist="38100" dir="8100000">
+              <a:srgbClr val="000000">
+                <a:alpha val="12000"/>
+              </a:srgbClr>
+            </a:outerShdw>
+          </a:effectLst>
+        </p:spPr>
+      </p:sp>
+      <p:sp>
+        <p:nvSpPr>
+          <p:cNvPr id="42" name="Shape 40"/>
+          <p:cNvSpPr/>
+          <p:nvPr/>
+        </p:nvSpPr>
+        <p:spPr>
+          <a:xfrm>
+            <a:off x="4800600" y="3840480"/>
+            <a:ext cx="91440" cy="841248"/>
+          </a:xfrm>
+          <a:prstGeom prst="rect">
+            <a:avLst/>
+          </a:prstGeom>
+          <a:solidFill>
+            <a:srgbClr val="FF7F0E"/>
+          </a:solidFill>
+          <a:ln/>
+        </p:spPr>
+      </p:sp>
+      <p:sp>
+        <p:nvSpPr>
+          <p:cNvPr id="43" name="Text 41"/>
+          <p:cNvSpPr/>
+          <p:nvPr/>
+        </p:nvSpPr>
+        <p:spPr>
+          <a:xfrm>
+            <a:off x="4965192" y="3913632"/>
+            <a:ext cx="457200" cy="320040"/>
+          </a:xfrm>
+          <a:prstGeom prst="rect">
+            <a:avLst/>
+          </a:prstGeom>
+          <a:noFill/>
+          <a:ln/>
+        </p:spPr>
+        <p:txBody>
+          <a:bodyPr wrap="square" lIns="0" tIns="0" rIns="0" bIns="0" rtlCol="0" anchor="ctr"/>
+          <a:lstStyle/>
+          <a:p>
+            <a:pPr indent="0" marL="0">
+              <a:buNone/>
+            </a:pPr>
+            <a:r>
+              <a:rPr lang="en-US" sz="1600" b="1" dirty="0">
+                <a:solidFill>
+                  <a:srgbClr val="1B2A4A"/>
+                </a:solidFill>
+                <a:latin typeface="Calibri" pitchFamily="34" charset="0"/>
+                <a:ea typeface="Calibri" pitchFamily="34" charset="-122"/>
+                <a:cs typeface="Calibri" pitchFamily="34" charset="-120"/>
+              </a:rPr>
+              <a:t>08</a:t>
+            </a:r>
+            <a:endParaRPr lang="en-US" sz="1600" dirty="0"/>
+          </a:p>
+        </p:txBody>
+      </p:sp>
+      <p:sp>
+        <p:nvSpPr>
+          <p:cNvPr id="44" name="Text 42"/>
+          <p:cNvSpPr/>
+          <p:nvPr/>
+        </p:nvSpPr>
+        <p:spPr>
+          <a:xfrm>
+            <a:off x="4965192" y="4114800"/>
+            <a:ext cx="4069080" cy="274320"/>
+          </a:xfrm>
+          <a:prstGeom prst="rect">
+            <a:avLst/>
+          </a:prstGeom>
+          <a:noFill/>
+          <a:ln/>
+        </p:spPr>
+        <p:txBody>
+          <a:bodyPr wrap="square" lIns="0" tIns="0" rIns="0" bIns="0" rtlCol="0" anchor="ctr"/>
+          <a:lstStyle/>
+          <a:p>
+            <a:pPr indent="0" marL="0">
+              <a:buNone/>
+            </a:pPr>
+            <a:r>
+              <a:rPr lang="en-US" sz="1100" b="1" dirty="0">
+                <a:solidFill>
+                  <a:srgbClr val="1E293B"/>
+                </a:solidFill>
+                <a:latin typeface="Calibri" pitchFamily="34" charset="0"/>
+                <a:ea typeface="Calibri" pitchFamily="34" charset="-122"/>
+                <a:cs typeface="Calibri" pitchFamily="34" charset="-120"/>
+              </a:rPr>
+              <a:t>Team Roles &amp; References</a:t>
+            </a:r>
+            <a:endParaRPr lang="en-US" sz="1100" dirty="0"/>
+          </a:p>
+        </p:txBody>
+      </p:sp>
+      <p:sp>
+        <p:nvSpPr>
+          <p:cNvPr id="45" name="Text 43"/>
+          <p:cNvSpPr/>
+          <p:nvPr/>
+        </p:nvSpPr>
+        <p:spPr>
+          <a:xfrm>
+            <a:off x="4965192" y="4370832"/>
+            <a:ext cx="4069080" cy="274320"/>
+          </a:xfrm>
+          <a:prstGeom prst="rect">
+            <a:avLst/>
+          </a:prstGeom>
+          <a:noFill/>
+          <a:ln/>
+        </p:spPr>
+        <p:txBody>
+          <a:bodyPr wrap="square" lIns="0" tIns="0" rIns="0" bIns="0" rtlCol="0" anchor="ctr"/>
+          <a:lstStyle/>
+          <a:p>
+            <a:pPr indent="0" marL="0">
+              <a:buNone/>
+            </a:pPr>
+            <a:r>
+              <a:rPr lang="en-US" sz="900" dirty="0">
+                <a:solidFill>
+                  <a:srgbClr val="64748B"/>
+                </a:solidFill>
+                <a:latin typeface="Calibri" pitchFamily="34" charset="0"/>
+                <a:ea typeface="Calibri" pitchFamily="34" charset="-122"/>
+                <a:cs typeface="Calibri" pitchFamily="34" charset="-120"/>
+              </a:rPr>
+              <a:t>Contributions and data sources</a:t>
+            </a:r>
+            <a:endParaRPr lang="en-US" sz="900" dirty="0"/>
+          </a:p>
+        </p:txBody>
+      </p:sp>
+    </p:spTree>
+  </p:cSld>
+  <p:clrMapOvr>
+    <a:masterClrMapping/>
+  </p:clrMapOvr>
+</p:sld>
+</file>
+
+<file path=ppt/slides/slide4.xml><?xml version="1.0" encoding="utf-8"?>
 <p:sld xmlns:a="http://schemas.openxmlformats.org/drawingml/2006/main" xmlns:r="http://schemas.openxmlformats.org/officeDocument/2006/relationships" xmlns:p="http://schemas.openxmlformats.org/presentationml/2006/main">
   <p:cSld name="Slide 3">
     <p:bg>
@@ -15136,7 +16373,7 @@
 </p:sld>
 </file>
 
-<file path=ppt/slides/slide4.xml><?xml version="1.0" encoding="utf-8"?>
+<file path=ppt/slides/slide5.xml><?xml version="1.0" encoding="utf-8"?>
 <p:sld xmlns:a="http://schemas.openxmlformats.org/drawingml/2006/main" xmlns:r="http://schemas.openxmlformats.org/officeDocument/2006/relationships" xmlns:p="http://schemas.openxmlformats.org/presentationml/2006/main">
   <p:cSld name="Slide 4">
     <p:bg>
@@ -15923,7 +17160,7 @@
 </p:sld>
 </file>
 
-<file path=ppt/slides/slide5.xml><?xml version="1.0" encoding="utf-8"?>
+<file path=ppt/slides/slide6.xml><?xml version="1.0" encoding="utf-8"?>
 <p:sld xmlns:a="http://schemas.openxmlformats.org/drawingml/2006/main" xmlns:r="http://schemas.openxmlformats.org/officeDocument/2006/relationships" xmlns:p="http://schemas.openxmlformats.org/presentationml/2006/main">
   <p:cSld name="Slide 5">
     <p:bg>
@@ -17162,7 +18399,7 @@
 </p:sld>
 </file>
 
-<file path=ppt/slides/slide6.xml><?xml version="1.0" encoding="utf-8"?>
+<file path=ppt/slides/slide7.xml><?xml version="1.0" encoding="utf-8"?>
 <p:sld xmlns:a="http://schemas.openxmlformats.org/drawingml/2006/main" xmlns:r="http://schemas.openxmlformats.org/officeDocument/2006/relationships" xmlns:p="http://schemas.openxmlformats.org/presentationml/2006/main">
   <p:cSld name="Slide 6">
     <p:bg>
@@ -18605,7 +19842,7 @@
 </p:sld>
 </file>
 
-<file path=ppt/slides/slide7.xml><?xml version="1.0" encoding="utf-8"?>
+<file path=ppt/slides/slide8.xml><?xml version="1.0" encoding="utf-8"?>
 <p:sld xmlns:a="http://schemas.openxmlformats.org/drawingml/2006/main" xmlns:r="http://schemas.openxmlformats.org/officeDocument/2006/relationships" xmlns:p="http://schemas.openxmlformats.org/presentationml/2006/main">
   <p:cSld name="Slide 7">
     <p:bg>
@@ -18755,7 +19992,7 @@
 </p:sld>
 </file>
 
-<file path=ppt/slides/slide8.xml><?xml version="1.0" encoding="utf-8"?>
+<file path=ppt/slides/slide9.xml><?xml version="1.0" encoding="utf-8"?>
 <p:sld xmlns:a="http://schemas.openxmlformats.org/drawingml/2006/main" xmlns:r="http://schemas.openxmlformats.org/officeDocument/2006/relationships" xmlns:p="http://schemas.openxmlformats.org/presentationml/2006/main">
   <p:cSld name="Slide 8">
     <p:bg>
@@ -18901,1151 +20138,6 @@
           </a:prstGeom>
         </p:spPr>
       </p:pic>
-    </p:spTree>
-  </p:cSld>
-  <p:clrMapOvr>
-    <a:masterClrMapping/>
-  </p:clrMapOvr>
-</p:sld>
-</file>
-
-<file path=ppt/slides/slide9.xml><?xml version="1.0" encoding="utf-8"?>
-<p:sld xmlns:a="http://schemas.openxmlformats.org/drawingml/2006/main" xmlns:r="http://schemas.openxmlformats.org/officeDocument/2006/relationships" xmlns:p="http://schemas.openxmlformats.org/presentationml/2006/main">
-  <p:cSld name="Slide 9">
-    <p:bg>
-      <p:bgPr>
-        <a:solidFill>
-          <a:srgbClr val="F4F7FC"/>
-        </a:solidFill>
-      </p:bgPr>
-    </p:bg>
-    <p:spTree>
-      <p:nvGrpSpPr>
-        <p:cNvPr id="1" name=""/>
-        <p:cNvGrpSpPr/>
-        <p:nvPr/>
-      </p:nvGrpSpPr>
-      <p:grpSpPr>
-        <a:xfrm>
-          <a:off x="0" y="0"/>
-          <a:ext cx="0" cy="0"/>
-          <a:chOff x="0" y="0"/>
-          <a:chExt cx="0" cy="0"/>
-        </a:xfrm>
-      </p:grpSpPr>
-      <p:sp>
-        <p:nvSpPr>
-          <p:cNvPr id="2" name="Shape 0"/>
-          <p:cNvSpPr/>
-          <p:nvPr/>
-        </p:nvSpPr>
-        <p:spPr>
-          <a:xfrm>
-            <a:off x="0" y="0"/>
-            <a:ext cx="9144000" cy="749808"/>
-          </a:xfrm>
-          <a:prstGeom prst="rect">
-            <a:avLst/>
-          </a:prstGeom>
-          <a:solidFill>
-            <a:srgbClr val="1B2A4A"/>
-          </a:solidFill>
-          <a:ln/>
-        </p:spPr>
-      </p:sp>
-      <p:sp>
-        <p:nvSpPr>
-          <p:cNvPr id="3" name="Shape 1"/>
-          <p:cNvSpPr/>
-          <p:nvPr/>
-        </p:nvSpPr>
-        <p:spPr>
-          <a:xfrm>
-            <a:off x="8595360" y="146304"/>
-            <a:ext cx="228600" cy="228600"/>
-          </a:xfrm>
-          <a:prstGeom prst="ellipse">
-            <a:avLst/>
-          </a:prstGeom>
-          <a:solidFill>
-            <a:srgbClr val="1F77B4"/>
-          </a:solidFill>
-          <a:ln/>
-        </p:spPr>
-      </p:sp>
-      <p:sp>
-        <p:nvSpPr>
-          <p:cNvPr id="4" name="Shape 2"/>
-          <p:cNvSpPr/>
-          <p:nvPr/>
-        </p:nvSpPr>
-        <p:spPr>
-          <a:xfrm>
-            <a:off x="8823960" y="146304"/>
-            <a:ext cx="228600" cy="228600"/>
-          </a:xfrm>
-          <a:prstGeom prst="ellipse">
-            <a:avLst/>
-          </a:prstGeom>
-          <a:solidFill>
-            <a:srgbClr val="FF7F0E"/>
-          </a:solidFill>
-          <a:ln/>
-        </p:spPr>
-      </p:sp>
-      <p:sp>
-        <p:nvSpPr>
-          <p:cNvPr id="5" name="Text 3"/>
-          <p:cNvSpPr/>
-          <p:nvPr/>
-        </p:nvSpPr>
-        <p:spPr>
-          <a:xfrm>
-            <a:off x="365760" y="73152"/>
-            <a:ext cx="8046720" cy="594360"/>
-          </a:xfrm>
-          <a:prstGeom prst="rect">
-            <a:avLst/>
-          </a:prstGeom>
-          <a:noFill/>
-          <a:ln/>
-        </p:spPr>
-        <p:txBody>
-          <a:bodyPr wrap="square" lIns="0" tIns="0" rIns="0" bIns="0" rtlCol="0" anchor="ctr"/>
-          <a:lstStyle/>
-          <a:p>
-            <a:pPr indent="0" marL="0">
-              <a:buNone/>
-            </a:pPr>
-            <a:r>
-              <a:rPr lang="en-US" sz="2200" b="1" dirty="0">
-                <a:solidFill>
-                  <a:srgbClr val="FFFFFF"/>
-                </a:solidFill>
-                <a:latin typeface="Calibri" pitchFamily="34" charset="0"/>
-                <a:ea typeface="Calibri" pitchFamily="34" charset="-122"/>
-                <a:cs typeface="Calibri" pitchFamily="34" charset="-120"/>
-              </a:rPr>
-              <a:t>RQ 1 — Return Correlation: Rolling &amp; Annual Breakdown</a:t>
-            </a:r>
-            <a:endParaRPr lang="en-US" sz="2200" dirty="0"/>
-          </a:p>
-        </p:txBody>
-      </p:sp>
-      <p:pic>
-        <p:nvPicPr>
-          <p:cNvPr id="6" name="Image 0" descr="/sessions/zealous-optimistic-turing/mnt/Apple-vs-samsung---competitive-Financial-Market-analysis/plot2_rolling_correlation.png">    </p:cNvPr>
-          <p:cNvPicPr>
-            <a:picLocks noChangeAspect="1"/>
-          </p:cNvPicPr>
-          <p:nvPr/>
-        </p:nvPicPr>
-        <p:blipFill>
-          <a:blip r:embed="rId1"/>
-          <a:srcRect l="0" r="0" t="-4000" b="-4000"/>
-          <a:stretch/>
-        </p:blipFill>
-        <p:spPr>
-          <a:xfrm>
-            <a:off x="320040" y="822960"/>
-            <a:ext cx="5120640" cy="2468880"/>
-          </a:xfrm>
-          <a:prstGeom prst="rect">
-            <a:avLst/>
-          </a:prstGeom>
-        </p:spPr>
-      </p:pic>
-      <p:pic>
-        <p:nvPicPr>
-          <p:cNvPr id="7" name="Image 1" descr="/sessions/zealous-optimistic-turing/mnt/Apple-vs-samsung---competitive-Financial-Market-analysis/plot3_scatter_annual_corr.png">    </p:cNvPr>
-          <p:cNvPicPr>
-            <a:picLocks noChangeAspect="1"/>
-          </p:cNvPicPr>
-          <p:nvPr/>
-        </p:nvPicPr>
-        <p:blipFill>
-          <a:blip r:embed="rId2"/>
-          <a:srcRect l="-7143" r="-7143" t="0" b="0"/>
-          <a:stretch/>
-        </p:blipFill>
-        <p:spPr>
-          <a:xfrm>
-            <a:off x="320040" y="3200400"/>
-            <a:ext cx="5120640" cy="1600200"/>
-          </a:xfrm>
-          <a:prstGeom prst="rect">
-            <a:avLst/>
-          </a:prstGeom>
-        </p:spPr>
-      </p:pic>
-      <p:sp>
-        <p:nvSpPr>
-          <p:cNvPr id="8" name="Shape 4"/>
-          <p:cNvSpPr/>
-          <p:nvPr/>
-        </p:nvSpPr>
-        <p:spPr>
-          <a:xfrm>
-            <a:off x="5623560" y="822960"/>
-            <a:ext cx="3200400" cy="4114800"/>
-          </a:xfrm>
-          <a:prstGeom prst="rect">
-            <a:avLst/>
-          </a:prstGeom>
-          <a:solidFill>
-            <a:srgbClr val="FFFFFF"/>
-          </a:solidFill>
-          <a:ln/>
-          <a:effectLst>
-            <a:outerShdw sx="100000" sy="100000" kx="0" ky="0" algn="bl" rotWithShape="0" blurRad="101600" dist="38100" dir="8100000">
-              <a:srgbClr val="000000">
-                <a:alpha val="12000"/>
-              </a:srgbClr>
-            </a:outerShdw>
-          </a:effectLst>
-        </p:spPr>
-      </p:sp>
-      <p:sp>
-        <p:nvSpPr>
-          <p:cNvPr id="9" name="Shape 5"/>
-          <p:cNvSpPr/>
-          <p:nvPr/>
-        </p:nvSpPr>
-        <p:spPr>
-          <a:xfrm>
-            <a:off x="5623560" y="822960"/>
-            <a:ext cx="3200400" cy="109728"/>
-          </a:xfrm>
-          <a:prstGeom prst="rect">
-            <a:avLst/>
-          </a:prstGeom>
-          <a:solidFill>
-            <a:srgbClr val="1F77B4"/>
-          </a:solidFill>
-          <a:ln/>
-        </p:spPr>
-      </p:sp>
-      <p:sp>
-        <p:nvSpPr>
-          <p:cNvPr id="10" name="Text 6"/>
-          <p:cNvSpPr/>
-          <p:nvPr/>
-        </p:nvSpPr>
-        <p:spPr>
-          <a:xfrm>
-            <a:off x="5760720" y="960120"/>
-            <a:ext cx="2926080" cy="365760"/>
-          </a:xfrm>
-          <a:prstGeom prst="rect">
-            <a:avLst/>
-          </a:prstGeom>
-          <a:noFill/>
-          <a:ln/>
-        </p:spPr>
-        <p:txBody>
-          <a:bodyPr wrap="square" lIns="0" tIns="0" rIns="0" bIns="0" rtlCol="0" anchor="ctr"/>
-          <a:lstStyle/>
-          <a:p>
-            <a:pPr indent="0" marL="0">
-              <a:buNone/>
-            </a:pPr>
-            <a:r>
-              <a:rPr lang="en-US" sz="1300" b="1" dirty="0">
-                <a:solidFill>
-                  <a:srgbClr val="1B2A4A"/>
-                </a:solidFill>
-                <a:latin typeface="Calibri" pitchFamily="34" charset="0"/>
-                <a:ea typeface="Calibri" pitchFamily="34" charset="-122"/>
-                <a:cs typeface="Calibri" pitchFamily="34" charset="-120"/>
-              </a:rPr>
-              <a:t>Key Findings</a:t>
-            </a:r>
-            <a:endParaRPr lang="en-US" sz="1300" dirty="0"/>
-          </a:p>
-        </p:txBody>
-      </p:sp>
-      <p:sp>
-        <p:nvSpPr>
-          <p:cNvPr id="11" name="Shape 7"/>
-          <p:cNvSpPr/>
-          <p:nvPr/>
-        </p:nvSpPr>
-        <p:spPr>
-          <a:xfrm>
-            <a:off x="5715000" y="1417320"/>
-            <a:ext cx="2926080" cy="329184"/>
-          </a:xfrm>
-          <a:prstGeom prst="rect">
-            <a:avLst/>
-          </a:prstGeom>
-          <a:solidFill>
-            <a:srgbClr val="F0F4FF"/>
-          </a:solidFill>
-          <a:ln/>
-        </p:spPr>
-      </p:sp>
-      <p:sp>
-        <p:nvSpPr>
-          <p:cNvPr id="12" name="Text 8"/>
-          <p:cNvSpPr/>
-          <p:nvPr/>
-        </p:nvSpPr>
-        <p:spPr>
-          <a:xfrm>
-            <a:off x="5779008" y="1463040"/>
-            <a:ext cx="1554480" cy="256032"/>
-          </a:xfrm>
-          <a:prstGeom prst="rect">
-            <a:avLst/>
-          </a:prstGeom>
-          <a:noFill/>
-          <a:ln/>
-        </p:spPr>
-        <p:txBody>
-          <a:bodyPr wrap="square" lIns="0" tIns="0" rIns="0" bIns="0" rtlCol="0" anchor="ctr"/>
-          <a:lstStyle/>
-          <a:p>
-            <a:pPr indent="0" marL="0">
-              <a:buNone/>
-            </a:pPr>
-            <a:r>
-              <a:rPr lang="en-US" sz="950" dirty="0">
-                <a:solidFill>
-                  <a:srgbClr val="64748B"/>
-                </a:solidFill>
-                <a:latin typeface="Calibri" pitchFamily="34" charset="0"/>
-                <a:ea typeface="Calibri" pitchFamily="34" charset="-122"/>
-                <a:cs typeface="Calibri" pitchFamily="34" charset="-120"/>
-              </a:rPr>
-              <a:t>Overall r</a:t>
-            </a:r>
-            <a:endParaRPr lang="en-US" sz="950" dirty="0"/>
-          </a:p>
-        </p:txBody>
-      </p:sp>
-      <p:sp>
-        <p:nvSpPr>
-          <p:cNvPr id="13" name="Text 9"/>
-          <p:cNvSpPr/>
-          <p:nvPr/>
-        </p:nvSpPr>
-        <p:spPr>
-          <a:xfrm>
-            <a:off x="7315200" y="1463040"/>
-            <a:ext cx="1188720" cy="256032"/>
-          </a:xfrm>
-          <a:prstGeom prst="rect">
-            <a:avLst/>
-          </a:prstGeom>
-          <a:noFill/>
-          <a:ln/>
-        </p:spPr>
-        <p:txBody>
-          <a:bodyPr wrap="square" lIns="0" tIns="0" rIns="0" bIns="0" rtlCol="0" anchor="ctr"/>
-          <a:lstStyle/>
-          <a:p>
-            <a:pPr algn="r" indent="0" marL="0">
-              <a:buNone/>
-            </a:pPr>
-            <a:r>
-              <a:rPr lang="en-US" sz="950" b="1" dirty="0">
-                <a:solidFill>
-                  <a:srgbClr val="1B2A4A"/>
-                </a:solidFill>
-                <a:latin typeface="Calibri" pitchFamily="34" charset="0"/>
-                <a:ea typeface="Calibri" pitchFamily="34" charset="-122"/>
-                <a:cs typeface="Calibri" pitchFamily="34" charset="-120"/>
-              </a:rPr>
-              <a:t>0.068 (very low)</a:t>
-            </a:r>
-            <a:endParaRPr lang="en-US" sz="950" dirty="0"/>
-          </a:p>
-        </p:txBody>
-      </p:sp>
-      <p:sp>
-        <p:nvSpPr>
-          <p:cNvPr id="14" name="Shape 10"/>
-          <p:cNvSpPr/>
-          <p:nvPr/>
-        </p:nvSpPr>
-        <p:spPr>
-          <a:xfrm>
-            <a:off x="5715000" y="1810512"/>
-            <a:ext cx="2926080" cy="329184"/>
-          </a:xfrm>
-          <a:prstGeom prst="rect">
-            <a:avLst/>
-          </a:prstGeom>
-          <a:solidFill>
-            <a:srgbClr val="FFFFFF"/>
-          </a:solidFill>
-          <a:ln/>
-        </p:spPr>
-      </p:sp>
-      <p:sp>
-        <p:nvSpPr>
-          <p:cNvPr id="15" name="Text 11"/>
-          <p:cNvSpPr/>
-          <p:nvPr/>
-        </p:nvSpPr>
-        <p:spPr>
-          <a:xfrm>
-            <a:off x="5779008" y="1856232"/>
-            <a:ext cx="1554480" cy="256032"/>
-          </a:xfrm>
-          <a:prstGeom prst="rect">
-            <a:avLst/>
-          </a:prstGeom>
-          <a:noFill/>
-          <a:ln/>
-        </p:spPr>
-        <p:txBody>
-          <a:bodyPr wrap="square" lIns="0" tIns="0" rIns="0" bIns="0" rtlCol="0" anchor="ctr"/>
-          <a:lstStyle/>
-          <a:p>
-            <a:pPr indent="0" marL="0">
-              <a:buNone/>
-            </a:pPr>
-            <a:r>
-              <a:rPr lang="en-US" sz="950" dirty="0">
-                <a:solidFill>
-                  <a:srgbClr val="64748B"/>
-                </a:solidFill>
-                <a:latin typeface="Calibri" pitchFamily="34" charset="0"/>
-                <a:ea typeface="Calibri" pitchFamily="34" charset="-122"/>
-                <a:cs typeface="Calibri" pitchFamily="34" charset="-120"/>
-              </a:rPr>
-              <a:t>Peak corr.</a:t>
-            </a:r>
-            <a:endParaRPr lang="en-US" sz="950" dirty="0"/>
-          </a:p>
-        </p:txBody>
-      </p:sp>
-      <p:sp>
-        <p:nvSpPr>
-          <p:cNvPr id="16" name="Text 12"/>
-          <p:cNvSpPr/>
-          <p:nvPr/>
-        </p:nvSpPr>
-        <p:spPr>
-          <a:xfrm>
-            <a:off x="7315200" y="1856232"/>
-            <a:ext cx="1188720" cy="256032"/>
-          </a:xfrm>
-          <a:prstGeom prst="rect">
-            <a:avLst/>
-          </a:prstGeom>
-          <a:noFill/>
-          <a:ln/>
-        </p:spPr>
-        <p:txBody>
-          <a:bodyPr wrap="square" lIns="0" tIns="0" rIns="0" bIns="0" rtlCol="0" anchor="ctr"/>
-          <a:lstStyle/>
-          <a:p>
-            <a:pPr algn="r" indent="0" marL="0">
-              <a:buNone/>
-            </a:pPr>
-            <a:r>
-              <a:rPr lang="en-US" sz="950" b="1" dirty="0">
-                <a:solidFill>
-                  <a:srgbClr val="1B2A4A"/>
-                </a:solidFill>
-                <a:latin typeface="Calibri" pitchFamily="34" charset="0"/>
-                <a:ea typeface="Calibri" pitchFamily="34" charset="-122"/>
-                <a:cs typeface="Calibri" pitchFamily="34" charset="-120"/>
-              </a:rPr>
-              <a:t>~0.45 (COVID 2020)</a:t>
-            </a:r>
-            <a:endParaRPr lang="en-US" sz="950" dirty="0"/>
-          </a:p>
-        </p:txBody>
-      </p:sp>
-      <p:sp>
-        <p:nvSpPr>
-          <p:cNvPr id="17" name="Shape 13"/>
-          <p:cNvSpPr/>
-          <p:nvPr/>
-        </p:nvSpPr>
-        <p:spPr>
-          <a:xfrm>
-            <a:off x="5715000" y="2203704"/>
-            <a:ext cx="2926080" cy="329184"/>
-          </a:xfrm>
-          <a:prstGeom prst="rect">
-            <a:avLst/>
-          </a:prstGeom>
-          <a:solidFill>
-            <a:srgbClr val="F0F4FF"/>
-          </a:solidFill>
-          <a:ln/>
-        </p:spPr>
-      </p:sp>
-      <p:sp>
-        <p:nvSpPr>
-          <p:cNvPr id="18" name="Text 14"/>
-          <p:cNvSpPr/>
-          <p:nvPr/>
-        </p:nvSpPr>
-        <p:spPr>
-          <a:xfrm>
-            <a:off x="5779008" y="2249424"/>
-            <a:ext cx="1554480" cy="256032"/>
-          </a:xfrm>
-          <a:prstGeom prst="rect">
-            <a:avLst/>
-          </a:prstGeom>
-          <a:noFill/>
-          <a:ln/>
-        </p:spPr>
-        <p:txBody>
-          <a:bodyPr wrap="square" lIns="0" tIns="0" rIns="0" bIns="0" rtlCol="0" anchor="ctr"/>
-          <a:lstStyle/>
-          <a:p>
-            <a:pPr indent="0" marL="0">
-              <a:buNone/>
-            </a:pPr>
-            <a:r>
-              <a:rPr lang="en-US" sz="950" dirty="0">
-                <a:solidFill>
-                  <a:srgbClr val="64748B"/>
-                </a:solidFill>
-                <a:latin typeface="Calibri" pitchFamily="34" charset="0"/>
-                <a:ea typeface="Calibri" pitchFamily="34" charset="-122"/>
-                <a:cs typeface="Calibri" pitchFamily="34" charset="-120"/>
-              </a:rPr>
-              <a:t>Best year</a:t>
-            </a:r>
-            <a:endParaRPr lang="en-US" sz="950" dirty="0"/>
-          </a:p>
-        </p:txBody>
-      </p:sp>
-      <p:sp>
-        <p:nvSpPr>
-          <p:cNvPr id="19" name="Text 15"/>
-          <p:cNvSpPr/>
-          <p:nvPr/>
-        </p:nvSpPr>
-        <p:spPr>
-          <a:xfrm>
-            <a:off x="7315200" y="2249424"/>
-            <a:ext cx="1188720" cy="256032"/>
-          </a:xfrm>
-          <a:prstGeom prst="rect">
-            <a:avLst/>
-          </a:prstGeom>
-          <a:noFill/>
-          <a:ln/>
-        </p:spPr>
-        <p:txBody>
-          <a:bodyPr wrap="square" lIns="0" tIns="0" rIns="0" bIns="0" rtlCol="0" anchor="ctr"/>
-          <a:lstStyle/>
-          <a:p>
-            <a:pPr algn="r" indent="0" marL="0">
-              <a:buNone/>
-            </a:pPr>
-            <a:r>
-              <a:rPr lang="en-US" sz="950" b="1" dirty="0">
-                <a:solidFill>
-                  <a:srgbClr val="1B2A4A"/>
-                </a:solidFill>
-                <a:latin typeface="Calibri" pitchFamily="34" charset="0"/>
-                <a:ea typeface="Calibri" pitchFamily="34" charset="-122"/>
-                <a:cs typeface="Calibri" pitchFamily="34" charset="-120"/>
-              </a:rPr>
-              <a:t>2020: r = 0.44</a:t>
-            </a:r>
-            <a:endParaRPr lang="en-US" sz="950" dirty="0"/>
-          </a:p>
-        </p:txBody>
-      </p:sp>
-      <p:sp>
-        <p:nvSpPr>
-          <p:cNvPr id="20" name="Shape 16"/>
-          <p:cNvSpPr/>
-          <p:nvPr/>
-        </p:nvSpPr>
-        <p:spPr>
-          <a:xfrm>
-            <a:off x="5715000" y="2596896"/>
-            <a:ext cx="2926080" cy="329184"/>
-          </a:xfrm>
-          <a:prstGeom prst="rect">
-            <a:avLst/>
-          </a:prstGeom>
-          <a:solidFill>
-            <a:srgbClr val="FFFFFF"/>
-          </a:solidFill>
-          <a:ln/>
-        </p:spPr>
-      </p:sp>
-      <p:sp>
-        <p:nvSpPr>
-          <p:cNvPr id="21" name="Text 17"/>
-          <p:cNvSpPr/>
-          <p:nvPr/>
-        </p:nvSpPr>
-        <p:spPr>
-          <a:xfrm>
-            <a:off x="5779008" y="2642616"/>
-            <a:ext cx="1554480" cy="256032"/>
-          </a:xfrm>
-          <a:prstGeom prst="rect">
-            <a:avLst/>
-          </a:prstGeom>
-          <a:noFill/>
-          <a:ln/>
-        </p:spPr>
-        <p:txBody>
-          <a:bodyPr wrap="square" lIns="0" tIns="0" rIns="0" bIns="0" rtlCol="0" anchor="ctr"/>
-          <a:lstStyle/>
-          <a:p>
-            <a:pPr indent="0" marL="0">
-              <a:buNone/>
-            </a:pPr>
-            <a:r>
-              <a:rPr lang="en-US" sz="950" dirty="0">
-                <a:solidFill>
-                  <a:srgbClr val="64748B"/>
-                </a:solidFill>
-                <a:latin typeface="Calibri" pitchFamily="34" charset="0"/>
-                <a:ea typeface="Calibri" pitchFamily="34" charset="-122"/>
-                <a:cs typeface="Calibri" pitchFamily="34" charset="-120"/>
-              </a:rPr>
-              <a:t>Apple CAGR</a:t>
-            </a:r>
-            <a:endParaRPr lang="en-US" sz="950" dirty="0"/>
-          </a:p>
-        </p:txBody>
-      </p:sp>
-      <p:sp>
-        <p:nvSpPr>
-          <p:cNvPr id="22" name="Text 18"/>
-          <p:cNvSpPr/>
-          <p:nvPr/>
-        </p:nvSpPr>
-        <p:spPr>
-          <a:xfrm>
-            <a:off x="7315200" y="2642616"/>
-            <a:ext cx="1188720" cy="256032"/>
-          </a:xfrm>
-          <a:prstGeom prst="rect">
-            <a:avLst/>
-          </a:prstGeom>
-          <a:noFill/>
-          <a:ln/>
-        </p:spPr>
-        <p:txBody>
-          <a:bodyPr wrap="square" lIns="0" tIns="0" rIns="0" bIns="0" rtlCol="0" anchor="ctr"/>
-          <a:lstStyle/>
-          <a:p>
-            <a:pPr algn="r" indent="0" marL="0">
-              <a:buNone/>
-            </a:pPr>
-            <a:r>
-              <a:rPr lang="en-US" sz="950" b="1" dirty="0">
-                <a:solidFill>
-                  <a:srgbClr val="1B2A4A"/>
-                </a:solidFill>
-                <a:latin typeface="Calibri" pitchFamily="34" charset="0"/>
-                <a:ea typeface="Calibri" pitchFamily="34" charset="-122"/>
-                <a:cs typeface="Calibri" pitchFamily="34" charset="-120"/>
-              </a:rPr>
-              <a:t>31.0% annualized</a:t>
-            </a:r>
-            <a:endParaRPr lang="en-US" sz="950" dirty="0"/>
-          </a:p>
-        </p:txBody>
-      </p:sp>
-      <p:sp>
-        <p:nvSpPr>
-          <p:cNvPr id="23" name="Shape 19"/>
-          <p:cNvSpPr/>
-          <p:nvPr/>
-        </p:nvSpPr>
-        <p:spPr>
-          <a:xfrm>
-            <a:off x="5715000" y="2990088"/>
-            <a:ext cx="2926080" cy="329184"/>
-          </a:xfrm>
-          <a:prstGeom prst="rect">
-            <a:avLst/>
-          </a:prstGeom>
-          <a:solidFill>
-            <a:srgbClr val="F0F4FF"/>
-          </a:solidFill>
-          <a:ln/>
-        </p:spPr>
-      </p:sp>
-      <p:sp>
-        <p:nvSpPr>
-          <p:cNvPr id="24" name="Text 20"/>
-          <p:cNvSpPr/>
-          <p:nvPr/>
-        </p:nvSpPr>
-        <p:spPr>
-          <a:xfrm>
-            <a:off x="5779008" y="3035808"/>
-            <a:ext cx="1554480" cy="256032"/>
-          </a:xfrm>
-          <a:prstGeom prst="rect">
-            <a:avLst/>
-          </a:prstGeom>
-          <a:noFill/>
-          <a:ln/>
-        </p:spPr>
-        <p:txBody>
-          <a:bodyPr wrap="square" lIns="0" tIns="0" rIns="0" bIns="0" rtlCol="0" anchor="ctr"/>
-          <a:lstStyle/>
-          <a:p>
-            <a:pPr indent="0" marL="0">
-              <a:buNone/>
-            </a:pPr>
-            <a:r>
-              <a:rPr lang="en-US" sz="950" dirty="0">
-                <a:solidFill>
-                  <a:srgbClr val="64748B"/>
-                </a:solidFill>
-                <a:latin typeface="Calibri" pitchFamily="34" charset="0"/>
-                <a:ea typeface="Calibri" pitchFamily="34" charset="-122"/>
-                <a:cs typeface="Calibri" pitchFamily="34" charset="-120"/>
-              </a:rPr>
-              <a:t>Samsung CAGR</a:t>
-            </a:r>
-            <a:endParaRPr lang="en-US" sz="950" dirty="0"/>
-          </a:p>
-        </p:txBody>
-      </p:sp>
-      <p:sp>
-        <p:nvSpPr>
-          <p:cNvPr id="25" name="Text 21"/>
-          <p:cNvSpPr/>
-          <p:nvPr/>
-        </p:nvSpPr>
-        <p:spPr>
-          <a:xfrm>
-            <a:off x="7315200" y="3035808"/>
-            <a:ext cx="1188720" cy="256032"/>
-          </a:xfrm>
-          <a:prstGeom prst="rect">
-            <a:avLst/>
-          </a:prstGeom>
-          <a:noFill/>
-          <a:ln/>
-        </p:spPr>
-        <p:txBody>
-          <a:bodyPr wrap="square" lIns="0" tIns="0" rIns="0" bIns="0" rtlCol="0" anchor="ctr"/>
-          <a:lstStyle/>
-          <a:p>
-            <a:pPr algn="r" indent="0" marL="0">
-              <a:buNone/>
-            </a:pPr>
-            <a:r>
-              <a:rPr lang="en-US" sz="950" b="1" dirty="0">
-                <a:solidFill>
-                  <a:srgbClr val="1B2A4A"/>
-                </a:solidFill>
-                <a:latin typeface="Calibri" pitchFamily="34" charset="0"/>
-                <a:ea typeface="Calibri" pitchFamily="34" charset="-122"/>
-                <a:cs typeface="Calibri" pitchFamily="34" charset="-120"/>
-              </a:rPr>
-              <a:t>30.5% annualized</a:t>
-            </a:r>
-            <a:endParaRPr lang="en-US" sz="950" dirty="0"/>
-          </a:p>
-        </p:txBody>
-      </p:sp>
-      <p:sp>
-        <p:nvSpPr>
-          <p:cNvPr id="26" name="Shape 22"/>
-          <p:cNvSpPr/>
-          <p:nvPr/>
-        </p:nvSpPr>
-        <p:spPr>
-          <a:xfrm>
-            <a:off x="5715000" y="3383280"/>
-            <a:ext cx="2926080" cy="329184"/>
-          </a:xfrm>
-          <a:prstGeom prst="rect">
-            <a:avLst/>
-          </a:prstGeom>
-          <a:solidFill>
-            <a:srgbClr val="FFFFFF"/>
-          </a:solidFill>
-          <a:ln/>
-        </p:spPr>
-      </p:sp>
-      <p:sp>
-        <p:nvSpPr>
-          <p:cNvPr id="27" name="Text 23"/>
-          <p:cNvSpPr/>
-          <p:nvPr/>
-        </p:nvSpPr>
-        <p:spPr>
-          <a:xfrm>
-            <a:off x="5779008" y="3429000"/>
-            <a:ext cx="1554480" cy="256032"/>
-          </a:xfrm>
-          <a:prstGeom prst="rect">
-            <a:avLst/>
-          </a:prstGeom>
-          <a:noFill/>
-          <a:ln/>
-        </p:spPr>
-        <p:txBody>
-          <a:bodyPr wrap="square" lIns="0" tIns="0" rIns="0" bIns="0" rtlCol="0" anchor="ctr"/>
-          <a:lstStyle/>
-          <a:p>
-            <a:pPr indent="0" marL="0">
-              <a:buNone/>
-            </a:pPr>
-            <a:r>
-              <a:rPr lang="en-US" sz="950" dirty="0">
-                <a:solidFill>
-                  <a:srgbClr val="64748B"/>
-                </a:solidFill>
-                <a:latin typeface="Calibri" pitchFamily="34" charset="0"/>
-                <a:ea typeface="Calibri" pitchFamily="34" charset="-122"/>
-                <a:cs typeface="Calibri" pitchFamily="34" charset="-120"/>
-              </a:rPr>
-              <a:t>Apple vol.</a:t>
-            </a:r>
-            <a:endParaRPr lang="en-US" sz="950" dirty="0"/>
-          </a:p>
-        </p:txBody>
-      </p:sp>
-      <p:sp>
-        <p:nvSpPr>
-          <p:cNvPr id="28" name="Text 24"/>
-          <p:cNvSpPr/>
-          <p:nvPr/>
-        </p:nvSpPr>
-        <p:spPr>
-          <a:xfrm>
-            <a:off x="7315200" y="3429000"/>
-            <a:ext cx="1188720" cy="256032"/>
-          </a:xfrm>
-          <a:prstGeom prst="rect">
-            <a:avLst/>
-          </a:prstGeom>
-          <a:noFill/>
-          <a:ln/>
-        </p:spPr>
-        <p:txBody>
-          <a:bodyPr wrap="square" lIns="0" tIns="0" rIns="0" bIns="0" rtlCol="0" anchor="ctr"/>
-          <a:lstStyle/>
-          <a:p>
-            <a:pPr algn="r" indent="0" marL="0">
-              <a:buNone/>
-            </a:pPr>
-            <a:r>
-              <a:rPr lang="en-US" sz="950" b="1" dirty="0">
-                <a:solidFill>
-                  <a:srgbClr val="1B2A4A"/>
-                </a:solidFill>
-                <a:latin typeface="Calibri" pitchFamily="34" charset="0"/>
-                <a:ea typeface="Calibri" pitchFamily="34" charset="-122"/>
-                <a:cs typeface="Calibri" pitchFamily="34" charset="-120"/>
-              </a:rPr>
-              <a:t>29.4% annualized</a:t>
-            </a:r>
-            <a:endParaRPr lang="en-US" sz="950" dirty="0"/>
-          </a:p>
-        </p:txBody>
-      </p:sp>
-      <p:sp>
-        <p:nvSpPr>
-          <p:cNvPr id="29" name="Shape 25"/>
-          <p:cNvSpPr/>
-          <p:nvPr/>
-        </p:nvSpPr>
-        <p:spPr>
-          <a:xfrm>
-            <a:off x="5715000" y="3776472"/>
-            <a:ext cx="2926080" cy="329184"/>
-          </a:xfrm>
-          <a:prstGeom prst="rect">
-            <a:avLst/>
-          </a:prstGeom>
-          <a:solidFill>
-            <a:srgbClr val="F0F4FF"/>
-          </a:solidFill>
-          <a:ln/>
-        </p:spPr>
-      </p:sp>
-      <p:sp>
-        <p:nvSpPr>
-          <p:cNvPr id="30" name="Text 26"/>
-          <p:cNvSpPr/>
-          <p:nvPr/>
-        </p:nvSpPr>
-        <p:spPr>
-          <a:xfrm>
-            <a:off x="5779008" y="3822192"/>
-            <a:ext cx="1554480" cy="256032"/>
-          </a:xfrm>
-          <a:prstGeom prst="rect">
-            <a:avLst/>
-          </a:prstGeom>
-          <a:noFill/>
-          <a:ln/>
-        </p:spPr>
-        <p:txBody>
-          <a:bodyPr wrap="square" lIns="0" tIns="0" rIns="0" bIns="0" rtlCol="0" anchor="ctr"/>
-          <a:lstStyle/>
-          <a:p>
-            <a:pPr indent="0" marL="0">
-              <a:buNone/>
-            </a:pPr>
-            <a:r>
-              <a:rPr lang="en-US" sz="950" dirty="0">
-                <a:solidFill>
-                  <a:srgbClr val="64748B"/>
-                </a:solidFill>
-                <a:latin typeface="Calibri" pitchFamily="34" charset="0"/>
-                <a:ea typeface="Calibri" pitchFamily="34" charset="-122"/>
-                <a:cs typeface="Calibri" pitchFamily="34" charset="-120"/>
-              </a:rPr>
-              <a:t>Samsung vol.</a:t>
-            </a:r>
-            <a:endParaRPr lang="en-US" sz="950" dirty="0"/>
-          </a:p>
-        </p:txBody>
-      </p:sp>
-      <p:sp>
-        <p:nvSpPr>
-          <p:cNvPr id="31" name="Text 27"/>
-          <p:cNvSpPr/>
-          <p:nvPr/>
-        </p:nvSpPr>
-        <p:spPr>
-          <a:xfrm>
-            <a:off x="7315200" y="3822192"/>
-            <a:ext cx="1188720" cy="256032"/>
-          </a:xfrm>
-          <a:prstGeom prst="rect">
-            <a:avLst/>
-          </a:prstGeom>
-          <a:noFill/>
-          <a:ln/>
-        </p:spPr>
-        <p:txBody>
-          <a:bodyPr wrap="square" lIns="0" tIns="0" rIns="0" bIns="0" rtlCol="0" anchor="ctr"/>
-          <a:lstStyle/>
-          <a:p>
-            <a:pPr algn="r" indent="0" marL="0">
-              <a:buNone/>
-            </a:pPr>
-            <a:r>
-              <a:rPr lang="en-US" sz="950" b="1" dirty="0">
-                <a:solidFill>
-                  <a:srgbClr val="1B2A4A"/>
-                </a:solidFill>
-                <a:latin typeface="Calibri" pitchFamily="34" charset="0"/>
-                <a:ea typeface="Calibri" pitchFamily="34" charset="-122"/>
-                <a:cs typeface="Calibri" pitchFamily="34" charset="-120"/>
-              </a:rPr>
-              <a:t>29.9% annualized</a:t>
-            </a:r>
-            <a:endParaRPr lang="en-US" sz="950" dirty="0"/>
-          </a:p>
-        </p:txBody>
-      </p:sp>
-      <p:sp>
-        <p:nvSpPr>
-          <p:cNvPr id="32" name="Shape 28"/>
-          <p:cNvSpPr/>
-          <p:nvPr/>
-        </p:nvSpPr>
-        <p:spPr>
-          <a:xfrm>
-            <a:off x="5715000" y="4169664"/>
-            <a:ext cx="2926080" cy="329184"/>
-          </a:xfrm>
-          <a:prstGeom prst="rect">
-            <a:avLst/>
-          </a:prstGeom>
-          <a:solidFill>
-            <a:srgbClr val="FFFFFF"/>
-          </a:solidFill>
-          <a:ln/>
-        </p:spPr>
-      </p:sp>
-      <p:sp>
-        <p:nvSpPr>
-          <p:cNvPr id="33" name="Text 29"/>
-          <p:cNvSpPr/>
-          <p:nvPr/>
-        </p:nvSpPr>
-        <p:spPr>
-          <a:xfrm>
-            <a:off x="5779008" y="4215384"/>
-            <a:ext cx="1554480" cy="256032"/>
-          </a:xfrm>
-          <a:prstGeom prst="rect">
-            <a:avLst/>
-          </a:prstGeom>
-          <a:noFill/>
-          <a:ln/>
-        </p:spPr>
-        <p:txBody>
-          <a:bodyPr wrap="square" lIns="0" tIns="0" rIns="0" bIns="0" rtlCol="0" anchor="ctr"/>
-          <a:lstStyle/>
-          <a:p>
-            <a:pPr indent="0" marL="0">
-              <a:buNone/>
-            </a:pPr>
-            <a:r>
-              <a:rPr lang="en-US" sz="950" dirty="0">
-                <a:solidFill>
-                  <a:srgbClr val="64748B"/>
-                </a:solidFill>
-                <a:latin typeface="Calibri" pitchFamily="34" charset="0"/>
-                <a:ea typeface="Calibri" pitchFamily="34" charset="-122"/>
-                <a:cs typeface="Calibri" pitchFamily="34" charset="-120"/>
-              </a:rPr>
-              <a:t>Apple Sharpe</a:t>
-            </a:r>
-            <a:endParaRPr lang="en-US" sz="950" dirty="0"/>
-          </a:p>
-        </p:txBody>
-      </p:sp>
-      <p:sp>
-        <p:nvSpPr>
-          <p:cNvPr id="34" name="Text 30"/>
-          <p:cNvSpPr/>
-          <p:nvPr/>
-        </p:nvSpPr>
-        <p:spPr>
-          <a:xfrm>
-            <a:off x="7315200" y="4215384"/>
-            <a:ext cx="1188720" cy="256032"/>
-          </a:xfrm>
-          <a:prstGeom prst="rect">
-            <a:avLst/>
-          </a:prstGeom>
-          <a:noFill/>
-          <a:ln/>
-        </p:spPr>
-        <p:txBody>
-          <a:bodyPr wrap="square" lIns="0" tIns="0" rIns="0" bIns="0" rtlCol="0" anchor="ctr"/>
-          <a:lstStyle/>
-          <a:p>
-            <a:pPr algn="r" indent="0" marL="0">
-              <a:buNone/>
-            </a:pPr>
-            <a:r>
-              <a:rPr lang="en-US" sz="950" b="1" dirty="0">
-                <a:solidFill>
-                  <a:srgbClr val="1B2A4A"/>
-                </a:solidFill>
-                <a:latin typeface="Calibri" pitchFamily="34" charset="0"/>
-                <a:ea typeface="Calibri" pitchFamily="34" charset="-122"/>
-                <a:cs typeface="Calibri" pitchFamily="34" charset="-120"/>
-              </a:rPr>
-              <a:t>1.05</a:t>
-            </a:r>
-            <a:endParaRPr lang="en-US" sz="950" dirty="0"/>
-          </a:p>
-        </p:txBody>
-      </p:sp>
-      <p:sp>
-        <p:nvSpPr>
-          <p:cNvPr id="35" name="Shape 31"/>
-          <p:cNvSpPr/>
-          <p:nvPr/>
-        </p:nvSpPr>
-        <p:spPr>
-          <a:xfrm>
-            <a:off x="5715000" y="4562856"/>
-            <a:ext cx="2926080" cy="329184"/>
-          </a:xfrm>
-          <a:prstGeom prst="rect">
-            <a:avLst/>
-          </a:prstGeom>
-          <a:solidFill>
-            <a:srgbClr val="F0F4FF"/>
-          </a:solidFill>
-          <a:ln/>
-        </p:spPr>
-      </p:sp>
-      <p:sp>
-        <p:nvSpPr>
-          <p:cNvPr id="36" name="Text 32"/>
-          <p:cNvSpPr/>
-          <p:nvPr/>
-        </p:nvSpPr>
-        <p:spPr>
-          <a:xfrm>
-            <a:off x="5779008" y="4608576"/>
-            <a:ext cx="1554480" cy="256032"/>
-          </a:xfrm>
-          <a:prstGeom prst="rect">
-            <a:avLst/>
-          </a:prstGeom>
-          <a:noFill/>
-          <a:ln/>
-        </p:spPr>
-        <p:txBody>
-          <a:bodyPr wrap="square" lIns="0" tIns="0" rIns="0" bIns="0" rtlCol="0" anchor="ctr"/>
-          <a:lstStyle/>
-          <a:p>
-            <a:pPr indent="0" marL="0">
-              <a:buNone/>
-            </a:pPr>
-            <a:r>
-              <a:rPr lang="en-US" sz="950" dirty="0">
-                <a:solidFill>
-                  <a:srgbClr val="64748B"/>
-                </a:solidFill>
-                <a:latin typeface="Calibri" pitchFamily="34" charset="0"/>
-                <a:ea typeface="Calibri" pitchFamily="34" charset="-122"/>
-                <a:cs typeface="Calibri" pitchFamily="34" charset="-120"/>
-              </a:rPr>
-              <a:t>Samsung Sharpe</a:t>
-            </a:r>
-            <a:endParaRPr lang="en-US" sz="950" dirty="0"/>
-          </a:p>
-        </p:txBody>
-      </p:sp>
-      <p:sp>
-        <p:nvSpPr>
-          <p:cNvPr id="37" name="Text 33"/>
-          <p:cNvSpPr/>
-          <p:nvPr/>
-        </p:nvSpPr>
-        <p:spPr>
-          <a:xfrm>
-            <a:off x="7315200" y="4608576"/>
-            <a:ext cx="1188720" cy="256032"/>
-          </a:xfrm>
-          <a:prstGeom prst="rect">
-            <a:avLst/>
-          </a:prstGeom>
-          <a:noFill/>
-          <a:ln/>
-        </p:spPr>
-        <p:txBody>
-          <a:bodyPr wrap="square" lIns="0" tIns="0" rIns="0" bIns="0" rtlCol="0" anchor="ctr"/>
-          <a:lstStyle/>
-          <a:p>
-            <a:pPr algn="r" indent="0" marL="0">
-              <a:buNone/>
-            </a:pPr>
-            <a:r>
-              <a:rPr lang="en-US" sz="950" b="1" dirty="0">
-                <a:solidFill>
-                  <a:srgbClr val="1B2A4A"/>
-                </a:solidFill>
-                <a:latin typeface="Calibri" pitchFamily="34" charset="0"/>
-                <a:ea typeface="Calibri" pitchFamily="34" charset="-122"/>
-                <a:cs typeface="Calibri" pitchFamily="34" charset="-120"/>
-              </a:rPr>
-              <a:t>1.02</a:t>
-            </a:r>
-            <a:endParaRPr lang="en-US" sz="950" dirty="0"/>
-          </a:p>
-        </p:txBody>
-      </p:sp>
     </p:spTree>
   </p:cSld>
   <p:clrMapOvr>
